--- a/docs/Reto2-Presentacion.pptx
+++ b/docs/Reto2-Presentacion.pptx
@@ -1904,8 +1904,8 @@
         </p:nvSpPr>
         <p:spPr>
           <a:xfrm>
-            <a:off x="822960" y="5486400"/>
-            <a:ext cx="54864" cy="914400"/>
+            <a:off x="822960" y="5349240"/>
+            <a:ext cx="54864" cy="1143000"/>
           </a:xfrm>
           <a:prstGeom prst="rect">
             <a:avLst/>
@@ -1929,8 +1929,8 @@
         </p:nvSpPr>
         <p:spPr>
           <a:xfrm>
-            <a:off x="1005840" y="5486400"/>
-            <a:ext cx="7315200" cy="411480"/>
+            <a:off x="1005840" y="5349240"/>
+            <a:ext cx="10058400" cy="274320"/>
           </a:xfrm>
           <a:prstGeom prst="rect">
             <a:avLst/>
@@ -1946,17 +1946,17 @@
               <a:buNone/>
             </a:pPr>
             <a:r>
-              <a:rPr lang="en-US" sz="1800" b="1" dirty="0">
-                <a:solidFill>
-                  <a:srgbClr val="FFFFFF"/>
-                </a:solidFill>
-                <a:latin typeface="Calibri" pitchFamily="34" charset="0"/>
-                <a:ea typeface="Calibri" pitchFamily="34" charset="-122"/>
-                <a:cs typeface="Calibri" pitchFamily="34" charset="-120"/>
-              </a:rPr>
-              <a:t>Erick Nieto</a:t>
-            </a:r>
-            <a:endParaRPr lang="en-US" sz="1800" dirty="0"/>
+              <a:rPr lang="en-US" sz="1100" b="1" spc="400" kern="0" dirty="0">
+                <a:solidFill>
+                  <a:srgbClr val="94A3B8"/>
+                </a:solidFill>
+                <a:latin typeface="Calibri" pitchFamily="34" charset="0"/>
+                <a:ea typeface="Calibri" pitchFamily="34" charset="-122"/>
+                <a:cs typeface="Calibri" pitchFamily="34" charset="-120"/>
+              </a:rPr>
+              <a:t>EQUIPO</a:t>
+            </a:r>
+            <a:endParaRPr lang="en-US" sz="1100" dirty="0"/>
           </a:p>
         </p:txBody>
       </p:sp>
@@ -1968,8 +1968,8 @@
         </p:nvSpPr>
         <p:spPr>
           <a:xfrm>
-            <a:off x="1005840" y="5897880"/>
-            <a:ext cx="10058400" cy="365760"/>
+            <a:off x="1005840" y="5650992"/>
+            <a:ext cx="5029200" cy="365760"/>
           </a:xfrm>
           <a:prstGeom prst="rect">
             <a:avLst/>
@@ -1985,9 +1985,165 @@
               <a:buNone/>
             </a:pPr>
             <a:r>
-              <a:rPr lang="en-US" sz="1200" dirty="0">
-                <a:solidFill>
-                  <a:srgbClr val="94A3B8"/>
+              <a:rPr lang="en-US" sz="1600" b="1" dirty="0">
+                <a:solidFill>
+                  <a:srgbClr val="FFFFFF"/>
+                </a:solidFill>
+                <a:latin typeface="Calibri" pitchFamily="34" charset="0"/>
+                <a:ea typeface="Calibri" pitchFamily="34" charset="-122"/>
+                <a:cs typeface="Calibri" pitchFamily="34" charset="-120"/>
+              </a:rPr>
+              <a:t>Luis Fernando Padilla</a:t>
+            </a:r>
+            <a:endParaRPr lang="en-US" sz="1600" dirty="0"/>
+          </a:p>
+        </p:txBody>
+      </p:sp>
+      <p:sp>
+        <p:nvSpPr>
+          <p:cNvPr id="11" name="Text 9"/>
+          <p:cNvSpPr/>
+          <p:nvPr/>
+        </p:nvSpPr>
+        <p:spPr>
+          <a:xfrm>
+            <a:off x="6126480" y="5650992"/>
+            <a:ext cx="5029200" cy="365760"/>
+          </a:xfrm>
+          <a:prstGeom prst="rect">
+            <a:avLst/>
+          </a:prstGeom>
+          <a:noFill/>
+          <a:ln/>
+        </p:spPr>
+        <p:txBody>
+          <a:bodyPr wrap="square" lIns="0" tIns="0" rIns="0" bIns="0" rtlCol="0" anchor="ctr"/>
+          <a:lstStyle/>
+          <a:p>
+            <a:pPr indent="0" marL="0">
+              <a:buNone/>
+            </a:pPr>
+            <a:r>
+              <a:rPr lang="en-US" sz="1600" b="1" dirty="0">
+                <a:solidFill>
+                  <a:srgbClr val="FFFFFF"/>
+                </a:solidFill>
+                <a:latin typeface="Calibri" pitchFamily="34" charset="0"/>
+                <a:ea typeface="Calibri" pitchFamily="34" charset="-122"/>
+                <a:cs typeface="Calibri" pitchFamily="34" charset="-120"/>
+              </a:rPr>
+              <a:t>Erick Nieto</a:t>
+            </a:r>
+            <a:endParaRPr lang="en-US" sz="1600" dirty="0"/>
+          </a:p>
+        </p:txBody>
+      </p:sp>
+      <p:sp>
+        <p:nvSpPr>
+          <p:cNvPr id="12" name="Text 10"/>
+          <p:cNvSpPr/>
+          <p:nvPr/>
+        </p:nvSpPr>
+        <p:spPr>
+          <a:xfrm>
+            <a:off x="1005840" y="6035040"/>
+            <a:ext cx="5029200" cy="365760"/>
+          </a:xfrm>
+          <a:prstGeom prst="rect">
+            <a:avLst/>
+          </a:prstGeom>
+          <a:noFill/>
+          <a:ln/>
+        </p:spPr>
+        <p:txBody>
+          <a:bodyPr wrap="square" lIns="0" tIns="0" rIns="0" bIns="0" rtlCol="0" anchor="ctr"/>
+          <a:lstStyle/>
+          <a:p>
+            <a:pPr indent="0" marL="0">
+              <a:buNone/>
+            </a:pPr>
+            <a:r>
+              <a:rPr lang="en-US" sz="1600" b="1" dirty="0">
+                <a:solidFill>
+                  <a:srgbClr val="FFFFFF"/>
+                </a:solidFill>
+                <a:latin typeface="Calibri" pitchFamily="34" charset="0"/>
+                <a:ea typeface="Calibri" pitchFamily="34" charset="-122"/>
+                <a:cs typeface="Calibri" pitchFamily="34" charset="-120"/>
+              </a:rPr>
+              <a:t>Raul Valencia</a:t>
+            </a:r>
+            <a:endParaRPr lang="en-US" sz="1600" dirty="0"/>
+          </a:p>
+        </p:txBody>
+      </p:sp>
+      <p:sp>
+        <p:nvSpPr>
+          <p:cNvPr id="13" name="Text 11"/>
+          <p:cNvSpPr/>
+          <p:nvPr/>
+        </p:nvSpPr>
+        <p:spPr>
+          <a:xfrm>
+            <a:off x="6126480" y="6035040"/>
+            <a:ext cx="5029200" cy="365760"/>
+          </a:xfrm>
+          <a:prstGeom prst="rect">
+            <a:avLst/>
+          </a:prstGeom>
+          <a:noFill/>
+          <a:ln/>
+        </p:spPr>
+        <p:txBody>
+          <a:bodyPr wrap="square" lIns="0" tIns="0" rIns="0" bIns="0" rtlCol="0" anchor="ctr"/>
+          <a:lstStyle/>
+          <a:p>
+            <a:pPr indent="0" marL="0">
+              <a:buNone/>
+            </a:pPr>
+            <a:r>
+              <a:rPr lang="en-US" sz="1600" b="1" dirty="0">
+                <a:solidFill>
+                  <a:srgbClr val="FFFFFF"/>
+                </a:solidFill>
+                <a:latin typeface="Calibri" pitchFamily="34" charset="0"/>
+                <a:ea typeface="Calibri" pitchFamily="34" charset="-122"/>
+                <a:cs typeface="Calibri" pitchFamily="34" charset="-120"/>
+              </a:rPr>
+              <a:t>Juan Bohorquez</a:t>
+            </a:r>
+            <a:endParaRPr lang="en-US" sz="1600" dirty="0"/>
+          </a:p>
+        </p:txBody>
+      </p:sp>
+      <p:sp>
+        <p:nvSpPr>
+          <p:cNvPr id="14" name="Text 12"/>
+          <p:cNvSpPr/>
+          <p:nvPr/>
+        </p:nvSpPr>
+        <p:spPr>
+          <a:xfrm>
+            <a:off x="822960" y="6537960"/>
+            <a:ext cx="10058400" cy="274320"/>
+          </a:xfrm>
+          <a:prstGeom prst="rect">
+            <a:avLst/>
+          </a:prstGeom>
+          <a:noFill/>
+          <a:ln/>
+        </p:spPr>
+        <p:txBody>
+          <a:bodyPr wrap="square" lIns="0" tIns="0" rIns="0" bIns="0" rtlCol="0" anchor="ctr"/>
+          <a:lstStyle/>
+          <a:p>
+            <a:pPr indent="0" marL="0">
+              <a:buNone/>
+            </a:pPr>
+            <a:r>
+              <a:rPr lang="en-US" sz="1100" dirty="0">
+                <a:solidFill>
+                  <a:srgbClr val="64748B"/>
                 </a:solidFill>
                 <a:latin typeface="Calibri" pitchFamily="34" charset="0"/>
                 <a:ea typeface="Calibri" pitchFamily="34" charset="-122"/>
@@ -1995,7 +2151,7 @@
               </a:rPr>
               <a:t>2026-04-27  |  github.com/Prospect121/reto2-fleet-alerts</a:t>
             </a:r>
-            <a:endParaRPr lang="en-US" sz="1200" dirty="0"/>
+            <a:endParaRPr lang="en-US" sz="1100" dirty="0"/>
           </a:p>
         </p:txBody>
       </p:sp>
@@ -2376,7 +2532,7 @@
         </p:nvSpPr>
         <p:spPr>
           <a:xfrm>
-            <a:off x="822960" y="6126480"/>
+            <a:off x="822960" y="5989320"/>
             <a:ext cx="10515600" cy="274320"/>
           </a:xfrm>
           <a:prstGeom prst="rect">
@@ -2393,7 +2549,46 @@
               <a:buNone/>
             </a:pPr>
             <a:r>
-              <a:rPr lang="en-US" sz="1100" dirty="0">
+              <a:rPr lang="en-US" sz="1100" b="1" dirty="0">
+                <a:solidFill>
+                  <a:srgbClr val="CBD5E1"/>
+                </a:solidFill>
+                <a:latin typeface="Calibri" pitchFamily="34" charset="0"/>
+                <a:ea typeface="Calibri" pitchFamily="34" charset="-122"/>
+                <a:cs typeface="Calibri" pitchFamily="34" charset="-120"/>
+              </a:rPr>
+              <a:t>Equipo: Luis Fernando Padilla  |  Erick Nieto  |  Raul Valencia  |  Juan Bohorquez</a:t>
+            </a:r>
+            <a:endParaRPr lang="en-US" sz="1100" dirty="0"/>
+          </a:p>
+        </p:txBody>
+      </p:sp>
+      <p:sp>
+        <p:nvSpPr>
+          <p:cNvPr id="12" name="Text 10"/>
+          <p:cNvSpPr/>
+          <p:nvPr/>
+        </p:nvSpPr>
+        <p:spPr>
+          <a:xfrm>
+            <a:off x="822960" y="6263640"/>
+            <a:ext cx="10515600" cy="274320"/>
+          </a:xfrm>
+          <a:prstGeom prst="rect">
+            <a:avLst/>
+          </a:prstGeom>
+          <a:noFill/>
+          <a:ln/>
+        </p:spPr>
+        <p:txBody>
+          <a:bodyPr wrap="square" lIns="0" tIns="0" rIns="0" bIns="0" rtlCol="0" anchor="ctr"/>
+          <a:lstStyle/>
+          <a:p>
+            <a:pPr indent="0" marL="0">
+              <a:buNone/>
+            </a:pPr>
+            <a:r>
+              <a:rPr lang="en-US" sz="1000" dirty="0">
                 <a:solidFill>
                   <a:srgbClr val="64748B"/>
                 </a:solidFill>
@@ -2401,9 +2596,9 @@
                 <a:ea typeface="Calibri" pitchFamily="34" charset="-122"/>
                 <a:cs typeface="Calibri" pitchFamily="34" charset="-120"/>
               </a:rPr>
-              <a:t>Erick Nieto  |  Diplomado Arquitecturas Cloud  |  Modulo 2  |  2026-04-27</a:t>
-            </a:r>
-            <a:endParaRPr lang="en-US" sz="1100" dirty="0"/>
+              <a:t>Diplomado Arquitecturas Cloud  |  Modulo 2  |  2026-04-27</a:t>
+            </a:r>
+            <a:endParaRPr lang="en-US" sz="1000" dirty="0"/>
           </a:p>
         </p:txBody>
       </p:sp>
@@ -3240,7 +3435,7 @@
         <p:spPr>
           <a:xfrm>
             <a:off x="457200" y="6446520"/>
-            <a:ext cx="8229600" cy="274320"/>
+            <a:ext cx="10515600" cy="274320"/>
           </a:xfrm>
           <a:prstGeom prst="rect">
             <a:avLst/>
@@ -3256,7 +3451,7 @@
               <a:buNone/>
             </a:pPr>
             <a:r>
-              <a:rPr lang="en-US" sz="1000" dirty="0">
+              <a:rPr lang="en-US" sz="900" dirty="0">
                 <a:solidFill>
                   <a:srgbClr val="64748B"/>
                 </a:solidFill>
@@ -3264,9 +3459,9 @@
                 <a:ea typeface="Calibri" pitchFamily="34" charset="-122"/>
                 <a:cs typeface="Calibri" pitchFamily="34" charset="-120"/>
               </a:rPr>
-              <a:t>Reto 2 - Sistema de Alerta Temprana | Erick Nieto | 2026-04-27</a:t>
-            </a:r>
-            <a:endParaRPr lang="en-US" sz="1000" dirty="0"/>
+              <a:t>Reto 2 - Sistema de Alerta Temprana | Equipo: Padilla / Nieto / Valencia / Bohorquez | 2026-04-27</a:t>
+            </a:r>
+            <a:endParaRPr lang="en-US" sz="900" dirty="0"/>
           </a:p>
         </p:txBody>
       </p:sp>
@@ -3295,7 +3490,7 @@
               <a:buNone/>
             </a:pPr>
             <a:r>
-              <a:rPr lang="en-US" sz="1000" dirty="0">
+              <a:rPr lang="en-US" sz="900" dirty="0">
                 <a:solidFill>
                   <a:srgbClr val="64748B"/>
                 </a:solidFill>
@@ -3305,7 +3500,7 @@
               </a:rPr>
               <a:t>2</a:t>
             </a:r>
-            <a:endParaRPr lang="en-US" sz="1000" dirty="0"/>
+            <a:endParaRPr lang="en-US" sz="900" dirty="0"/>
           </a:p>
         </p:txBody>
       </p:sp>
@@ -3452,7 +3647,7 @@
         <p:spPr>
           <a:xfrm>
             <a:off x="457200" y="6446520"/>
-            <a:ext cx="8229600" cy="274320"/>
+            <a:ext cx="10515600" cy="274320"/>
           </a:xfrm>
           <a:prstGeom prst="rect">
             <a:avLst/>
@@ -3468,7 +3663,7 @@
               <a:buNone/>
             </a:pPr>
             <a:r>
-              <a:rPr lang="en-US" sz="1000" dirty="0">
+              <a:rPr lang="en-US" sz="900" dirty="0">
                 <a:solidFill>
                   <a:srgbClr val="64748B"/>
                 </a:solidFill>
@@ -3476,9 +3671,9 @@
                 <a:ea typeface="Calibri" pitchFamily="34" charset="-122"/>
                 <a:cs typeface="Calibri" pitchFamily="34" charset="-120"/>
               </a:rPr>
-              <a:t>Reto 2 - Sistema de Alerta Temprana | Erick Nieto | 2026-04-27</a:t>
-            </a:r>
-            <a:endParaRPr lang="en-US" sz="1000" dirty="0"/>
+              <a:t>Reto 2 - Sistema de Alerta Temprana | Equipo: Padilla / Nieto / Valencia / Bohorquez | 2026-04-27</a:t>
+            </a:r>
+            <a:endParaRPr lang="en-US" sz="900" dirty="0"/>
           </a:p>
         </p:txBody>
       </p:sp>
@@ -3507,7 +3702,7 @@
               <a:buNone/>
             </a:pPr>
             <a:r>
-              <a:rPr lang="en-US" sz="1000" dirty="0">
+              <a:rPr lang="en-US" sz="900" dirty="0">
                 <a:solidFill>
                   <a:srgbClr val="64748B"/>
                 </a:solidFill>
@@ -3517,7 +3712,7 @@
               </a:rPr>
               <a:t>3</a:t>
             </a:r>
-            <a:endParaRPr lang="en-US" sz="1000" dirty="0"/>
+            <a:endParaRPr lang="en-US" sz="900" dirty="0"/>
           </a:p>
         </p:txBody>
       </p:sp>
@@ -4862,7 +5057,7 @@
         <p:spPr>
           <a:xfrm>
             <a:off x="457200" y="6446520"/>
-            <a:ext cx="8229600" cy="274320"/>
+            <a:ext cx="10515600" cy="274320"/>
           </a:xfrm>
           <a:prstGeom prst="rect">
             <a:avLst/>
@@ -4878,7 +5073,7 @@
               <a:buNone/>
             </a:pPr>
             <a:r>
-              <a:rPr lang="en-US" sz="1000" dirty="0">
+              <a:rPr lang="en-US" sz="900" dirty="0">
                 <a:solidFill>
                   <a:srgbClr val="64748B"/>
                 </a:solidFill>
@@ -4886,9 +5081,9 @@
                 <a:ea typeface="Calibri" pitchFamily="34" charset="-122"/>
                 <a:cs typeface="Calibri" pitchFamily="34" charset="-120"/>
               </a:rPr>
-              <a:t>Reto 2 - Sistema de Alerta Temprana | Erick Nieto | 2026-04-27</a:t>
-            </a:r>
-            <a:endParaRPr lang="en-US" sz="1000" dirty="0"/>
+              <a:t>Reto 2 - Sistema de Alerta Temprana | Equipo: Padilla / Nieto / Valencia / Bohorquez | 2026-04-27</a:t>
+            </a:r>
+            <a:endParaRPr lang="en-US" sz="900" dirty="0"/>
           </a:p>
         </p:txBody>
       </p:sp>
@@ -4917,7 +5112,7 @@
               <a:buNone/>
             </a:pPr>
             <a:r>
-              <a:rPr lang="en-US" sz="1000" dirty="0">
+              <a:rPr lang="en-US" sz="900" dirty="0">
                 <a:solidFill>
                   <a:srgbClr val="64748B"/>
                 </a:solidFill>
@@ -4927,7 +5122,7 @@
               </a:rPr>
               <a:t>4</a:t>
             </a:r>
-            <a:endParaRPr lang="en-US" sz="1000" dirty="0"/>
+            <a:endParaRPr lang="en-US" sz="900" dirty="0"/>
           </a:p>
         </p:txBody>
       </p:sp>
@@ -5479,7 +5674,7 @@
         <p:spPr>
           <a:xfrm>
             <a:off x="457200" y="6446520"/>
-            <a:ext cx="8229600" cy="274320"/>
+            <a:ext cx="10515600" cy="274320"/>
           </a:xfrm>
           <a:prstGeom prst="rect">
             <a:avLst/>
@@ -5495,7 +5690,7 @@
               <a:buNone/>
             </a:pPr>
             <a:r>
-              <a:rPr lang="en-US" sz="1000" dirty="0">
+              <a:rPr lang="en-US" sz="900" dirty="0">
                 <a:solidFill>
                   <a:srgbClr val="64748B"/>
                 </a:solidFill>
@@ -5503,9 +5698,9 @@
                 <a:ea typeface="Calibri" pitchFamily="34" charset="-122"/>
                 <a:cs typeface="Calibri" pitchFamily="34" charset="-120"/>
               </a:rPr>
-              <a:t>Reto 2 - Sistema de Alerta Temprana | Erick Nieto | 2026-04-27</a:t>
-            </a:r>
-            <a:endParaRPr lang="en-US" sz="1000" dirty="0"/>
+              <a:t>Reto 2 - Sistema de Alerta Temprana | Equipo: Padilla / Nieto / Valencia / Bohorquez | 2026-04-27</a:t>
+            </a:r>
+            <a:endParaRPr lang="en-US" sz="900" dirty="0"/>
           </a:p>
         </p:txBody>
       </p:sp>
@@ -5534,7 +5729,7 @@
               <a:buNone/>
             </a:pPr>
             <a:r>
-              <a:rPr lang="en-US" sz="1000" dirty="0">
+              <a:rPr lang="en-US" sz="900" dirty="0">
                 <a:solidFill>
                   <a:srgbClr val="64748B"/>
                 </a:solidFill>
@@ -5544,7 +5739,7 @@
               </a:rPr>
               <a:t>5</a:t>
             </a:r>
-            <a:endParaRPr lang="en-US" sz="1000" dirty="0"/>
+            <a:endParaRPr lang="en-US" sz="900" dirty="0"/>
           </a:p>
         </p:txBody>
       </p:sp>
@@ -6335,7 +6530,7 @@
         <p:spPr>
           <a:xfrm>
             <a:off x="457200" y="6446520"/>
-            <a:ext cx="8229600" cy="274320"/>
+            <a:ext cx="10515600" cy="274320"/>
           </a:xfrm>
           <a:prstGeom prst="rect">
             <a:avLst/>
@@ -6351,7 +6546,7 @@
               <a:buNone/>
             </a:pPr>
             <a:r>
-              <a:rPr lang="en-US" sz="1000" dirty="0">
+              <a:rPr lang="en-US" sz="900" dirty="0">
                 <a:solidFill>
                   <a:srgbClr val="64748B"/>
                 </a:solidFill>
@@ -6359,9 +6554,9 @@
                 <a:ea typeface="Calibri" pitchFamily="34" charset="-122"/>
                 <a:cs typeface="Calibri" pitchFamily="34" charset="-120"/>
               </a:rPr>
-              <a:t>Reto 2 - Sistema de Alerta Temprana | Erick Nieto | 2026-04-27</a:t>
-            </a:r>
-            <a:endParaRPr lang="en-US" sz="1000" dirty="0"/>
+              <a:t>Reto 2 - Sistema de Alerta Temprana | Equipo: Padilla / Nieto / Valencia / Bohorquez | 2026-04-27</a:t>
+            </a:r>
+            <a:endParaRPr lang="en-US" sz="900" dirty="0"/>
           </a:p>
         </p:txBody>
       </p:sp>
@@ -6390,7 +6585,7 @@
               <a:buNone/>
             </a:pPr>
             <a:r>
-              <a:rPr lang="en-US" sz="1000" dirty="0">
+              <a:rPr lang="en-US" sz="900" dirty="0">
                 <a:solidFill>
                   <a:srgbClr val="64748B"/>
                 </a:solidFill>
@@ -6400,7 +6595,7 @@
               </a:rPr>
               <a:t>6</a:t>
             </a:r>
-            <a:endParaRPr lang="en-US" sz="1000" dirty="0"/>
+            <a:endParaRPr lang="en-US" sz="900" dirty="0"/>
           </a:p>
         </p:txBody>
       </p:sp>
@@ -7355,7 +7550,7 @@
         <p:spPr>
           <a:xfrm>
             <a:off x="457200" y="6446520"/>
-            <a:ext cx="8229600" cy="274320"/>
+            <a:ext cx="10515600" cy="274320"/>
           </a:xfrm>
           <a:prstGeom prst="rect">
             <a:avLst/>
@@ -7371,7 +7566,7 @@
               <a:buNone/>
             </a:pPr>
             <a:r>
-              <a:rPr lang="en-US" sz="1000" dirty="0">
+              <a:rPr lang="en-US" sz="900" dirty="0">
                 <a:solidFill>
                   <a:srgbClr val="64748B"/>
                 </a:solidFill>
@@ -7379,9 +7574,9 @@
                 <a:ea typeface="Calibri" pitchFamily="34" charset="-122"/>
                 <a:cs typeface="Calibri" pitchFamily="34" charset="-120"/>
               </a:rPr>
-              <a:t>Reto 2 - Sistema de Alerta Temprana | Erick Nieto | 2026-04-27</a:t>
-            </a:r>
-            <a:endParaRPr lang="en-US" sz="1000" dirty="0"/>
+              <a:t>Reto 2 - Sistema de Alerta Temprana | Equipo: Padilla / Nieto / Valencia / Bohorquez | 2026-04-27</a:t>
+            </a:r>
+            <a:endParaRPr lang="en-US" sz="900" dirty="0"/>
           </a:p>
         </p:txBody>
       </p:sp>
@@ -7410,7 +7605,7 @@
               <a:buNone/>
             </a:pPr>
             <a:r>
-              <a:rPr lang="en-US" sz="1000" dirty="0">
+              <a:rPr lang="en-US" sz="900" dirty="0">
                 <a:solidFill>
                   <a:srgbClr val="64748B"/>
                 </a:solidFill>
@@ -7420,7 +7615,7 @@
               </a:rPr>
               <a:t>7</a:t>
             </a:r>
-            <a:endParaRPr lang="en-US" sz="1000" dirty="0"/>
+            <a:endParaRPr lang="en-US" sz="900" dirty="0"/>
           </a:p>
         </p:txBody>
       </p:sp>
@@ -8170,7 +8365,7 @@
         <p:spPr>
           <a:xfrm>
             <a:off x="457200" y="6446520"/>
-            <a:ext cx="8229600" cy="274320"/>
+            <a:ext cx="10515600" cy="274320"/>
           </a:xfrm>
           <a:prstGeom prst="rect">
             <a:avLst/>
@@ -8186,7 +8381,7 @@
               <a:buNone/>
             </a:pPr>
             <a:r>
-              <a:rPr lang="en-US" sz="1000" dirty="0">
+              <a:rPr lang="en-US" sz="900" dirty="0">
                 <a:solidFill>
                   <a:srgbClr val="64748B"/>
                 </a:solidFill>
@@ -8194,9 +8389,9 @@
                 <a:ea typeface="Calibri" pitchFamily="34" charset="-122"/>
                 <a:cs typeface="Calibri" pitchFamily="34" charset="-120"/>
               </a:rPr>
-              <a:t>Reto 2 - Sistema de Alerta Temprana | Erick Nieto | 2026-04-27</a:t>
-            </a:r>
-            <a:endParaRPr lang="en-US" sz="1000" dirty="0"/>
+              <a:t>Reto 2 - Sistema de Alerta Temprana | Equipo: Padilla / Nieto / Valencia / Bohorquez | 2026-04-27</a:t>
+            </a:r>
+            <a:endParaRPr lang="en-US" sz="900" dirty="0"/>
           </a:p>
         </p:txBody>
       </p:sp>
@@ -8225,7 +8420,7 @@
               <a:buNone/>
             </a:pPr>
             <a:r>
-              <a:rPr lang="en-US" sz="1000" dirty="0">
+              <a:rPr lang="en-US" sz="900" dirty="0">
                 <a:solidFill>
                   <a:srgbClr val="64748B"/>
                 </a:solidFill>
@@ -8235,7 +8430,7 @@
               </a:rPr>
               <a:t>8</a:t>
             </a:r>
-            <a:endParaRPr lang="en-US" sz="1000" dirty="0"/>
+            <a:endParaRPr lang="en-US" sz="900" dirty="0"/>
           </a:p>
         </p:txBody>
       </p:sp>

--- a/docs/Reto2-Presentacion.pptx
+++ b/docs/Reto2-Presentacion.pptx
@@ -2299,7 +2299,7 @@
         <p:spPr>
           <a:xfrm>
             <a:off x="822960" y="3840480"/>
-            <a:ext cx="10515600" cy="1828800"/>
+            <a:ext cx="10515600" cy="2194560"/>
           </a:xfrm>
           <a:prstGeom prst="rect">
             <a:avLst/>
@@ -2324,7 +2324,7 @@
         <p:spPr>
           <a:xfrm>
             <a:off x="822960" y="3840480"/>
-            <a:ext cx="73152" cy="1828800"/>
+            <a:ext cx="73152" cy="2194560"/>
           </a:xfrm>
           <a:prstGeom prst="rect">
             <a:avLst/>
@@ -2451,7 +2451,7 @@
                 <a:ea typeface="Calibri" pitchFamily="34" charset="-122"/>
                 <a:cs typeface="Calibri" pitchFamily="34" charset="-120"/>
               </a:rPr>
-              <a:t>Rama: v2-security-and-latency  |  Infra: 100% Terraform (30 recursos)  |  Lambda: Python 3.12 ARM64 + SnapStart</a:t>
+              <a:t>Rama: v2-security-and-latency</a:t>
             </a:r>
             <a:endParaRPr lang="en-US" sz="1300" dirty="0"/>
           </a:p>
@@ -2465,8 +2465,8 @@
         </p:nvSpPr>
         <p:spPr>
           <a:xfrm>
-            <a:off x="1097280" y="5166360"/>
-            <a:ext cx="10058400" cy="365760"/>
+            <a:off x="1097280" y="5074920"/>
+            <a:ext cx="10058400" cy="914400"/>
           </a:xfrm>
           <a:prstGeom prst="rect">
             <a:avLst/>
@@ -2479,76 +2479,91 @@
           <a:lstStyle/>
           <a:p>
             <a:pPr indent="0" marL="0">
+              <a:spcAft>
+                <a:spcPts val="400"/>
+              </a:spcAft>
               <a:buNone/>
             </a:pPr>
             <a:r>
               <a:rPr lang="en-US" sz="1200" dirty="0">
                 <a:solidFill>
+                  <a:srgbClr val="CBD5E1"/>
+                </a:solidFill>
+                <a:latin typeface="Calibri" pitchFamily="34" charset="0"/>
+                <a:ea typeface="Calibri" pitchFamily="34" charset="-122"/>
+                <a:cs typeface="Calibri" pitchFamily="34" charset="-120"/>
+              </a:rPr>
+              <a:t>Infraestructura: 100% Terraform (30 recursos AWS)</a:t>
+            </a:r>
+            <a:endParaRPr lang="en-US" sz="1200" dirty="0"/>
+          </a:p>
+          <a:p>
+            <a:pPr indent="0" marL="0">
+              <a:spcAft>
+                <a:spcPts val="400"/>
+              </a:spcAft>
+              <a:buNone/>
+            </a:pPr>
+            <a:r>
+              <a:rPr lang="en-US" sz="1200" dirty="0">
+                <a:solidFill>
+                  <a:srgbClr val="CBD5E1"/>
+                </a:solidFill>
+                <a:latin typeface="Calibri" pitchFamily="34" charset="0"/>
+                <a:ea typeface="Calibri" pitchFamily="34" charset="-122"/>
+                <a:cs typeface="Calibri" pitchFamily="34" charset="-120"/>
+              </a:rPr>
+              <a:t>Procesador: AWS Lambda Python 3.12 ARM64 + SnapStart</a:t>
+            </a:r>
+            <a:endParaRPr lang="en-US" sz="1200" dirty="0"/>
+          </a:p>
+          <a:p>
+            <a:pPr indent="0" marL="0">
+              <a:spcAft>
+                <a:spcPts val="400"/>
+              </a:spcAft>
+              <a:buNone/>
+            </a:pPr>
+            <a:r>
+              <a:rPr lang="en-US" sz="1200" dirty="0">
+                <a:solidFill>
                   <a:srgbClr val="60A5FA"/>
                 </a:solidFill>
-                <a:latin typeface="Consolas" pitchFamily="34" charset="0"/>
-                <a:ea typeface="Consolas" pitchFamily="34" charset="-122"/>
-                <a:cs typeface="Consolas" pitchFamily="34" charset="-120"/>
-              </a:rPr>
-              <a:t>docs/ARCHITECTURE.md   </a:t>
-            </a:r>
+                <a:latin typeface="Calibri" pitchFamily="34" charset="0"/>
+                <a:ea typeface="Calibri" pitchFamily="34" charset="-122"/>
+                <a:cs typeface="Calibri" pitchFamily="34" charset="-120"/>
+              </a:rPr>
+              <a:t>Resultado: 1000/1000 OK | Lambda &gt; SES 254 ms | Total k6 &gt; Gmail &lt; 15 s</a:t>
+            </a:r>
+            <a:endParaRPr lang="en-US" sz="1200" dirty="0"/>
+          </a:p>
+        </p:txBody>
+      </p:sp>
+      <p:sp>
+        <p:nvSpPr>
+          <p:cNvPr id="11" name="Text 9"/>
+          <p:cNvSpPr/>
+          <p:nvPr/>
+        </p:nvSpPr>
+        <p:spPr>
+          <a:xfrm>
+            <a:off x="822960" y="6172200"/>
+            <a:ext cx="10515600" cy="274320"/>
+          </a:xfrm>
+          <a:prstGeom prst="rect">
+            <a:avLst/>
+          </a:prstGeom>
+          <a:noFill/>
+          <a:ln/>
+        </p:spPr>
+        <p:txBody>
+          <a:bodyPr wrap="square" lIns="0" tIns="0" rIns="0" bIns="0" rtlCol="0" anchor="ctr"/>
+          <a:lstStyle/>
+          <a:p>
             <a:pPr indent="0" marL="0">
               <a:buNone/>
             </a:pPr>
             <a:r>
-              <a:rPr lang="en-US" sz="1200" dirty="0">
-                <a:solidFill>
-                  <a:srgbClr val="60A5FA"/>
-                </a:solidFill>
-                <a:latin typeface="Consolas" pitchFamily="34" charset="0"/>
-                <a:ea typeface="Consolas" pitchFamily="34" charset="-122"/>
-                <a:cs typeface="Consolas" pitchFamily="34" charset="-120"/>
-              </a:rPr>
-              <a:t>docs/execution-logs.txt   </a:t>
-            </a:r>
-            <a:pPr indent="0" marL="0">
-              <a:buNone/>
-            </a:pPr>
-            <a:r>
-              <a:rPr lang="en-US" sz="1200" dirty="0">
-                <a:solidFill>
-                  <a:srgbClr val="60A5FA"/>
-                </a:solidFill>
-                <a:latin typeface="Consolas" pitchFamily="34" charset="0"/>
-                <a:ea typeface="Consolas" pitchFamily="34" charset="-122"/>
-                <a:cs typeface="Consolas" pitchFamily="34" charset="-120"/>
-              </a:rPr>
-              <a:t>docs/VIDEO_GUIDE.md</a:t>
-            </a:r>
-            <a:endParaRPr lang="en-US" sz="1200" dirty="0"/>
-          </a:p>
-        </p:txBody>
-      </p:sp>
-      <p:sp>
-        <p:nvSpPr>
-          <p:cNvPr id="11" name="Text 9"/>
-          <p:cNvSpPr/>
-          <p:nvPr/>
-        </p:nvSpPr>
-        <p:spPr>
-          <a:xfrm>
-            <a:off x="822960" y="5989320"/>
-            <a:ext cx="10515600" cy="274320"/>
-          </a:xfrm>
-          <a:prstGeom prst="rect">
-            <a:avLst/>
-          </a:prstGeom>
-          <a:noFill/>
-          <a:ln/>
-        </p:spPr>
-        <p:txBody>
-          <a:bodyPr wrap="square" lIns="0" tIns="0" rIns="0" bIns="0" rtlCol="0" anchor="ctr"/>
-          <a:lstStyle/>
-          <a:p>
-            <a:pPr indent="0" marL="0">
-              <a:buNone/>
-            </a:pPr>
-            <a:r>
               <a:rPr lang="en-US" sz="1100" b="1" dirty="0">
                 <a:solidFill>
                   <a:srgbClr val="CBD5E1"/>
@@ -2571,7 +2586,7 @@
         </p:nvSpPr>
         <p:spPr>
           <a:xfrm>
-            <a:off x="822960" y="6263640"/>
+            <a:off x="822960" y="6446520"/>
             <a:ext cx="10515600" cy="274320"/>
           </a:xfrm>
           <a:prstGeom prst="rect">
@@ -8994,7 +9009,7 @@
                           <a:ea typeface="Calibri" pitchFamily="34" charset="-122"/>
                           <a:cs typeface="Calibri" pitchFamily="34" charset="-120"/>
                         </a:rPr>
-                        <a:t>Slide 4 + ARCHITECTURE.md seccion 2</a:t>
+                        <a:t>Slide 4 (tabla de 5 decisiones clave)</a:t>
                       </a:r>
                       <a:endParaRPr lang="en-US" sz="1300" dirty="0">
                         <a:latin typeface="Calibri" charset="0"/>
@@ -9256,7 +9271,7 @@
                           <a:ea typeface="Calibri" pitchFamily="34" charset="-122"/>
                           <a:cs typeface="Calibri" pitchFamily="34" charset="-120"/>
                         </a:rPr>
-                        <a:t>Slide 5 + ARCHITECTURE.md seccion 3</a:t>
+                        <a:t>Slide 5 (Performance + atributos secundarios)</a:t>
                       </a:r>
                       <a:endParaRPr lang="en-US" sz="1300" dirty="0">
                         <a:latin typeface="Calibri" charset="0"/>
@@ -9518,7 +9533,7 @@
                           <a:ea typeface="Calibri" pitchFamily="34" charset="-122"/>
                           <a:cs typeface="Calibri" pitchFamily="34" charset="-120"/>
                         </a:rPr>
-                        <a:t>Slide 3 (architecture.drawio.svg)</a:t>
+                        <a:t>Slide 3 (diagrama completo us-east-1)</a:t>
                       </a:r>
                       <a:endParaRPr lang="en-US" sz="1300" dirty="0">
                         <a:latin typeface="Calibri" charset="0"/>
@@ -9780,7 +9795,7 @@
                           <a:ea typeface="Calibri" pitchFamily="34" charset="-122"/>
                           <a:cs typeface="Calibri" pitchFamily="34" charset="-120"/>
                         </a:rPr>
-                        <a:t>Slide 6 + ARCHITECTURE.md seccion 4</a:t>
+                        <a:t>Slide 6 (4 categorias SEI)</a:t>
                       </a:r>
                       <a:endParaRPr lang="en-US" sz="1300" dirty="0">
                         <a:latin typeface="Calibri" charset="0"/>
@@ -10042,7 +10057,7 @@
                           <a:ea typeface="Calibri" pitchFamily="34" charset="-122"/>
                           <a:cs typeface="Calibri" pitchFamily="34" charset="-120"/>
                         </a:rPr>
-                        <a:t>Demo en vivo + execution-logs.txt</a:t>
+                        <a:t>Slide 8 (1000/1000, 254ms, &lt;15s)</a:t>
                       </a:r>
                       <a:endParaRPr lang="en-US" sz="1300" dirty="0">
                         <a:latin typeface="Calibri" charset="0"/>
@@ -10304,7 +10319,7 @@
                           <a:ea typeface="Calibri" pitchFamily="34" charset="-122"/>
                           <a:cs typeface="Calibri" pitchFamily="34" charset="-120"/>
                         </a:rPr>
-                        <a:t>CloudWatch [EMERGENCY_RECEIVED] / [EMAIL_SENT]</a:t>
+                        <a:t>Slide 8 + CloudWatch Live Tail en demo</a:t>
                       </a:r>
                       <a:endParaRPr lang="en-US" sz="1300" dirty="0">
                         <a:latin typeface="Calibri" charset="0"/>

--- a/docs/Reto2-Presentacion.pptx
+++ b/docs/Reto2-Presentacion.pptx
@@ -4,6 +4,9 @@
   <p:sldMasterIdLst>
     <p:sldMasterId id="2147483648" r:id="rId1"/>
   </p:sldMasterIdLst>
+  <p:notesMasterIdLst>
+    <p:notesMasterId r:id="rId12"/>
+  </p:notesMasterIdLst>
   <p:sldIdLst>
     <p:sldId id="256" r:id="rId2"/>
     <p:sldId id="257" r:id="rId3"/>
@@ -16,9 +19,6 @@
     <p:sldId id="264" r:id="rId10"/>
     <p:sldId id="265" r:id="rId11"/>
   </p:sldIdLst>
-  <p:notesMasterIdLst>
-    <p:notesMasterId r:id="rId12"/>
-  </p:notesMasterIdLst>
   <p:sldSz cx="12192000" cy="6858000"/>
   <p:notesSz cx="6858000" cy="12192000"/>
   <p:defaultTextStyle>
@@ -113,6 +113,17 @@
       </a:defRPr>
     </a:lvl9pPr>
   </p:defaultTextStyle>
+  <p:extLst>
+    <p:ext uri="{EFAFB233-063F-42B5-8137-9DF3F51BA10A}">
+      <p15:sldGuideLst xmlns:p15="http://schemas.microsoft.com/office/powerpoint/2012/main">
+        <p15:guide id="1" orient="horz" pos="2160" userDrawn="1">
+          <p15:clr>
+            <a:srgbClr val="A4A3A4"/>
+          </p15:clr>
+        </p15:guide>
+      </p15:sldGuideLst>
+    </p:ext>
+  </p:extLst>
 </p:presentation>
 </file>
 
@@ -138,234 +149,10 @@
           <a:chExt cx="0" cy="0"/>
         </a:xfrm>
       </p:grpSpPr>
-      <p:sp>
-        <p:nvSpPr>
-          <p:cNvPr id="2" name="Header Placeholder 1"/>
-          <p:cNvSpPr>
-            <a:spLocks noGrp="1"/>
-          </p:cNvSpPr>
-          <p:nvPr>
-            <p:ph type="hdr" sz="quarter"/>
-          </p:nvPr>
-        </p:nvSpPr>
-        <p:spPr>
-          <a:xfrm>
-            <a:off x="0" y="0"/>
-            <a:ext cx="2971800" cy="458788"/>
-          </a:xfrm>
-          <a:prstGeom prst="rect">
-            <a:avLst/>
-          </a:prstGeom>
-        </p:spPr>
-        <p:txBody>
-          <a:bodyPr vert="horz" lIns="91440" tIns="45720" rIns="91440" bIns="45720" rtlCol="0"/>
-          <a:lstStyle>
-            <a:lvl1pPr algn="l">
-              <a:defRPr sz="1200"/>
-            </a:lvl1pPr>
-          </a:lstStyle>
-          <a:p>
-            <a:endParaRPr lang="en-US"/>
-          </a:p>
-        </p:txBody>
-      </p:sp>
-      <p:sp>
-        <p:nvSpPr>
-          <p:cNvPr id="3" name="Date Placeholder 2"/>
-          <p:cNvSpPr>
-            <a:spLocks noGrp="1"/>
-          </p:cNvSpPr>
-          <p:nvPr>
-            <p:ph type="dt" idx="1"/>
-          </p:nvPr>
-        </p:nvSpPr>
-        <p:spPr>
-          <a:xfrm>
-            <a:off x="3884613" y="0"/>
-            <a:ext cx="2971800" cy="458788"/>
-          </a:xfrm>
-          <a:prstGeom prst="rect">
-            <a:avLst/>
-          </a:prstGeom>
-        </p:spPr>
-        <p:txBody>
-          <a:bodyPr vert="horz" lIns="91440" tIns="45720" rIns="91440" bIns="45720" rtlCol="0"/>
-          <a:lstStyle>
-            <a:lvl1pPr algn="r">
-              <a:defRPr sz="1200"/>
-            </a:lvl1pPr>
-          </a:lstStyle>
-          <a:p>
-            <a:fld id="{5282F153-3F37-0F45-9E97-73ACFA13230C}" type="datetimeFigureOut">
-              <a:rPr lang="en-US"/>
-              <a:t>7/23/19</a:t>
-            </a:fld>
-            <a:endParaRPr lang="en-US"/>
-          </a:p>
-        </p:txBody>
-      </p:sp>
-      <p:sp>
-        <p:nvSpPr>
-          <p:cNvPr id="4" name="Slide Image Placeholder 3"/>
-          <p:cNvSpPr>
-            <a:spLocks noGrp="1" noRot="1" noChangeAspect="1"/>
-          </p:cNvSpPr>
-          <p:nvPr>
-            <p:ph type="sldImg" idx="2"/>
-          </p:nvPr>
-        </p:nvSpPr>
-        <p:spPr>
-          <a:xfrm>
-            <a:off x="685800" y="1143000"/>
-            <a:ext cx="5486400" cy="3086100"/>
-          </a:xfrm>
-          <a:prstGeom prst="rect">
-            <a:avLst/>
-          </a:prstGeom>
-          <a:noFill/>
-          <a:ln w="12700">
-            <a:solidFill>
-              <a:prstClr val="black"/>
-            </a:solidFill>
-          </a:ln>
-        </p:spPr>
-        <p:txBody>
-          <a:bodyPr vert="horz" lIns="91440" tIns="45720" rIns="91440" bIns="45720" rtlCol="0" anchor="ctr"/>
-          <a:lstStyle/>
-          <a:p>
-            <a:endParaRPr lang="en-US"/>
-          </a:p>
-        </p:txBody>
-      </p:sp>
-      <p:sp>
-        <p:nvSpPr>
-          <p:cNvPr id="5" name="Notes Placeholder 4"/>
-          <p:cNvSpPr>
-            <a:spLocks noGrp="1"/>
-          </p:cNvSpPr>
-          <p:nvPr>
-            <p:ph type="body" sz="quarter" idx="3"/>
-          </p:nvPr>
-        </p:nvSpPr>
-        <p:spPr>
-          <a:xfrm>
-            <a:off x="685800" y="4400550"/>
-            <a:ext cx="5486400" cy="3600450"/>
-          </a:xfrm>
-          <a:prstGeom prst="rect">
-            <a:avLst/>
-          </a:prstGeom>
-        </p:spPr>
-        <p:txBody>
-          <a:bodyPr vert="horz" lIns="91440" tIns="45720" rIns="91440" bIns="45720" rtlCol="0"/>
-          <a:lstStyle/>
-          <a:p>
-            <a:pPr lvl="0"/>
-            <a:r>
-              <a:rPr lang="en-US"/>
-              <a:t>Click to edit Master text styles</a:t>
-            </a:r>
-          </a:p>
-          <a:p>
-            <a:pPr lvl="1"/>
-            <a:r>
-              <a:rPr lang="en-US"/>
-              <a:t>Second level</a:t>
-            </a:r>
-          </a:p>
-          <a:p>
-            <a:pPr lvl="2"/>
-            <a:r>
-              <a:rPr lang="en-US"/>
-              <a:t>Third level</a:t>
-            </a:r>
-          </a:p>
-          <a:p>
-            <a:pPr lvl="3"/>
-            <a:r>
-              <a:rPr lang="en-US"/>
-              <a:t>Fourth level</a:t>
-            </a:r>
-          </a:p>
-          <a:p>
-            <a:pPr lvl="4"/>
-            <a:r>
-              <a:rPr lang="en-US"/>
-              <a:t>Fifth level</a:t>
-            </a:r>
-          </a:p>
-        </p:txBody>
-      </p:sp>
-      <p:sp>
-        <p:nvSpPr>
-          <p:cNvPr id="6" name="Footer Placeholder 5"/>
-          <p:cNvSpPr>
-            <a:spLocks noGrp="1"/>
-          </p:cNvSpPr>
-          <p:nvPr>
-            <p:ph type="ftr" sz="quarter" idx="4"/>
-          </p:nvPr>
-        </p:nvSpPr>
-        <p:spPr>
-          <a:xfrm>
-            <a:off x="0" y="8685213"/>
-            <a:ext cx="2971800" cy="458787"/>
-          </a:xfrm>
-          <a:prstGeom prst="rect">
-            <a:avLst/>
-          </a:prstGeom>
-        </p:spPr>
-        <p:txBody>
-          <a:bodyPr vert="horz" lIns="91440" tIns="45720" rIns="91440" bIns="45720" rtlCol="0" anchor="b"/>
-          <a:lstStyle>
-            <a:lvl1pPr algn="l">
-              <a:defRPr sz="1200"/>
-            </a:lvl1pPr>
-          </a:lstStyle>
-          <a:p>
-            <a:endParaRPr lang="en-US"/>
-          </a:p>
-        </p:txBody>
-      </p:sp>
-      <p:sp>
-        <p:nvSpPr>
-          <p:cNvPr id="7" name="Slide Number Placeholder 6"/>
-          <p:cNvSpPr>
-            <a:spLocks noGrp="1"/>
-          </p:cNvSpPr>
-          <p:nvPr>
-            <p:ph type="sldNum" sz="quarter" idx="5"/>
-          </p:nvPr>
-        </p:nvSpPr>
-        <p:spPr>
-          <a:xfrm>
-            <a:off x="3884613" y="8685213"/>
-            <a:ext cx="2971800" cy="458787"/>
-          </a:xfrm>
-          <a:prstGeom prst="rect">
-            <a:avLst/>
-          </a:prstGeom>
-        </p:spPr>
-        <p:txBody>
-          <a:bodyPr vert="horz" lIns="91440" tIns="45720" rIns="91440" bIns="45720" rtlCol="0" anchor="b"/>
-          <a:lstStyle>
-            <a:lvl1pPr algn="r">
-              <a:defRPr sz="1200"/>
-            </a:lvl1pPr>
-          </a:lstStyle>
-          <a:p>
-            <a:fld id="{CE5E9CC1-C706-0F49-92D6-E571CC5EEA8F}" type="slidenum">
-              <a:rPr lang="en-US"/>
-              <a:t>‹#›</a:t>
-            </a:fld>
-            <a:endParaRPr lang="en-US"/>
-          </a:p>
-        </p:txBody>
-      </p:sp>
     </p:spTree>
     <p:extLst>
       <p:ext uri="{BB962C8B-B14F-4D97-AF65-F5344CB8AC3E}">
-        <p14:creationId xmlns:p14="http://schemas.microsoft.com/office/powerpoint/2010/main" val="1024086991"/>
+        <p14:creationId xmlns:p14="http://schemas.microsoft.com/office/powerpoint/2010/main" val="3721431235"/>
       </p:ext>
     </p:extLst>
   </p:cSld>
@@ -510,8 +297,66 @@
           <a:lstStyle/>
           <a:p>
             <a:r>
-              <a:rPr lang="en-US" dirty="0"/>
-              <a:t/>
+              <a:rPr lang="es-CO" sz="1200" b="0" i="0" kern="1200" dirty="0">
+                <a:solidFill>
+                  <a:schemeClr val="tx1"/>
+                </a:solidFill>
+                <a:effectLst/>
+                <a:latin typeface="+mn-lt"/>
+                <a:ea typeface="+mn-ea"/>
+                <a:cs typeface="+mn-cs"/>
+              </a:rPr>
+              <a:t>Hoy les venimos a contar cómo resolvimos el reto número dos.</a:t>
+            </a:r>
+          </a:p>
+          <a:p>
+            <a:endParaRPr lang="es-CO" sz="1200" b="0" i="0" kern="1200" dirty="0">
+              <a:solidFill>
+                <a:schemeClr val="tx1"/>
+              </a:solidFill>
+              <a:effectLst/>
+              <a:latin typeface="+mn-lt"/>
+              <a:ea typeface="+mn-ea"/>
+              <a:cs typeface="+mn-cs"/>
+            </a:endParaRPr>
+          </a:p>
+          <a:p>
+            <a:r>
+              <a:rPr lang="es-CO" sz="1200" b="0" i="0" kern="1200" dirty="0">
+                <a:solidFill>
+                  <a:schemeClr val="tx1"/>
+                </a:solidFill>
+                <a:effectLst/>
+                <a:latin typeface="+mn-lt"/>
+                <a:ea typeface="+mn-ea"/>
+                <a:cs typeface="+mn-cs"/>
+              </a:rPr>
+              <a:t>El reto, dicho rápido, era construir un sistema que recibe muchos datos de unos vehículos, identifica cuándo hay una emergencia, y manda un correo de aviso. Suena sencillo, pero la gracia está en que pasen mil peticiones en treinta segundos sin perder ni una, y que el correo llegue en menos de quince segundos.</a:t>
+            </a:r>
+          </a:p>
+          <a:p>
+            <a:endParaRPr lang="es-CO" sz="1200" b="0" i="0" kern="1200" dirty="0">
+              <a:solidFill>
+                <a:schemeClr val="tx1"/>
+              </a:solidFill>
+              <a:effectLst/>
+              <a:latin typeface="+mn-lt"/>
+              <a:ea typeface="+mn-ea"/>
+              <a:cs typeface="+mn-cs"/>
+            </a:endParaRPr>
+          </a:p>
+          <a:p>
+            <a:r>
+              <a:rPr lang="es-CO" sz="1200" b="0" i="0" kern="1200" dirty="0">
+                <a:solidFill>
+                  <a:schemeClr val="tx1"/>
+                </a:solidFill>
+                <a:effectLst/>
+                <a:latin typeface="+mn-lt"/>
+                <a:ea typeface="+mn-ea"/>
+                <a:cs typeface="+mn-cs"/>
+              </a:rPr>
+              <a:t>Lo armamos todo en AWS, con la infraestructura escrita en código y subida a un repositorio de GitHub. Estaremos viendo cómo funciona, qué decisiones tomamos, y al final hacemos un demo en vivo para que vean los tiempos reales.</a:t>
             </a:r>
             <a:endParaRPr lang="en-US" dirty="0"/>
           </a:p>
@@ -597,10 +442,6 @@
           <a:bodyPr/>
           <a:lstStyle/>
           <a:p>
-            <a:r>
-              <a:rPr lang="en-US" dirty="0"/>
-              <a:t/>
-            </a:r>
             <a:endParaRPr lang="en-US" dirty="0"/>
           </a:p>
         </p:txBody>
@@ -686,9 +527,167 @@
           <a:lstStyle/>
           <a:p>
             <a:r>
-              <a:rPr lang="en-US" dirty="0"/>
-              <a:t/>
-            </a:r>
+              <a:rPr lang="es-CO" sz="1200" b="0" i="0" kern="1200" dirty="0">
+                <a:solidFill>
+                  <a:schemeClr val="tx1"/>
+                </a:solidFill>
+                <a:effectLst/>
+                <a:latin typeface="+mn-lt"/>
+                <a:ea typeface="+mn-ea"/>
+                <a:cs typeface="+mn-cs"/>
+              </a:rPr>
+              <a:t>Antes de meternos en lo técnico, recordemos rapidito qué pidieron en el reto. Son tres cosas.</a:t>
+            </a:r>
+          </a:p>
+          <a:p>
+            <a:endParaRPr lang="es-CO" sz="1200" b="0" i="0" kern="1200" dirty="0">
+              <a:solidFill>
+                <a:schemeClr val="tx1"/>
+              </a:solidFill>
+              <a:effectLst/>
+              <a:latin typeface="+mn-lt"/>
+              <a:ea typeface="+mn-ea"/>
+              <a:cs typeface="+mn-cs"/>
+            </a:endParaRPr>
+          </a:p>
+          <a:p>
+            <a:r>
+              <a:rPr lang="es-CO" sz="1200" b="0" i="0" kern="1200" dirty="0">
+                <a:solidFill>
+                  <a:schemeClr val="tx1"/>
+                </a:solidFill>
+                <a:effectLst/>
+                <a:latin typeface="+mn-lt"/>
+                <a:ea typeface="+mn-ea"/>
+                <a:cs typeface="+mn-cs"/>
+              </a:rPr>
+              <a:t>[PAUSA] La primera: el sistema tiene que aguantar </a:t>
+            </a:r>
+            <a:r>
+              <a:rPr lang="es-CO" sz="1200" b="1" i="0" kern="1200" dirty="0">
+                <a:solidFill>
+                  <a:schemeClr val="tx1"/>
+                </a:solidFill>
+                <a:effectLst/>
+                <a:latin typeface="+mn-lt"/>
+                <a:ea typeface="+mn-ea"/>
+                <a:cs typeface="+mn-cs"/>
+              </a:rPr>
+              <a:t>mil peticiones en treinta segundos</a:t>
+            </a:r>
+            <a:r>
+              <a:rPr lang="es-CO" sz="1200" b="0" i="0" kern="1200" dirty="0">
+                <a:solidFill>
+                  <a:schemeClr val="tx1"/>
+                </a:solidFill>
+                <a:effectLst/>
+                <a:latin typeface="+mn-lt"/>
+                <a:ea typeface="+mn-ea"/>
+                <a:cs typeface="+mn-cs"/>
+              </a:rPr>
+              <a:t>. Y no "más o menos" — tienen que pasar las mil. Si se cae una sola, ya quedamos mal.</a:t>
+            </a:r>
+          </a:p>
+          <a:p>
+            <a:endParaRPr lang="es-CO" sz="1200" b="0" i="0" kern="1200" dirty="0">
+              <a:solidFill>
+                <a:schemeClr val="tx1"/>
+              </a:solidFill>
+              <a:effectLst/>
+              <a:latin typeface="+mn-lt"/>
+              <a:ea typeface="+mn-ea"/>
+              <a:cs typeface="+mn-cs"/>
+            </a:endParaRPr>
+          </a:p>
+          <a:p>
+            <a:r>
+              <a:rPr lang="es-CO" sz="1200" b="0" i="0" kern="1200" dirty="0">
+                <a:solidFill>
+                  <a:schemeClr val="tx1"/>
+                </a:solidFill>
+                <a:effectLst/>
+                <a:latin typeface="+mn-lt"/>
+                <a:ea typeface="+mn-ea"/>
+                <a:cs typeface="+mn-cs"/>
+              </a:rPr>
+              <a:t>La segunda: dentro de esas mil peticiones, algunas vienen marcadas como "</a:t>
+            </a:r>
+            <a:r>
+              <a:rPr lang="es-CO" sz="1200" b="0" i="0" kern="1200" dirty="0" err="1">
+                <a:solidFill>
+                  <a:schemeClr val="tx1"/>
+                </a:solidFill>
+                <a:effectLst/>
+                <a:latin typeface="+mn-lt"/>
+                <a:ea typeface="+mn-ea"/>
+                <a:cs typeface="+mn-cs"/>
+              </a:rPr>
+              <a:t>Emergency</a:t>
+            </a:r>
+            <a:r>
+              <a:rPr lang="es-CO" sz="1200" b="0" i="0" kern="1200" dirty="0">
+                <a:solidFill>
+                  <a:schemeClr val="tx1"/>
+                </a:solidFill>
+                <a:effectLst/>
+                <a:latin typeface="+mn-lt"/>
+                <a:ea typeface="+mn-ea"/>
+                <a:cs typeface="+mn-cs"/>
+              </a:rPr>
+              <a:t>" — son las del botón de pánico del vehículo. Cuando aparece una de esas, hay que mandar un correo a Gmail. Y dejar registrado en algún lado a qué hora llegó la emergencia y a qué hora salió el correo.</a:t>
+            </a:r>
+          </a:p>
+          <a:p>
+            <a:endParaRPr lang="es-CO" sz="1200" b="0" i="0" kern="1200" dirty="0">
+              <a:solidFill>
+                <a:schemeClr val="tx1"/>
+              </a:solidFill>
+              <a:effectLst/>
+              <a:latin typeface="+mn-lt"/>
+              <a:ea typeface="+mn-ea"/>
+              <a:cs typeface="+mn-cs"/>
+            </a:endParaRPr>
+          </a:p>
+          <a:p>
+            <a:r>
+              <a:rPr lang="es-CO" sz="1200" b="0" i="0" kern="1200" dirty="0">
+                <a:solidFill>
+                  <a:schemeClr val="tx1"/>
+                </a:solidFill>
+                <a:effectLst/>
+                <a:latin typeface="+mn-lt"/>
+                <a:ea typeface="+mn-ea"/>
+                <a:cs typeface="+mn-cs"/>
+              </a:rPr>
+              <a:t>Y la tercera, que es la más enredada: las restricciones técnicas. No podemos pasarnos de quince peticiones por segundo. No podemos tener más de diez procesadores trabajando al mismo tiempo. Y el correo tiene que llegar en menos de quince segundos.</a:t>
+            </a:r>
+          </a:p>
+          <a:p>
+            <a:endParaRPr lang="es-CO" sz="1200" b="0" i="0" kern="1200" dirty="0">
+              <a:solidFill>
+                <a:schemeClr val="tx1"/>
+              </a:solidFill>
+              <a:effectLst/>
+              <a:latin typeface="+mn-lt"/>
+              <a:ea typeface="+mn-ea"/>
+              <a:cs typeface="+mn-cs"/>
+            </a:endParaRPr>
+          </a:p>
+          <a:p>
+            <a:r>
+              <a:rPr lang="es-CO" sz="1200" b="0" i="0" kern="1200" dirty="0">
+                <a:solidFill>
+                  <a:schemeClr val="tx1"/>
+                </a:solidFill>
+                <a:effectLst/>
+                <a:latin typeface="+mn-lt"/>
+                <a:ea typeface="+mn-ea"/>
+                <a:cs typeface="+mn-cs"/>
+              </a:rPr>
+              <a:t>[ÉNFASIS] Esa última es clave, porque la mitad de la nota del reto se juega ahí. Quince segundos o menos, dos puntos cinco. Más de eso, baja la nota.</a:t>
+            </a:r>
+          </a:p>
+          <a:p>
             <a:endParaRPr lang="en-US" dirty="0"/>
           </a:p>
         </p:txBody>
@@ -774,9 +773,489 @@
           <a:lstStyle/>
           <a:p>
             <a:r>
-              <a:rPr lang="en-US" dirty="0"/>
-              <a:t/>
-            </a:r>
+              <a:rPr lang="es-CO" sz="1200" b="0" i="0" kern="1200" dirty="0">
+                <a:solidFill>
+                  <a:schemeClr val="tx1"/>
+                </a:solidFill>
+                <a:effectLst/>
+                <a:latin typeface="+mn-lt"/>
+                <a:ea typeface="+mn-ea"/>
+                <a:cs typeface="+mn-cs"/>
+              </a:rPr>
+              <a:t>Esta es la arquitectura completa. </a:t>
+            </a:r>
+          </a:p>
+          <a:p>
+            <a:endParaRPr lang="es-CO" sz="1200" b="0" i="0" kern="1200" dirty="0">
+              <a:solidFill>
+                <a:schemeClr val="tx1"/>
+              </a:solidFill>
+              <a:effectLst/>
+              <a:latin typeface="+mn-lt"/>
+              <a:ea typeface="+mn-ea"/>
+              <a:cs typeface="+mn-cs"/>
+            </a:endParaRPr>
+          </a:p>
+          <a:p>
+            <a:r>
+              <a:rPr lang="es-CO" sz="1200" b="0" i="0" kern="1200" dirty="0">
+                <a:solidFill>
+                  <a:schemeClr val="tx1"/>
+                </a:solidFill>
+                <a:effectLst/>
+                <a:latin typeface="+mn-lt"/>
+                <a:ea typeface="+mn-ea"/>
+                <a:cs typeface="+mn-cs"/>
+              </a:rPr>
+              <a:t>[PAUSA] Empezamos en el cliente. Esto es k6, una herramienta que simula los vehículos mandando peticiones. </a:t>
+            </a:r>
+          </a:p>
+          <a:p>
+            <a:endParaRPr lang="es-CO" sz="1200" b="0" i="0" kern="1200" dirty="0">
+              <a:solidFill>
+                <a:schemeClr val="tx1"/>
+              </a:solidFill>
+              <a:effectLst/>
+              <a:latin typeface="+mn-lt"/>
+              <a:ea typeface="+mn-ea"/>
+              <a:cs typeface="+mn-cs"/>
+            </a:endParaRPr>
+          </a:p>
+          <a:p>
+            <a:r>
+              <a:rPr lang="es-CO" sz="1200" b="0" i="0" kern="1200" dirty="0">
+                <a:solidFill>
+                  <a:schemeClr val="tx1"/>
+                </a:solidFill>
+                <a:effectLst/>
+                <a:latin typeface="+mn-lt"/>
+                <a:ea typeface="+mn-ea"/>
+                <a:cs typeface="+mn-cs"/>
+              </a:rPr>
+              <a:t>La llamada cae primero en </a:t>
+            </a:r>
+            <a:r>
+              <a:rPr lang="es-CO" sz="1200" b="1" i="0" kern="1200" dirty="0">
+                <a:solidFill>
+                  <a:schemeClr val="tx1"/>
+                </a:solidFill>
+                <a:effectLst/>
+                <a:latin typeface="+mn-lt"/>
+                <a:ea typeface="+mn-ea"/>
+                <a:cs typeface="+mn-cs"/>
+              </a:rPr>
+              <a:t>API Gateway</a:t>
+            </a:r>
+            <a:r>
+              <a:rPr lang="es-CO" sz="1200" b="0" i="0" kern="1200" dirty="0">
+                <a:solidFill>
+                  <a:schemeClr val="tx1"/>
+                </a:solidFill>
+                <a:effectLst/>
+                <a:latin typeface="+mn-lt"/>
+                <a:ea typeface="+mn-ea"/>
+                <a:cs typeface="+mn-cs"/>
+              </a:rPr>
+              <a:t>. Con una </a:t>
+            </a:r>
+            <a:r>
+              <a:rPr lang="es-CO" sz="1200" b="0" i="0" kern="1200" dirty="0" err="1">
+                <a:solidFill>
+                  <a:schemeClr val="tx1"/>
+                </a:solidFill>
+                <a:effectLst/>
+                <a:latin typeface="+mn-lt"/>
+                <a:ea typeface="+mn-ea"/>
+                <a:cs typeface="+mn-cs"/>
+              </a:rPr>
+              <a:t>key</a:t>
+            </a:r>
+            <a:r>
+              <a:rPr lang="es-CO" sz="1200" b="0" i="0" kern="1200" dirty="0">
+                <a:solidFill>
+                  <a:schemeClr val="tx1"/>
+                </a:solidFill>
+                <a:effectLst/>
+                <a:latin typeface="+mn-lt"/>
+                <a:ea typeface="+mn-ea"/>
+                <a:cs typeface="+mn-cs"/>
+              </a:rPr>
+              <a:t>— un </a:t>
+            </a:r>
+            <a:r>
+              <a:rPr lang="es-CO" sz="1200" b="0" i="0" kern="1200" dirty="0" err="1">
+                <a:solidFill>
+                  <a:schemeClr val="tx1"/>
+                </a:solidFill>
+                <a:effectLst/>
+                <a:latin typeface="+mn-lt"/>
+                <a:ea typeface="+mn-ea"/>
+                <a:cs typeface="+mn-cs"/>
+              </a:rPr>
+              <a:t>header</a:t>
+            </a:r>
+            <a:r>
+              <a:rPr lang="es-CO" sz="1200" b="0" i="0" kern="1200" dirty="0">
+                <a:solidFill>
+                  <a:schemeClr val="tx1"/>
+                </a:solidFill>
+                <a:effectLst/>
+                <a:latin typeface="+mn-lt"/>
+                <a:ea typeface="+mn-ea"/>
+                <a:cs typeface="+mn-cs"/>
+              </a:rPr>
+              <a:t> llamado x-api-</a:t>
+            </a:r>
+            <a:r>
+              <a:rPr lang="es-CO" sz="1200" b="0" i="0" kern="1200" dirty="0" err="1">
+                <a:solidFill>
+                  <a:schemeClr val="tx1"/>
+                </a:solidFill>
+                <a:effectLst/>
+                <a:latin typeface="+mn-lt"/>
+                <a:ea typeface="+mn-ea"/>
+                <a:cs typeface="+mn-cs"/>
+              </a:rPr>
+              <a:t>key</a:t>
+            </a:r>
+            <a:endParaRPr lang="es-CO" sz="1200" b="0" i="0" kern="1200" dirty="0">
+              <a:solidFill>
+                <a:schemeClr val="tx1"/>
+              </a:solidFill>
+              <a:effectLst/>
+              <a:latin typeface="+mn-lt"/>
+              <a:ea typeface="+mn-ea"/>
+              <a:cs typeface="+mn-cs"/>
+            </a:endParaRPr>
+          </a:p>
+          <a:p>
+            <a:endParaRPr lang="es-CO" sz="1200" b="0" i="0" kern="1200" dirty="0">
+              <a:solidFill>
+                <a:schemeClr val="tx1"/>
+              </a:solidFill>
+              <a:effectLst/>
+              <a:latin typeface="+mn-lt"/>
+              <a:ea typeface="+mn-ea"/>
+              <a:cs typeface="+mn-cs"/>
+            </a:endParaRPr>
+          </a:p>
+          <a:p>
+            <a:r>
+              <a:rPr lang="es-CO" sz="1200" b="0" i="0" kern="1200" dirty="0">
+                <a:solidFill>
+                  <a:schemeClr val="tx1"/>
+                </a:solidFill>
+                <a:effectLst/>
+                <a:latin typeface="+mn-lt"/>
+                <a:ea typeface="+mn-ea"/>
+                <a:cs typeface="+mn-cs"/>
+              </a:rPr>
+              <a:t>Acá hay un detalle importante. Lo típico sería: el </a:t>
+            </a:r>
+            <a:r>
+              <a:rPr lang="es-CO" sz="1200" b="0" i="0" kern="1200" dirty="0" err="1">
+                <a:solidFill>
+                  <a:schemeClr val="tx1"/>
+                </a:solidFill>
+                <a:effectLst/>
+                <a:latin typeface="+mn-lt"/>
+                <a:ea typeface="+mn-ea"/>
+                <a:cs typeface="+mn-cs"/>
+              </a:rPr>
+              <a:t>apy</a:t>
+            </a:r>
+            <a:r>
+              <a:rPr lang="es-CO" sz="1200" b="0" i="0" kern="1200" dirty="0">
+                <a:solidFill>
+                  <a:schemeClr val="tx1"/>
+                </a:solidFill>
+                <a:effectLst/>
+                <a:latin typeface="+mn-lt"/>
+                <a:ea typeface="+mn-ea"/>
+                <a:cs typeface="+mn-cs"/>
+              </a:rPr>
+              <a:t> Gateway llama a una función Lambda, y esa Lambda escribe en una cola. Pero nosotros le ahorramos un paso: </a:t>
+            </a:r>
+            <a:r>
+              <a:rPr lang="es-CO" sz="1200" b="1" i="0" kern="1200" dirty="0">
+                <a:solidFill>
+                  <a:schemeClr val="tx1"/>
+                </a:solidFill>
+                <a:effectLst/>
+                <a:latin typeface="+mn-lt"/>
+                <a:ea typeface="+mn-ea"/>
+                <a:cs typeface="+mn-cs"/>
+              </a:rPr>
+              <a:t>dejando el mensaje directo en la cola</a:t>
+            </a:r>
+            <a:r>
+              <a:rPr lang="es-CO" sz="1200" b="0" i="0" kern="1200" dirty="0">
+                <a:solidFill>
+                  <a:schemeClr val="tx1"/>
+                </a:solidFill>
+                <a:effectLst/>
+                <a:latin typeface="+mn-lt"/>
+                <a:ea typeface="+mn-ea"/>
+                <a:cs typeface="+mn-cs"/>
+              </a:rPr>
+              <a:t>, sin pasar por una Lambda intermedia. Eso baja la latencia.</a:t>
+            </a:r>
+          </a:p>
+          <a:p>
+            <a:endParaRPr lang="es-CO" sz="1200" b="0" i="0" kern="1200" dirty="0">
+              <a:solidFill>
+                <a:schemeClr val="tx1"/>
+              </a:solidFill>
+              <a:effectLst/>
+              <a:latin typeface="+mn-lt"/>
+              <a:ea typeface="+mn-ea"/>
+              <a:cs typeface="+mn-cs"/>
+            </a:endParaRPr>
+          </a:p>
+          <a:p>
+            <a:r>
+              <a:rPr lang="es-CO" sz="1200" b="0" i="0" kern="1200" dirty="0">
+                <a:solidFill>
+                  <a:schemeClr val="tx1"/>
+                </a:solidFill>
+                <a:effectLst/>
+                <a:latin typeface="+mn-lt"/>
+                <a:ea typeface="+mn-ea"/>
+                <a:cs typeface="+mn-cs"/>
+              </a:rPr>
+              <a:t>Esa cola se llama </a:t>
+            </a:r>
+            <a:r>
+              <a:rPr lang="es-CO" sz="1200" b="1" i="0" kern="1200" dirty="0">
+                <a:solidFill>
+                  <a:schemeClr val="tx1"/>
+                </a:solidFill>
+                <a:effectLst/>
+                <a:latin typeface="+mn-lt"/>
+                <a:ea typeface="+mn-ea"/>
+                <a:cs typeface="+mn-cs"/>
+              </a:rPr>
+              <a:t>SQS</a:t>
+            </a:r>
+            <a:r>
+              <a:rPr lang="es-CO" sz="1200" b="0" i="0" kern="1200" dirty="0">
+                <a:solidFill>
+                  <a:schemeClr val="tx1"/>
+                </a:solidFill>
+                <a:effectLst/>
+                <a:latin typeface="+mn-lt"/>
+                <a:ea typeface="+mn-ea"/>
+                <a:cs typeface="+mn-cs"/>
+              </a:rPr>
+              <a:t>. Tenemos uno principal y uno de respaldo — la DLQ — para los mensajes problemáticos.</a:t>
+            </a:r>
+          </a:p>
+          <a:p>
+            <a:endParaRPr lang="es-CO" sz="1200" b="0" i="0" kern="1200" dirty="0">
+              <a:solidFill>
+                <a:schemeClr val="tx1"/>
+              </a:solidFill>
+              <a:effectLst/>
+              <a:latin typeface="+mn-lt"/>
+              <a:ea typeface="+mn-ea"/>
+              <a:cs typeface="+mn-cs"/>
+            </a:endParaRPr>
+          </a:p>
+          <a:p>
+            <a:r>
+              <a:rPr lang="es-CO" sz="1200" b="0" i="0" kern="1200" dirty="0">
+                <a:solidFill>
+                  <a:schemeClr val="tx1"/>
+                </a:solidFill>
+                <a:effectLst/>
+                <a:latin typeface="+mn-lt"/>
+                <a:ea typeface="+mn-ea"/>
+                <a:cs typeface="+mn-cs"/>
+              </a:rPr>
+              <a:t>Después viene la </a:t>
+            </a:r>
+            <a:r>
+              <a:rPr lang="es-CO" sz="1200" b="1" i="0" kern="1200" dirty="0">
+                <a:solidFill>
+                  <a:schemeClr val="tx1"/>
+                </a:solidFill>
+                <a:effectLst/>
+                <a:latin typeface="+mn-lt"/>
+                <a:ea typeface="+mn-ea"/>
+                <a:cs typeface="+mn-cs"/>
+              </a:rPr>
+              <a:t>Lambda</a:t>
+            </a:r>
+            <a:r>
+              <a:rPr lang="es-CO" sz="1200" b="0" i="0" kern="1200" dirty="0">
+                <a:solidFill>
+                  <a:schemeClr val="tx1"/>
+                </a:solidFill>
+                <a:effectLst/>
+                <a:latin typeface="+mn-lt"/>
+                <a:ea typeface="+mn-ea"/>
+                <a:cs typeface="+mn-cs"/>
+              </a:rPr>
+              <a:t>, que es la función que se levanta cuando hay mensajes en </a:t>
+            </a:r>
+            <a:r>
+              <a:rPr lang="es-CO" sz="1200" b="0" i="0" kern="1200" dirty="0" err="1">
+                <a:solidFill>
+                  <a:schemeClr val="tx1"/>
+                </a:solidFill>
+                <a:effectLst/>
+                <a:latin typeface="+mn-lt"/>
+                <a:ea typeface="+mn-ea"/>
+                <a:cs typeface="+mn-cs"/>
+              </a:rPr>
+              <a:t>sqs</a:t>
+            </a:r>
+            <a:r>
+              <a:rPr lang="es-CO" sz="1200" b="0" i="0" kern="1200" dirty="0">
+                <a:solidFill>
+                  <a:schemeClr val="tx1"/>
+                </a:solidFill>
+                <a:effectLst/>
+                <a:latin typeface="+mn-lt"/>
+                <a:ea typeface="+mn-ea"/>
+                <a:cs typeface="+mn-cs"/>
+              </a:rPr>
+              <a:t>. Los lee en </a:t>
+            </a:r>
+            <a:r>
+              <a:rPr lang="es-CO" sz="1200" b="0" i="0" kern="1200" dirty="0" err="1">
+                <a:solidFill>
+                  <a:schemeClr val="tx1"/>
+                </a:solidFill>
+                <a:effectLst/>
+                <a:latin typeface="+mn-lt"/>
+                <a:ea typeface="+mn-ea"/>
+                <a:cs typeface="+mn-cs"/>
+              </a:rPr>
+              <a:t>batch</a:t>
+            </a:r>
+            <a:r>
+              <a:rPr lang="es-CO" sz="1200" b="0" i="0" kern="1200" dirty="0">
+                <a:solidFill>
+                  <a:schemeClr val="tx1"/>
+                </a:solidFill>
+                <a:effectLst/>
+                <a:latin typeface="+mn-lt"/>
+                <a:ea typeface="+mn-ea"/>
+                <a:cs typeface="+mn-cs"/>
+              </a:rPr>
+              <a:t> de a diez, valida si es de tipo </a:t>
+            </a:r>
+            <a:r>
+              <a:rPr lang="es-CO" sz="1200" b="0" i="0" kern="1200" dirty="0" err="1">
+                <a:solidFill>
+                  <a:schemeClr val="tx1"/>
+                </a:solidFill>
+                <a:effectLst/>
+                <a:latin typeface="+mn-lt"/>
+                <a:ea typeface="+mn-ea"/>
+                <a:cs typeface="+mn-cs"/>
+              </a:rPr>
+              <a:t>Emergency</a:t>
+            </a:r>
+            <a:r>
+              <a:rPr lang="es-CO" sz="1200" b="0" i="0" kern="1200" dirty="0">
+                <a:solidFill>
+                  <a:schemeClr val="tx1"/>
+                </a:solidFill>
+                <a:effectLst/>
+                <a:latin typeface="+mn-lt"/>
+                <a:ea typeface="+mn-ea"/>
+                <a:cs typeface="+mn-cs"/>
+              </a:rPr>
+              <a:t>? Si sí, manda un correo usando </a:t>
+            </a:r>
+            <a:r>
+              <a:rPr lang="es-CO" sz="1200" b="1" i="0" kern="1200" dirty="0">
+                <a:solidFill>
+                  <a:schemeClr val="tx1"/>
+                </a:solidFill>
+                <a:effectLst/>
+                <a:latin typeface="+mn-lt"/>
+                <a:ea typeface="+mn-ea"/>
+                <a:cs typeface="+mn-cs"/>
+              </a:rPr>
+              <a:t>SES</a:t>
+            </a:r>
+            <a:r>
+              <a:rPr lang="es-CO" sz="1200" b="0" i="0" kern="1200" dirty="0">
+                <a:solidFill>
+                  <a:schemeClr val="tx1"/>
+                </a:solidFill>
+                <a:effectLst/>
+                <a:latin typeface="+mn-lt"/>
+                <a:ea typeface="+mn-ea"/>
+                <a:cs typeface="+mn-cs"/>
+              </a:rPr>
+              <a:t>, el servicio de correos de AWS. Si no, lo registra y sigue.</a:t>
+            </a:r>
+          </a:p>
+          <a:p>
+            <a:endParaRPr lang="es-CO" sz="1200" b="0" i="0" kern="1200" dirty="0">
+              <a:solidFill>
+                <a:schemeClr val="tx1"/>
+              </a:solidFill>
+              <a:effectLst/>
+              <a:latin typeface="+mn-lt"/>
+              <a:ea typeface="+mn-ea"/>
+              <a:cs typeface="+mn-cs"/>
+            </a:endParaRPr>
+          </a:p>
+          <a:p>
+            <a:r>
+              <a:rPr lang="es-CO" sz="1200" b="0" i="0" kern="1200" dirty="0">
+                <a:solidFill>
+                  <a:schemeClr val="tx1"/>
+                </a:solidFill>
+                <a:effectLst/>
+                <a:latin typeface="+mn-lt"/>
+                <a:ea typeface="+mn-ea"/>
+                <a:cs typeface="+mn-cs"/>
+              </a:rPr>
+              <a:t>Y todo lo que pasa queda guardado en </a:t>
+            </a:r>
+            <a:r>
+              <a:rPr lang="es-CO" sz="1200" b="1" i="0" kern="1200" dirty="0" err="1">
+                <a:solidFill>
+                  <a:schemeClr val="tx1"/>
+                </a:solidFill>
+                <a:effectLst/>
+                <a:latin typeface="+mn-lt"/>
+                <a:ea typeface="+mn-ea"/>
+                <a:cs typeface="+mn-cs"/>
+              </a:rPr>
+              <a:t>CloudWatch</a:t>
+            </a:r>
+            <a:r>
+              <a:rPr lang="es-CO" sz="1200" b="0" i="0" kern="1200" dirty="0">
+                <a:solidFill>
+                  <a:schemeClr val="tx1"/>
+                </a:solidFill>
+                <a:effectLst/>
+                <a:latin typeface="+mn-lt"/>
+                <a:ea typeface="+mn-ea"/>
+                <a:cs typeface="+mn-cs"/>
+              </a:rPr>
+              <a:t>, que es como la bitácora central del sistema. Ahí podemos ir a ver qué hizo cada componente y a qué hora.</a:t>
+            </a:r>
+          </a:p>
+          <a:p>
+            <a:endParaRPr lang="es-CO" sz="1200" b="0" i="0" kern="1200" dirty="0">
+              <a:solidFill>
+                <a:schemeClr val="tx1"/>
+              </a:solidFill>
+              <a:effectLst/>
+              <a:latin typeface="+mn-lt"/>
+              <a:ea typeface="+mn-ea"/>
+              <a:cs typeface="+mn-cs"/>
+            </a:endParaRPr>
+          </a:p>
+          <a:p>
             <a:endParaRPr lang="en-US" dirty="0"/>
           </a:p>
         </p:txBody>
@@ -862,9 +1341,216 @@
           <a:lstStyle/>
           <a:p>
             <a:r>
-              <a:rPr lang="en-US" dirty="0"/>
-              <a:t/>
-            </a:r>
+              <a:rPr lang="es-CO" sz="1200" b="0" i="0" kern="1200" dirty="0">
+                <a:solidFill>
+                  <a:schemeClr val="tx1"/>
+                </a:solidFill>
+                <a:effectLst/>
+                <a:latin typeface="+mn-lt"/>
+                <a:ea typeface="+mn-ea"/>
+                <a:cs typeface="+mn-cs"/>
+              </a:rPr>
+              <a:t>Bueno, ¿y por qué armamos el sistema así y no de otra forma? Hubo cinco decisiones importantes que les quiero comentar.</a:t>
+            </a:r>
+          </a:p>
+          <a:p>
+            <a:endParaRPr lang="es-CO" sz="1200" b="0" i="0" kern="1200" dirty="0">
+              <a:solidFill>
+                <a:schemeClr val="tx1"/>
+              </a:solidFill>
+              <a:effectLst/>
+              <a:latin typeface="+mn-lt"/>
+              <a:ea typeface="+mn-ea"/>
+              <a:cs typeface="+mn-cs"/>
+            </a:endParaRPr>
+          </a:p>
+          <a:p>
+            <a:r>
+              <a:rPr lang="es-CO" sz="1200" b="0" i="0" kern="1200" dirty="0">
+                <a:solidFill>
+                  <a:schemeClr val="tx1"/>
+                </a:solidFill>
+                <a:effectLst/>
+                <a:latin typeface="+mn-lt"/>
+                <a:ea typeface="+mn-ea"/>
+                <a:cs typeface="+mn-cs"/>
+              </a:rPr>
+              <a:t>[PAUSA] </a:t>
+            </a:r>
+            <a:r>
+              <a:rPr lang="es-CO" sz="1200" b="1" i="0" kern="1200" dirty="0">
+                <a:solidFill>
+                  <a:schemeClr val="tx1"/>
+                </a:solidFill>
+                <a:effectLst/>
+                <a:latin typeface="+mn-lt"/>
+                <a:ea typeface="+mn-ea"/>
+                <a:cs typeface="+mn-cs"/>
+              </a:rPr>
+              <a:t>La primera.</a:t>
+            </a:r>
+            <a:r>
+              <a:rPr lang="es-CO" sz="1200" b="0" i="0" kern="1200" dirty="0">
+                <a:solidFill>
+                  <a:schemeClr val="tx1"/>
+                </a:solidFill>
+                <a:effectLst/>
+                <a:latin typeface="+mn-lt"/>
+                <a:ea typeface="+mn-ea"/>
+                <a:cs typeface="+mn-cs"/>
+              </a:rPr>
+              <a:t> AWS te da dos sabores de API Gateway: el viejo, REST, y el nuevo, HTTP API. El nuevo es más rápido y más barato. Uno diría: pues el nuevo, ¿cierto? Pero no, porque el reto pide explícitamente poder configurar las quince peticiones por segundo, y esa configuración solo existe en el viejo. Así que toca usar REST.</a:t>
+            </a:r>
+          </a:p>
+          <a:p>
+            <a:endParaRPr lang="es-CO" sz="1200" b="0" i="0" kern="1200" dirty="0">
+              <a:solidFill>
+                <a:schemeClr val="tx1"/>
+              </a:solidFill>
+              <a:effectLst/>
+              <a:latin typeface="+mn-lt"/>
+              <a:ea typeface="+mn-ea"/>
+              <a:cs typeface="+mn-cs"/>
+            </a:endParaRPr>
+          </a:p>
+          <a:p>
+            <a:r>
+              <a:rPr lang="es-CO" sz="1200" b="1" i="0" kern="1200" dirty="0">
+                <a:solidFill>
+                  <a:schemeClr val="tx1"/>
+                </a:solidFill>
+                <a:effectLst/>
+                <a:latin typeface="+mn-lt"/>
+                <a:ea typeface="+mn-ea"/>
+                <a:cs typeface="+mn-cs"/>
+              </a:rPr>
+              <a:t>La segunda.</a:t>
+            </a:r>
+            <a:r>
+              <a:rPr lang="es-CO" sz="1200" b="0" i="0" kern="1200" dirty="0">
+                <a:solidFill>
+                  <a:schemeClr val="tx1"/>
+                </a:solidFill>
+                <a:effectLst/>
+                <a:latin typeface="+mn-lt"/>
+                <a:ea typeface="+mn-ea"/>
+                <a:cs typeface="+mn-cs"/>
+              </a:rPr>
+              <a:t> El patrón típico sería: API Gateway llama a una Lambda, y la Lambda escribe en la cola. Pero si uno lo piensa, esa Lambda intermedia no hace nada útil — solo recibir y volver a mandar. Es un paso muerto que suma tiempo. Entonces lo eliminamos: el API Gateway escribe directo en la cola. Nos ahorramos como cien o doscientos milisegundos por petición.</a:t>
+            </a:r>
+          </a:p>
+          <a:p>
+            <a:endParaRPr lang="es-CO" sz="1200" b="0" i="0" kern="1200" dirty="0">
+              <a:solidFill>
+                <a:schemeClr val="tx1"/>
+              </a:solidFill>
+              <a:effectLst/>
+              <a:latin typeface="+mn-lt"/>
+              <a:ea typeface="+mn-ea"/>
+              <a:cs typeface="+mn-cs"/>
+            </a:endParaRPr>
+          </a:p>
+          <a:p>
+            <a:r>
+              <a:rPr lang="es-CO" sz="1200" b="1" i="0" kern="1200" dirty="0">
+                <a:solidFill>
+                  <a:schemeClr val="tx1"/>
+                </a:solidFill>
+                <a:effectLst/>
+                <a:latin typeface="+mn-lt"/>
+                <a:ea typeface="+mn-ea"/>
+                <a:cs typeface="+mn-cs"/>
+              </a:rPr>
+              <a:t>La tercera.</a:t>
+            </a:r>
+            <a:r>
+              <a:rPr lang="es-CO" sz="1200" b="0" i="0" kern="1200" dirty="0">
+                <a:solidFill>
+                  <a:schemeClr val="tx1"/>
+                </a:solidFill>
+                <a:effectLst/>
+                <a:latin typeface="+mn-lt"/>
+                <a:ea typeface="+mn-ea"/>
+                <a:cs typeface="+mn-cs"/>
+              </a:rPr>
+              <a:t> Las colas SQS vienen en dos modos: FIFO y Standard. FIFO te garantiza que los mensajes lleguen en el orden en que entraron, pero solo aguanta trescientos por segundo. Para nuestro pico, cuando llegan las mil de golpe, no alcanza. Standard no garantiza orden estricto, pero su capacidad es ilimitada. En nuestro caso, no importa el orden — importa la velocidad. Así que Standard.</a:t>
+            </a:r>
+          </a:p>
+          <a:p>
+            <a:endParaRPr lang="es-CO" sz="1200" b="0" i="0" kern="1200" dirty="0">
+              <a:solidFill>
+                <a:schemeClr val="tx1"/>
+              </a:solidFill>
+              <a:effectLst/>
+              <a:latin typeface="+mn-lt"/>
+              <a:ea typeface="+mn-ea"/>
+              <a:cs typeface="+mn-cs"/>
+            </a:endParaRPr>
+          </a:p>
+          <a:p>
+            <a:r>
+              <a:rPr lang="es-CO" sz="1200" b="1" i="0" kern="1200" dirty="0">
+                <a:solidFill>
+                  <a:schemeClr val="tx1"/>
+                </a:solidFill>
+                <a:effectLst/>
+                <a:latin typeface="+mn-lt"/>
+                <a:ea typeface="+mn-ea"/>
+                <a:cs typeface="+mn-cs"/>
+              </a:rPr>
+              <a:t>La cuarta.</a:t>
+            </a:r>
+            <a:r>
+              <a:rPr lang="es-CO" sz="1200" b="0" i="0" kern="1200" dirty="0">
+                <a:solidFill>
+                  <a:schemeClr val="tx1"/>
+                </a:solidFill>
+                <a:effectLst/>
+                <a:latin typeface="+mn-lt"/>
+                <a:ea typeface="+mn-ea"/>
+                <a:cs typeface="+mn-cs"/>
+              </a:rPr>
+              <a:t> Para mandar correos, AWS tiene dos servicios: SNS y SES. SNS es genérico y los correos pueden tardar entre diez y treinta segundos en llegar. SES está hecho específicamente para correo y tarda entre uno y tres segundos. [ÉNFASIS] Con un límite de quince segundos, esa diferencia define si ganamos la nota completa o la mitad.</a:t>
+            </a:r>
+          </a:p>
+          <a:p>
+            <a:endParaRPr lang="es-CO" sz="1200" b="0" i="0" kern="1200" dirty="0">
+              <a:solidFill>
+                <a:schemeClr val="tx1"/>
+              </a:solidFill>
+              <a:effectLst/>
+              <a:latin typeface="+mn-lt"/>
+              <a:ea typeface="+mn-ea"/>
+              <a:cs typeface="+mn-cs"/>
+            </a:endParaRPr>
+          </a:p>
+          <a:p>
+            <a:r>
+              <a:rPr lang="es-CO" sz="1200" b="1" i="0" kern="1200" dirty="0">
+                <a:solidFill>
+                  <a:schemeClr val="tx1"/>
+                </a:solidFill>
+                <a:effectLst/>
+                <a:latin typeface="+mn-lt"/>
+                <a:ea typeface="+mn-ea"/>
+                <a:cs typeface="+mn-cs"/>
+              </a:rPr>
+              <a:t>Y la quinta</a:t>
+            </a:r>
+            <a:r>
+              <a:rPr lang="es-CO" sz="1200" b="0" i="0" kern="1200" dirty="0">
+                <a:solidFill>
+                  <a:schemeClr val="tx1"/>
+                </a:solidFill>
+                <a:effectLst/>
+                <a:latin typeface="+mn-lt"/>
+                <a:ea typeface="+mn-ea"/>
+                <a:cs typeface="+mn-cs"/>
+              </a:rPr>
+              <a:t>, que es la más sutil. Para limitar las Lambdas a diez al tiempo, había dos formas. La obvia es decirle a la función directamente "máximo diez", pero eso choca con la cuota global de la cuenta AWS, que también es diez. Si reservas las diez para una sola función, no te queda nada para nada más. Entonces lo hicimos del otro lado: en el conector que une la cola con la Lambda, ahí pusimos el tope. Funciona igual, pero no toca la cuota global.</a:t>
+            </a:r>
+          </a:p>
+          <a:p>
             <a:endParaRPr lang="en-US" dirty="0"/>
           </a:p>
         </p:txBody>
@@ -950,9 +1636,190 @@
           <a:lstStyle/>
           <a:p>
             <a:r>
-              <a:rPr lang="en-US" dirty="0"/>
-              <a:t/>
-            </a:r>
+              <a:rPr lang="es-CO" sz="1200" b="0" i="0" kern="1200" dirty="0">
+                <a:solidFill>
+                  <a:schemeClr val="tx1"/>
+                </a:solidFill>
+                <a:effectLst/>
+                <a:latin typeface="+mn-lt"/>
+                <a:ea typeface="+mn-ea"/>
+                <a:cs typeface="+mn-cs"/>
+              </a:rPr>
+              <a:t>Si me preguntan cuál es el atributo de calidad más importante de esta solución, sin pensarlo dos veces les respondo: </a:t>
+            </a:r>
+            <a:r>
+              <a:rPr lang="es-CO" sz="1200" b="1" i="0" kern="1200" dirty="0">
+                <a:solidFill>
+                  <a:schemeClr val="tx1"/>
+                </a:solidFill>
+                <a:effectLst/>
+                <a:latin typeface="+mn-lt"/>
+                <a:ea typeface="+mn-ea"/>
+                <a:cs typeface="+mn-cs"/>
+              </a:rPr>
+              <a:t>Performance</a:t>
+            </a:r>
+            <a:r>
+              <a:rPr lang="es-CO" sz="1200" b="0" i="0" kern="1200" dirty="0">
+                <a:solidFill>
+                  <a:schemeClr val="tx1"/>
+                </a:solidFill>
+                <a:effectLst/>
+                <a:latin typeface="+mn-lt"/>
+                <a:ea typeface="+mn-ea"/>
+                <a:cs typeface="+mn-cs"/>
+              </a:rPr>
+              <a:t>. La velocidad con la que llega el correo desde que se manda la petición hasta que aparece en la bandeja.</a:t>
+            </a:r>
+          </a:p>
+          <a:p>
+            <a:endParaRPr lang="es-CO" sz="1200" b="0" i="0" kern="1200" dirty="0">
+              <a:solidFill>
+                <a:schemeClr val="tx1"/>
+              </a:solidFill>
+              <a:effectLst/>
+              <a:latin typeface="+mn-lt"/>
+              <a:ea typeface="+mn-ea"/>
+              <a:cs typeface="+mn-cs"/>
+            </a:endParaRPr>
+          </a:p>
+          <a:p>
+            <a:r>
+              <a:rPr lang="es-CO" sz="1200" b="0" i="0" kern="1200" dirty="0">
+                <a:solidFill>
+                  <a:schemeClr val="tx1"/>
+                </a:solidFill>
+                <a:effectLst/>
+                <a:latin typeface="+mn-lt"/>
+                <a:ea typeface="+mn-ea"/>
+                <a:cs typeface="+mn-cs"/>
+              </a:rPr>
+              <a:t>[PAUSA] Y la razón es muy directa. Por un lado, la mitad de la nota del reto se juega ahí. Eso ya es razón suficiente. Pero más allá de la nota, en un sistema real de alerta temprana — estamos hablando de un botón de pánico en un vehículo — cada segundo cuenta. No es lo mismo que llegue el aviso en tres segundos que en treinta.</a:t>
+            </a:r>
+          </a:p>
+          <a:p>
+            <a:endParaRPr lang="es-CO" sz="1200" b="0" i="0" kern="1200" dirty="0">
+              <a:solidFill>
+                <a:schemeClr val="tx1"/>
+              </a:solidFill>
+              <a:effectLst/>
+              <a:latin typeface="+mn-lt"/>
+              <a:ea typeface="+mn-ea"/>
+              <a:cs typeface="+mn-cs"/>
+            </a:endParaRPr>
+          </a:p>
+          <a:p>
+            <a:r>
+              <a:rPr lang="es-CO" sz="1200" b="0" i="0" kern="1200" dirty="0">
+                <a:solidFill>
+                  <a:schemeClr val="tx1"/>
+                </a:solidFill>
+                <a:effectLst/>
+                <a:latin typeface="+mn-lt"/>
+                <a:ea typeface="+mn-ea"/>
+                <a:cs typeface="+mn-cs"/>
+              </a:rPr>
+              <a:t>Por eso todas las decisiones que les conté antes apuntan al mismo objetivo: bajar latencia. Saltarse la Lambda intermedia. Usar SES en vez de SNS. Procesar los mensajes apenas llegan, sin esperar a llenar el lote.</a:t>
+            </a:r>
+          </a:p>
+          <a:p>
+            <a:endParaRPr lang="es-CO" sz="1200" b="0" i="0" kern="1200" dirty="0">
+              <a:solidFill>
+                <a:schemeClr val="tx1"/>
+              </a:solidFill>
+              <a:effectLst/>
+              <a:latin typeface="+mn-lt"/>
+              <a:ea typeface="+mn-ea"/>
+              <a:cs typeface="+mn-cs"/>
+            </a:endParaRPr>
+          </a:p>
+          <a:p>
+            <a:r>
+              <a:rPr lang="es-CO" sz="1200" b="0" i="0" kern="1200" dirty="0">
+                <a:solidFill>
+                  <a:schemeClr val="tx1"/>
+                </a:solidFill>
+                <a:effectLst/>
+                <a:latin typeface="+mn-lt"/>
+                <a:ea typeface="+mn-ea"/>
+                <a:cs typeface="+mn-cs"/>
+              </a:rPr>
+              <a:t>Como atributos secundarios también cuidamos otros dos. Uno es la </a:t>
+            </a:r>
+            <a:r>
+              <a:rPr lang="es-CO" sz="1200" b="1" i="0" kern="1200" dirty="0">
+                <a:solidFill>
+                  <a:schemeClr val="tx1"/>
+                </a:solidFill>
+                <a:effectLst/>
+                <a:latin typeface="+mn-lt"/>
+                <a:ea typeface="+mn-ea"/>
+                <a:cs typeface="+mn-cs"/>
+              </a:rPr>
+              <a:t>confiabilidad</a:t>
+            </a:r>
+            <a:r>
+              <a:rPr lang="es-CO" sz="1200" b="0" i="0" kern="1200" dirty="0">
+                <a:solidFill>
+                  <a:schemeClr val="tx1"/>
+                </a:solidFill>
+                <a:effectLst/>
+                <a:latin typeface="+mn-lt"/>
+                <a:ea typeface="+mn-ea"/>
+                <a:cs typeface="+mn-cs"/>
+              </a:rPr>
+              <a:t>: la cola y la DLQ aseguran que no se pierda ningún mensaje, incluso si la Lambda tiene un problema. Y el otro es la </a:t>
+            </a:r>
+            <a:r>
+              <a:rPr lang="es-CO" sz="1200" b="1" i="0" kern="1200" dirty="0">
+                <a:solidFill>
+                  <a:schemeClr val="tx1"/>
+                </a:solidFill>
+                <a:effectLst/>
+                <a:latin typeface="+mn-lt"/>
+                <a:ea typeface="+mn-ea"/>
+                <a:cs typeface="+mn-cs"/>
+              </a:rPr>
+              <a:t>escalabilidad</a:t>
+            </a:r>
+            <a:r>
+              <a:rPr lang="es-CO" sz="1200" b="0" i="0" kern="1200" dirty="0">
+                <a:solidFill>
+                  <a:schemeClr val="tx1"/>
+                </a:solidFill>
+                <a:effectLst/>
+                <a:latin typeface="+mn-lt"/>
+                <a:ea typeface="+mn-ea"/>
+                <a:cs typeface="+mn-cs"/>
+              </a:rPr>
+              <a:t>: el </a:t>
+            </a:r>
+            <a:r>
+              <a:rPr lang="es-CO" sz="1200" b="0" i="0" kern="1200" dirty="0" err="1">
+                <a:solidFill>
+                  <a:schemeClr val="tx1"/>
+                </a:solidFill>
+                <a:effectLst/>
+                <a:latin typeface="+mn-lt"/>
+                <a:ea typeface="+mn-ea"/>
+                <a:cs typeface="+mn-cs"/>
+              </a:rPr>
+              <a:t>burst</a:t>
+            </a:r>
+            <a:r>
+              <a:rPr lang="es-CO" sz="1200" b="0" i="0" kern="1200" dirty="0">
+                <a:solidFill>
+                  <a:schemeClr val="tx1"/>
+                </a:solidFill>
+                <a:effectLst/>
+                <a:latin typeface="+mn-lt"/>
+                <a:ea typeface="+mn-ea"/>
+                <a:cs typeface="+mn-cs"/>
+              </a:rPr>
+              <a:t> de dos mil aguanta el pico inicial sin trabarse.</a:t>
+            </a:r>
+          </a:p>
+          <a:p>
             <a:endParaRPr lang="en-US" dirty="0"/>
           </a:p>
         </p:txBody>
@@ -1038,9 +1905,335 @@
           <a:lstStyle/>
           <a:p>
             <a:r>
-              <a:rPr lang="en-US" dirty="0"/>
-              <a:t/>
-            </a:r>
+              <a:rPr lang="es-CO" sz="1200" b="0" i="0" kern="1200" dirty="0">
+                <a:solidFill>
+                  <a:schemeClr val="tx1"/>
+                </a:solidFill>
+                <a:effectLst/>
+                <a:latin typeface="+mn-lt"/>
+                <a:ea typeface="+mn-ea"/>
+                <a:cs typeface="+mn-cs"/>
+              </a:rPr>
+              <a:t>Para implementar todo eso aplicamos cuatro tácticas concretas.</a:t>
+            </a:r>
+          </a:p>
+          <a:p>
+            <a:endParaRPr lang="es-CO" sz="1200" b="0" i="0" kern="1200" dirty="0">
+              <a:solidFill>
+                <a:schemeClr val="tx1"/>
+              </a:solidFill>
+              <a:effectLst/>
+              <a:latin typeface="+mn-lt"/>
+              <a:ea typeface="+mn-ea"/>
+              <a:cs typeface="+mn-cs"/>
+            </a:endParaRPr>
+          </a:p>
+          <a:p>
+            <a:r>
+              <a:rPr lang="es-CO" sz="1200" b="0" i="0" kern="1200" dirty="0">
+                <a:solidFill>
+                  <a:schemeClr val="tx1"/>
+                </a:solidFill>
+                <a:effectLst/>
+                <a:latin typeface="+mn-lt"/>
+                <a:ea typeface="+mn-ea"/>
+                <a:cs typeface="+mn-cs"/>
+              </a:rPr>
+              <a:t>[PAUSA] En </a:t>
+            </a:r>
+            <a:r>
+              <a:rPr lang="es-CO" sz="1200" b="1" i="0" kern="1200" dirty="0">
+                <a:solidFill>
+                  <a:schemeClr val="tx1"/>
+                </a:solidFill>
+                <a:effectLst/>
+                <a:latin typeface="+mn-lt"/>
+                <a:ea typeface="+mn-ea"/>
+                <a:cs typeface="+mn-cs"/>
+              </a:rPr>
+              <a:t>Performance</a:t>
+            </a:r>
+            <a:r>
+              <a:rPr lang="es-CO" sz="1200" b="0" i="0" kern="1200" dirty="0">
+                <a:solidFill>
+                  <a:schemeClr val="tx1"/>
+                </a:solidFill>
+                <a:effectLst/>
+                <a:latin typeface="+mn-lt"/>
+                <a:ea typeface="+mn-ea"/>
+                <a:cs typeface="+mn-cs"/>
+              </a:rPr>
+              <a:t>, la táctica es </a:t>
+            </a:r>
+            <a:r>
+              <a:rPr lang="es-CO" sz="1200" b="1" i="0" kern="1200" dirty="0">
+                <a:solidFill>
+                  <a:schemeClr val="tx1"/>
+                </a:solidFill>
+                <a:effectLst/>
+                <a:latin typeface="+mn-lt"/>
+                <a:ea typeface="+mn-ea"/>
+                <a:cs typeface="+mn-cs"/>
+              </a:rPr>
+              <a:t>introducir concurrencia</a:t>
+            </a:r>
+            <a:r>
+              <a:rPr lang="es-CO" sz="1200" b="0" i="0" kern="1200" dirty="0">
+                <a:solidFill>
+                  <a:schemeClr val="tx1"/>
+                </a:solidFill>
+                <a:effectLst/>
+                <a:latin typeface="+mn-lt"/>
+                <a:ea typeface="+mn-ea"/>
+                <a:cs typeface="+mn-cs"/>
+              </a:rPr>
+              <a:t>: las diez Lambdas trabajando al mismo tiempo. Si tuviéramos una sola Lambda procesando los mensajes uno detrás del otro, nos demoraríamos un montón. Diez al tiempo, drenamos la cola en pocos segundos.</a:t>
+            </a:r>
+          </a:p>
+          <a:p>
+            <a:endParaRPr lang="es-CO" sz="1200" b="0" i="0" kern="1200" dirty="0">
+              <a:solidFill>
+                <a:schemeClr val="tx1"/>
+              </a:solidFill>
+              <a:effectLst/>
+              <a:latin typeface="+mn-lt"/>
+              <a:ea typeface="+mn-ea"/>
+              <a:cs typeface="+mn-cs"/>
+            </a:endParaRPr>
+          </a:p>
+          <a:p>
+            <a:r>
+              <a:rPr lang="es-CO" sz="1200" b="0" i="0" kern="1200" dirty="0">
+                <a:solidFill>
+                  <a:schemeClr val="tx1"/>
+                </a:solidFill>
+                <a:effectLst/>
+                <a:latin typeface="+mn-lt"/>
+                <a:ea typeface="+mn-ea"/>
+                <a:cs typeface="+mn-cs"/>
+              </a:rPr>
+              <a:t>En </a:t>
+            </a:r>
+            <a:r>
+              <a:rPr lang="es-CO" sz="1200" b="1" i="0" kern="1200" dirty="0" err="1">
+                <a:solidFill>
+                  <a:schemeClr val="tx1"/>
+                </a:solidFill>
+                <a:effectLst/>
+                <a:latin typeface="+mn-lt"/>
+                <a:ea typeface="+mn-ea"/>
+                <a:cs typeface="+mn-cs"/>
+              </a:rPr>
+              <a:t>Availability</a:t>
+            </a:r>
+            <a:r>
+              <a:rPr lang="es-CO" sz="1200" b="0" i="0" kern="1200" dirty="0">
+                <a:solidFill>
+                  <a:schemeClr val="tx1"/>
+                </a:solidFill>
+                <a:effectLst/>
+                <a:latin typeface="+mn-lt"/>
+                <a:ea typeface="+mn-ea"/>
+                <a:cs typeface="+mn-cs"/>
+              </a:rPr>
+              <a:t>, la táctica es </a:t>
+            </a:r>
+            <a:r>
+              <a:rPr lang="es-CO" sz="1200" b="1" i="0" kern="1200" dirty="0">
+                <a:solidFill>
+                  <a:schemeClr val="tx1"/>
+                </a:solidFill>
+                <a:effectLst/>
+                <a:latin typeface="+mn-lt"/>
+                <a:ea typeface="+mn-ea"/>
+                <a:cs typeface="+mn-cs"/>
+              </a:rPr>
+              <a:t>reintentar con manejo de errores</a:t>
+            </a:r>
+            <a:r>
+              <a:rPr lang="es-CO" sz="1200" b="0" i="0" kern="1200" dirty="0">
+                <a:solidFill>
+                  <a:schemeClr val="tx1"/>
+                </a:solidFill>
+                <a:effectLst/>
+                <a:latin typeface="+mn-lt"/>
+                <a:ea typeface="+mn-ea"/>
+                <a:cs typeface="+mn-cs"/>
+              </a:rPr>
+              <a:t>. Si por algún motivo la Lambda se cae procesando un mensaje, ese mensaje vuelve a la cola y se reintenta. Si después de tres intentos sigue fallando, se va a la DLQ y suena una alarma. Pero ningún mensaje se pierde, nunca.</a:t>
+            </a:r>
+          </a:p>
+          <a:p>
+            <a:endParaRPr lang="es-CO" sz="1200" b="0" i="0" kern="1200" dirty="0">
+              <a:solidFill>
+                <a:schemeClr val="tx1"/>
+              </a:solidFill>
+              <a:effectLst/>
+              <a:latin typeface="+mn-lt"/>
+              <a:ea typeface="+mn-ea"/>
+              <a:cs typeface="+mn-cs"/>
+            </a:endParaRPr>
+          </a:p>
+          <a:p>
+            <a:r>
+              <a:rPr lang="es-CO" sz="1200" b="0" i="0" kern="1200" dirty="0">
+                <a:solidFill>
+                  <a:schemeClr val="tx1"/>
+                </a:solidFill>
+                <a:effectLst/>
+                <a:latin typeface="+mn-lt"/>
+                <a:ea typeface="+mn-ea"/>
+                <a:cs typeface="+mn-cs"/>
+              </a:rPr>
+              <a:t>En </a:t>
+            </a:r>
+            <a:r>
+              <a:rPr lang="es-CO" sz="1200" b="1" i="0" kern="1200" dirty="0" err="1">
+                <a:solidFill>
+                  <a:schemeClr val="tx1"/>
+                </a:solidFill>
+                <a:effectLst/>
+                <a:latin typeface="+mn-lt"/>
+                <a:ea typeface="+mn-ea"/>
+                <a:cs typeface="+mn-cs"/>
+              </a:rPr>
+              <a:t>Modifiability</a:t>
+            </a:r>
+            <a:r>
+              <a:rPr lang="es-CO" sz="1200" b="0" i="0" kern="1200" dirty="0">
+                <a:solidFill>
+                  <a:schemeClr val="tx1"/>
+                </a:solidFill>
+                <a:effectLst/>
+                <a:latin typeface="+mn-lt"/>
+                <a:ea typeface="+mn-ea"/>
+                <a:cs typeface="+mn-cs"/>
+              </a:rPr>
+              <a:t>, usamos el patrón </a:t>
+            </a:r>
+            <a:r>
+              <a:rPr lang="es-CO" sz="1200" b="1" i="0" kern="1200" dirty="0" err="1">
+                <a:solidFill>
+                  <a:schemeClr val="tx1"/>
+                </a:solidFill>
+                <a:effectLst/>
+                <a:latin typeface="+mn-lt"/>
+                <a:ea typeface="+mn-ea"/>
+                <a:cs typeface="+mn-cs"/>
+              </a:rPr>
+              <a:t>broker</a:t>
+            </a:r>
+            <a:r>
+              <a:rPr lang="es-CO" sz="1200" b="0" i="0" kern="1200" dirty="0">
+                <a:solidFill>
+                  <a:schemeClr val="tx1"/>
+                </a:solidFill>
+                <a:effectLst/>
+                <a:latin typeface="+mn-lt"/>
+                <a:ea typeface="+mn-ea"/>
+                <a:cs typeface="+mn-cs"/>
+              </a:rPr>
+              <a:t> — la cola como punto intermedio. Mañana podemos cambiar la Lambda por un servidor Docker o por una EC2, y ni el cliente ni el API Gateway se enteran. La cola es el contrato.</a:t>
+            </a:r>
+          </a:p>
+          <a:p>
+            <a:endParaRPr lang="es-CO" sz="1200" b="0" i="0" kern="1200" dirty="0">
+              <a:solidFill>
+                <a:schemeClr val="tx1"/>
+              </a:solidFill>
+              <a:effectLst/>
+              <a:latin typeface="+mn-lt"/>
+              <a:ea typeface="+mn-ea"/>
+              <a:cs typeface="+mn-cs"/>
+            </a:endParaRPr>
+          </a:p>
+          <a:p>
+            <a:r>
+              <a:rPr lang="es-CO" sz="1200" b="0" i="0" kern="1200" dirty="0">
+                <a:solidFill>
+                  <a:schemeClr val="tx1"/>
+                </a:solidFill>
+                <a:effectLst/>
+                <a:latin typeface="+mn-lt"/>
+                <a:ea typeface="+mn-ea"/>
+                <a:cs typeface="+mn-cs"/>
+              </a:rPr>
+              <a:t>Y en </a:t>
+            </a:r>
+            <a:r>
+              <a:rPr lang="es-CO" sz="1200" b="1" i="0" kern="1200" dirty="0">
+                <a:solidFill>
+                  <a:schemeClr val="tx1"/>
+                </a:solidFill>
+                <a:effectLst/>
+                <a:latin typeface="+mn-lt"/>
+                <a:ea typeface="+mn-ea"/>
+                <a:cs typeface="+mn-cs"/>
+              </a:rPr>
+              <a:t>Security</a:t>
+            </a:r>
+            <a:r>
+              <a:rPr lang="es-CO" sz="1200" b="0" i="0" kern="1200" dirty="0">
+                <a:solidFill>
+                  <a:schemeClr val="tx1"/>
+                </a:solidFill>
+                <a:effectLst/>
+                <a:latin typeface="+mn-lt"/>
+                <a:ea typeface="+mn-ea"/>
+                <a:cs typeface="+mn-cs"/>
+              </a:rPr>
+              <a:t>, </a:t>
+            </a:r>
+            <a:r>
+              <a:rPr lang="es-CO" sz="1200" b="1" i="0" kern="1200" dirty="0">
+                <a:solidFill>
+                  <a:schemeClr val="tx1"/>
+                </a:solidFill>
+                <a:effectLst/>
+                <a:latin typeface="+mn-lt"/>
+                <a:ea typeface="+mn-ea"/>
+                <a:cs typeface="+mn-cs"/>
+              </a:rPr>
+              <a:t>mínimo privilegio</a:t>
+            </a:r>
+            <a:r>
+              <a:rPr lang="es-CO" sz="1200" b="0" i="0" kern="1200" dirty="0">
+                <a:solidFill>
+                  <a:schemeClr val="tx1"/>
+                </a:solidFill>
+                <a:effectLst/>
+                <a:latin typeface="+mn-lt"/>
+                <a:ea typeface="+mn-ea"/>
+                <a:cs typeface="+mn-cs"/>
+              </a:rPr>
+              <a:t>. La Lambda solo tiene permiso para mandar correos, nada más. El API Gateway solo tiene permiso para escribir en la cola, nada más. Y el </a:t>
+            </a:r>
+            <a:r>
+              <a:rPr lang="es-CO" sz="1200" b="0" i="0" kern="1200" dirty="0" err="1">
+                <a:solidFill>
+                  <a:schemeClr val="tx1"/>
+                </a:solidFill>
+                <a:effectLst/>
+                <a:latin typeface="+mn-lt"/>
+                <a:ea typeface="+mn-ea"/>
+                <a:cs typeface="+mn-cs"/>
+              </a:rPr>
+              <a:t>endpoint</a:t>
+            </a:r>
+            <a:r>
+              <a:rPr lang="es-CO" sz="1200" b="0" i="0" kern="1200" dirty="0">
+                <a:solidFill>
+                  <a:schemeClr val="tx1"/>
+                </a:solidFill>
+                <a:effectLst/>
+                <a:latin typeface="+mn-lt"/>
+                <a:ea typeface="+mn-ea"/>
+                <a:cs typeface="+mn-cs"/>
+              </a:rPr>
+              <a:t> pide la llave para cualquier petición — sin esa llave, responde un cuatrocientos tres y chao.</a:t>
+            </a:r>
+          </a:p>
+          <a:p>
             <a:endParaRPr lang="en-US" dirty="0"/>
           </a:p>
         </p:txBody>
@@ -1125,10 +2318,6 @@
           <a:bodyPr/>
           <a:lstStyle/>
           <a:p>
-            <a:r>
-              <a:rPr lang="en-US" dirty="0"/>
-              <a:t/>
-            </a:r>
             <a:endParaRPr lang="en-US" dirty="0"/>
           </a:p>
         </p:txBody>
@@ -1213,10 +2402,6 @@
           <a:bodyPr/>
           <a:lstStyle/>
           <a:p>
-            <a:r>
-              <a:rPr lang="en-US" dirty="0"/>
-              <a:t/>
-            </a:r>
             <a:endParaRPr lang="en-US" dirty="0"/>
           </a:p>
         </p:txBody>
@@ -1301,10 +2486,6 @@
           <a:bodyPr/>
           <a:lstStyle/>
           <a:p>
-            <a:r>
-              <a:rPr lang="en-US" dirty="0"/>
-              <a:t/>
-            </a:r>
             <a:endParaRPr lang="en-US" dirty="0"/>
           </a:p>
         </p:txBody>
@@ -1378,6 +2559,11 @@
 <file path=ppt/slideMasters/slideMaster1.xml><?xml version="1.0" encoding="utf-8"?>
 <p:sldMaster xmlns:a="http://schemas.openxmlformats.org/drawingml/2006/main" xmlns:r="http://schemas.openxmlformats.org/officeDocument/2006/relationships" xmlns:p="http://schemas.openxmlformats.org/presentationml/2006/main">
   <p:cSld>
+    <p:bg>
+      <p:bgRef idx="1001">
+        <a:schemeClr val="bg1"/>
+      </p:bgRef>
+    </p:bg>
     <p:spTree>
       <p:nvGrpSpPr>
         <p:cNvPr id="1" name=""/>
@@ -1660,6 +2846,7 @@
         <a:solidFill>
           <a:srgbClr val="0F172A"/>
         </a:solidFill>
+        <a:effectLst/>
       </p:bgPr>
     </p:bg>
     <p:spTree>
@@ -1700,6 +2887,13 @@
             <a:prstDash val="solid"/>
           </a:ln>
         </p:spPr>
+        <p:txBody>
+          <a:bodyPr/>
+          <a:lstStyle/>
+          <a:p>
+            <a:endParaRPr lang="en-US"/>
+          </a:p>
+        </p:txBody>
       </p:sp>
       <p:sp>
         <p:nvSpPr>
@@ -1722,11 +2916,11 @@
           <a:bodyPr wrap="square" lIns="0" tIns="0" rIns="0" bIns="0" rtlCol="0" anchor="ctr"/>
           <a:lstStyle/>
           <a:p>
-            <a:pPr indent="0" marL="0">
+            <a:pPr marL="0" indent="0">
               <a:buNone/>
             </a:pPr>
             <a:r>
-              <a:rPr lang="en-US" sz="1200" b="1" spc="400" kern="0" dirty="0">
+              <a:rPr lang="en-US" sz="1200" b="1" kern="0" spc="400" dirty="0">
                 <a:solidFill>
                   <a:srgbClr val="94A3B8"/>
                 </a:solidFill>
@@ -1761,7 +2955,7 @@
           <a:bodyPr wrap="square" lIns="0" tIns="0" rIns="0" bIns="0" rtlCol="0" anchor="ctr"/>
           <a:lstStyle/>
           <a:p>
-            <a:pPr indent="0" marL="0">
+            <a:pPr marL="0" indent="0">
               <a:buNone/>
             </a:pPr>
             <a:r>
@@ -1800,7 +2994,7 @@
           <a:bodyPr wrap="square" lIns="0" tIns="0" rIns="0" bIns="0" rtlCol="0" anchor="ctr"/>
           <a:lstStyle/>
           <a:p>
-            <a:pPr indent="0" marL="0">
+            <a:pPr marL="0" indent="0">
               <a:buNone/>
             </a:pPr>
             <a:r>
@@ -1839,7 +3033,7 @@
           <a:bodyPr wrap="square" lIns="0" tIns="0" rIns="0" bIns="0" rtlCol="0" anchor="ctr"/>
           <a:lstStyle/>
           <a:p>
-            <a:pPr indent="0" marL="0">
+            <a:pPr marL="0" indent="0">
               <a:buNone/>
             </a:pPr>
             <a:r>
@@ -1878,7 +3072,7 @@
           <a:bodyPr wrap="square" lIns="0" tIns="0" rIns="0" bIns="0" rtlCol="0" anchor="ctr"/>
           <a:lstStyle/>
           <a:p>
-            <a:pPr indent="0" marL="0">
+            <a:pPr marL="0" indent="0">
               <a:buNone/>
             </a:pPr>
             <a:r>
@@ -1920,6 +3114,13 @@
             <a:prstDash val="solid"/>
           </a:ln>
         </p:spPr>
+        <p:txBody>
+          <a:bodyPr/>
+          <a:lstStyle/>
+          <a:p>
+            <a:endParaRPr lang="en-US"/>
+          </a:p>
+        </p:txBody>
       </p:sp>
       <p:sp>
         <p:nvSpPr>
@@ -1942,11 +3143,11 @@
           <a:bodyPr wrap="square" lIns="0" tIns="0" rIns="0" bIns="0" rtlCol="0" anchor="ctr"/>
           <a:lstStyle/>
           <a:p>
-            <a:pPr indent="0" marL="0">
+            <a:pPr marL="0" indent="0">
               <a:buNone/>
             </a:pPr>
             <a:r>
-              <a:rPr lang="en-US" sz="1100" b="1" spc="400" kern="0" dirty="0">
+              <a:rPr lang="en-US" sz="1100" b="1" kern="0" spc="400" dirty="0">
                 <a:solidFill>
                   <a:srgbClr val="94A3B8"/>
                 </a:solidFill>
@@ -1981,7 +3182,7 @@
           <a:bodyPr wrap="square" lIns="0" tIns="0" rIns="0" bIns="0" rtlCol="0" anchor="ctr"/>
           <a:lstStyle/>
           <a:p>
-            <a:pPr indent="0" marL="0">
+            <a:pPr marL="0" indent="0">
               <a:buNone/>
             </a:pPr>
             <a:r>
@@ -2020,7 +3221,7 @@
           <a:bodyPr wrap="square" lIns="0" tIns="0" rIns="0" bIns="0" rtlCol="0" anchor="ctr"/>
           <a:lstStyle/>
           <a:p>
-            <a:pPr indent="0" marL="0">
+            <a:pPr marL="0" indent="0">
               <a:buNone/>
             </a:pPr>
             <a:r>
@@ -2059,7 +3260,7 @@
           <a:bodyPr wrap="square" lIns="0" tIns="0" rIns="0" bIns="0" rtlCol="0" anchor="ctr"/>
           <a:lstStyle/>
           <a:p>
-            <a:pPr indent="0" marL="0">
+            <a:pPr marL="0" indent="0">
               <a:buNone/>
             </a:pPr>
             <a:r>
@@ -2098,7 +3299,7 @@
           <a:bodyPr wrap="square" lIns="0" tIns="0" rIns="0" bIns="0" rtlCol="0" anchor="ctr"/>
           <a:lstStyle/>
           <a:p>
-            <a:pPr indent="0" marL="0">
+            <a:pPr marL="0" indent="0">
               <a:buNone/>
             </a:pPr>
             <a:r>
@@ -2137,9 +3338,6 @@
           <a:bodyPr wrap="square" lIns="0" tIns="0" rIns="0" bIns="0" rtlCol="0" anchor="ctr"/>
           <a:lstStyle/>
           <a:p>
-            <a:pPr indent="0" marL="0">
-              <a:buNone/>
-            </a:pPr>
             <a:r>
               <a:rPr lang="en-US" sz="1100" dirty="0">
                 <a:solidFill>
@@ -2149,7 +3347,7 @@
                 <a:ea typeface="Calibri" pitchFamily="34" charset="-122"/>
                 <a:cs typeface="Calibri" pitchFamily="34" charset="-120"/>
               </a:rPr>
-              <a:t>2026-04-27  |  github.com/Prospect121/reto2-fleet-alerts</a:t>
+              <a:t>2026-04-27  |  github.com/DkSanjed/reto2-eventos-correos</a:t>
             </a:r>
             <a:endParaRPr lang="en-US" sz="1100" dirty="0"/>
           </a:p>
@@ -2171,6 +3369,7 @@
         <a:solidFill>
           <a:srgbClr val="0F172A"/>
         </a:solidFill>
+        <a:effectLst/>
       </p:bgPr>
     </p:bg>
     <p:spTree>
@@ -2211,6 +3410,13 @@
             <a:prstDash val="solid"/>
           </a:ln>
         </p:spPr>
+        <p:txBody>
+          <a:bodyPr/>
+          <a:lstStyle/>
+          <a:p>
+            <a:endParaRPr lang="en-US"/>
+          </a:p>
+        </p:txBody>
       </p:sp>
       <p:sp>
         <p:nvSpPr>
@@ -2233,7 +3439,7 @@
           <a:bodyPr wrap="square" lIns="0" tIns="0" rIns="0" bIns="0" rtlCol="0" anchor="ctr"/>
           <a:lstStyle/>
           <a:p>
-            <a:pPr indent="0" marL="0">
+            <a:pPr marL="0" indent="0">
               <a:buNone/>
             </a:pPr>
             <a:r>
@@ -2272,7 +3478,7 @@
           <a:bodyPr wrap="square" lIns="0" tIns="0" rIns="0" bIns="0" rtlCol="0" anchor="ctr"/>
           <a:lstStyle/>
           <a:p>
-            <a:pPr indent="0" marL="0">
+            <a:pPr marL="0" indent="0">
               <a:buNone/>
             </a:pPr>
             <a:r>
@@ -2314,6 +3520,13 @@
             <a:prstDash val="solid"/>
           </a:ln>
         </p:spPr>
+        <p:txBody>
+          <a:bodyPr/>
+          <a:lstStyle/>
+          <a:p>
+            <a:endParaRPr lang="en-US"/>
+          </a:p>
+        </p:txBody>
       </p:sp>
       <p:sp>
         <p:nvSpPr>
@@ -2339,6 +3552,13 @@
             <a:prstDash val="solid"/>
           </a:ln>
         </p:spPr>
+        <p:txBody>
+          <a:bodyPr/>
+          <a:lstStyle/>
+          <a:p>
+            <a:endParaRPr lang="en-US"/>
+          </a:p>
+        </p:txBody>
       </p:sp>
       <p:sp>
         <p:nvSpPr>
@@ -2361,11 +3581,11 @@
           <a:bodyPr wrap="square" lIns="0" tIns="0" rIns="0" bIns="0" rtlCol="0" anchor="ctr"/>
           <a:lstStyle/>
           <a:p>
-            <a:pPr indent="0" marL="0">
+            <a:pPr marL="0" indent="0">
               <a:buNone/>
             </a:pPr>
             <a:r>
-              <a:rPr lang="en-US" sz="1100" b="1" spc="400" kern="0" dirty="0">
+              <a:rPr lang="en-US" sz="1100" b="1" kern="0" spc="400" dirty="0">
                 <a:solidFill>
                   <a:srgbClr val="94A3B8"/>
                 </a:solidFill>
@@ -2400,9 +3620,6 @@
           <a:bodyPr wrap="square" lIns="0" tIns="0" rIns="0" bIns="0" rtlCol="0" anchor="ctr"/>
           <a:lstStyle/>
           <a:p>
-            <a:pPr indent="0" marL="0">
-              <a:buNone/>
-            </a:pPr>
             <a:r>
               <a:rPr lang="en-US" sz="2200" b="1" dirty="0">
                 <a:solidFill>
@@ -2412,46 +3629,68 @@
                 <a:ea typeface="Calibri" pitchFamily="34" charset="-122"/>
                 <a:cs typeface="Calibri" pitchFamily="34" charset="-120"/>
               </a:rPr>
-              <a:t>github.com/Prospect121/reto2-fleet-alerts</a:t>
-            </a:r>
-            <a:endParaRPr lang="en-US" sz="2200" dirty="0"/>
-          </a:p>
-        </p:txBody>
-      </p:sp>
-      <p:sp>
-        <p:nvSpPr>
-          <p:cNvPr id="9" name="Text 7"/>
-          <p:cNvSpPr/>
-          <p:nvPr/>
-        </p:nvSpPr>
-        <p:spPr>
-          <a:xfrm>
-            <a:off x="1097280" y="4754880"/>
-            <a:ext cx="10058400" cy="365760"/>
-          </a:xfrm>
-          <a:prstGeom prst="rect">
-            <a:avLst/>
-          </a:prstGeom>
-          <a:noFill/>
-          <a:ln/>
-        </p:spPr>
-        <p:txBody>
-          <a:bodyPr wrap="square" lIns="0" tIns="0" rIns="0" bIns="0" rtlCol="0" anchor="ctr"/>
-          <a:lstStyle/>
-          <a:p>
-            <a:pPr indent="0" marL="0">
-              <a:buNone/>
-            </a:pPr>
-            <a:r>
-              <a:rPr lang="en-US" sz="1300" dirty="0">
-                <a:solidFill>
-                  <a:srgbClr val="CBD5E1"/>
+              <a:t>github.com/</a:t>
+            </a:r>
+            <a:r>
+              <a:rPr lang="en-US" sz="2200" b="1" dirty="0" err="1">
+                <a:solidFill>
+                  <a:srgbClr val="FFFFFF"/>
                 </a:solidFill>
                 <a:latin typeface="Calibri" pitchFamily="34" charset="0"/>
                 <a:ea typeface="Calibri" pitchFamily="34" charset="-122"/>
                 <a:cs typeface="Calibri" pitchFamily="34" charset="-120"/>
               </a:rPr>
-              <a:t>Rama: v2-security-and-latency</a:t>
+              <a:t>DkSanjed</a:t>
+            </a:r>
+            <a:r>
+              <a:rPr lang="en-US" sz="2200" b="1" dirty="0">
+                <a:solidFill>
+                  <a:srgbClr val="FFFFFF"/>
+                </a:solidFill>
+                <a:latin typeface="Calibri" pitchFamily="34" charset="0"/>
+                <a:ea typeface="Calibri" pitchFamily="34" charset="-122"/>
+                <a:cs typeface="Calibri" pitchFamily="34" charset="-120"/>
+              </a:rPr>
+              <a:t>/reto2-eventos-correos</a:t>
+            </a:r>
+            <a:endParaRPr lang="en-US" sz="2200" dirty="0"/>
+          </a:p>
+        </p:txBody>
+      </p:sp>
+      <p:sp>
+        <p:nvSpPr>
+          <p:cNvPr id="9" name="Text 7"/>
+          <p:cNvSpPr/>
+          <p:nvPr/>
+        </p:nvSpPr>
+        <p:spPr>
+          <a:xfrm>
+            <a:off x="1097280" y="4754880"/>
+            <a:ext cx="10058400" cy="365760"/>
+          </a:xfrm>
+          <a:prstGeom prst="rect">
+            <a:avLst/>
+          </a:prstGeom>
+          <a:noFill/>
+          <a:ln/>
+        </p:spPr>
+        <p:txBody>
+          <a:bodyPr wrap="square" lIns="0" tIns="0" rIns="0" bIns="0" rtlCol="0" anchor="ctr"/>
+          <a:lstStyle/>
+          <a:p>
+            <a:pPr marL="0" indent="0">
+              <a:buNone/>
+            </a:pPr>
+            <a:r>
+              <a:rPr lang="en-US" sz="1300" dirty="0">
+                <a:solidFill>
+                  <a:srgbClr val="CBD5E1"/>
+                </a:solidFill>
+                <a:latin typeface="Calibri" pitchFamily="34" charset="0"/>
+                <a:ea typeface="Calibri" pitchFamily="34" charset="-122"/>
+                <a:cs typeface="Calibri" pitchFamily="34" charset="-120"/>
+              </a:rPr>
+              <a:t>Rama: main</a:t>
             </a:r>
             <a:endParaRPr lang="en-US" sz="1300" dirty="0"/>
           </a:p>
@@ -2478,7 +3717,7 @@
           <a:bodyPr wrap="square" lIns="0" tIns="0" rIns="0" bIns="0" rtlCol="0" anchor="ctr"/>
           <a:lstStyle/>
           <a:p>
-            <a:pPr indent="0" marL="0">
+            <a:pPr marL="0" indent="0">
               <a:spcAft>
                 <a:spcPts val="400"/>
               </a:spcAft>
@@ -2498,7 +3737,7 @@
             <a:endParaRPr lang="en-US" sz="1200" dirty="0"/>
           </a:p>
           <a:p>
-            <a:pPr indent="0" marL="0">
+            <a:pPr marL="0" indent="0">
               <a:spcAft>
                 <a:spcPts val="400"/>
               </a:spcAft>
@@ -2518,7 +3757,7 @@
             <a:endParaRPr lang="en-US" sz="1200" dirty="0"/>
           </a:p>
           <a:p>
-            <a:pPr indent="0" marL="0">
+            <a:pPr marL="0" indent="0">
               <a:spcAft>
                 <a:spcPts val="400"/>
               </a:spcAft>
@@ -2560,7 +3799,7 @@
           <a:bodyPr wrap="square" lIns="0" tIns="0" rIns="0" bIns="0" rtlCol="0" anchor="ctr"/>
           <a:lstStyle/>
           <a:p>
-            <a:pPr indent="0" marL="0">
+            <a:pPr marL="0" indent="0">
               <a:buNone/>
             </a:pPr>
             <a:r>
@@ -2599,7 +3838,7 @@
           <a:bodyPr wrap="square" lIns="0" tIns="0" rIns="0" bIns="0" rtlCol="0" anchor="ctr"/>
           <a:lstStyle/>
           <a:p>
-            <a:pPr indent="0" marL="0">
+            <a:pPr marL="0" indent="0">
               <a:buNone/>
             </a:pPr>
             <a:r>
@@ -2633,6 +3872,7 @@
         <a:solidFill>
           <a:srgbClr val="FFFFFF"/>
         </a:solidFill>
+        <a:effectLst/>
       </p:bgPr>
     </p:bg>
     <p:spTree>
@@ -2670,7 +3910,7 @@
           <a:bodyPr wrap="square" lIns="0" tIns="0" rIns="0" bIns="0" rtlCol="0" anchor="ctr"/>
           <a:lstStyle/>
           <a:p>
-            <a:pPr algn="l" indent="0" marL="0">
+            <a:pPr marL="0" indent="0" algn="l">
               <a:buNone/>
             </a:pPr>
             <a:r>
@@ -2709,7 +3949,7 @@
           <a:bodyPr wrap="square" lIns="0" tIns="0" rIns="0" bIns="0" rtlCol="0" anchor="ctr"/>
           <a:lstStyle/>
           <a:p>
-            <a:pPr algn="l" indent="0" marL="0">
+            <a:pPr marL="0" indent="0" algn="l">
               <a:buNone/>
             </a:pPr>
             <a:r>
@@ -2751,6 +3991,13 @@
             <a:prstDash val="solid"/>
           </a:ln>
         </p:spPr>
+        <p:txBody>
+          <a:bodyPr/>
+          <a:lstStyle/>
+          <a:p>
+            <a:endParaRPr lang="en-US"/>
+          </a:p>
+        </p:txBody>
       </p:sp>
       <p:sp>
         <p:nvSpPr>
@@ -2776,6 +4023,13 @@
             <a:prstDash val="solid"/>
           </a:ln>
         </p:spPr>
+        <p:txBody>
+          <a:bodyPr/>
+          <a:lstStyle/>
+          <a:p>
+            <a:endParaRPr lang="en-US"/>
+          </a:p>
+        </p:txBody>
       </p:sp>
       <p:sp>
         <p:nvSpPr>
@@ -2801,6 +4055,13 @@
             <a:prstDash val="solid"/>
           </a:ln>
         </p:spPr>
+        <p:txBody>
+          <a:bodyPr/>
+          <a:lstStyle/>
+          <a:p>
+            <a:endParaRPr lang="en-US"/>
+          </a:p>
+        </p:txBody>
       </p:sp>
       <p:sp>
         <p:nvSpPr>
@@ -2823,7 +4084,7 @@
           <a:bodyPr wrap="square" lIns="0" tIns="0" rIns="0" bIns="0" rtlCol="0" anchor="ctr"/>
           <a:lstStyle/>
           <a:p>
-            <a:pPr algn="ctr" indent="0" marL="0">
+            <a:pPr marL="0" indent="0" algn="ctr">
               <a:buNone/>
             </a:pPr>
             <a:r>
@@ -2862,7 +4123,7 @@
           <a:bodyPr wrap="square" lIns="0" tIns="0" rIns="0" bIns="0" rtlCol="0" anchor="ctr"/>
           <a:lstStyle/>
           <a:p>
-            <a:pPr indent="0" marL="0">
+            <a:pPr marL="0" indent="0">
               <a:buNone/>
             </a:pPr>
             <a:r>
@@ -2989,6 +4250,13 @@
             <a:prstDash val="solid"/>
           </a:ln>
         </p:spPr>
+        <p:txBody>
+          <a:bodyPr/>
+          <a:lstStyle/>
+          <a:p>
+            <a:endParaRPr lang="en-US"/>
+          </a:p>
+        </p:txBody>
       </p:sp>
       <p:sp>
         <p:nvSpPr>
@@ -3014,6 +4282,13 @@
             <a:prstDash val="solid"/>
           </a:ln>
         </p:spPr>
+        <p:txBody>
+          <a:bodyPr/>
+          <a:lstStyle/>
+          <a:p>
+            <a:endParaRPr lang="en-US"/>
+          </a:p>
+        </p:txBody>
       </p:sp>
       <p:sp>
         <p:nvSpPr>
@@ -3039,6 +4314,13 @@
             <a:prstDash val="solid"/>
           </a:ln>
         </p:spPr>
+        <p:txBody>
+          <a:bodyPr/>
+          <a:lstStyle/>
+          <a:p>
+            <a:endParaRPr lang="en-US"/>
+          </a:p>
+        </p:txBody>
       </p:sp>
       <p:sp>
         <p:nvSpPr>
@@ -3061,7 +4343,7 @@
           <a:bodyPr wrap="square" lIns="0" tIns="0" rIns="0" bIns="0" rtlCol="0" anchor="ctr"/>
           <a:lstStyle/>
           <a:p>
-            <a:pPr algn="ctr" indent="0" marL="0">
+            <a:pPr marL="0" indent="0" algn="ctr">
               <a:buNone/>
             </a:pPr>
             <a:r>
@@ -3100,7 +4382,7 @@
           <a:bodyPr wrap="square" lIns="0" tIns="0" rIns="0" bIns="0" rtlCol="0" anchor="ctr"/>
           <a:lstStyle/>
           <a:p>
-            <a:pPr indent="0" marL="0">
+            <a:pPr marL="0" indent="0">
               <a:buNone/>
             </a:pPr>
             <a:r>
@@ -3227,6 +4509,13 @@
             <a:prstDash val="solid"/>
           </a:ln>
         </p:spPr>
+        <p:txBody>
+          <a:bodyPr/>
+          <a:lstStyle/>
+          <a:p>
+            <a:endParaRPr lang="en-US"/>
+          </a:p>
+        </p:txBody>
       </p:sp>
       <p:sp>
         <p:nvSpPr>
@@ -3252,6 +4541,13 @@
             <a:prstDash val="solid"/>
           </a:ln>
         </p:spPr>
+        <p:txBody>
+          <a:bodyPr/>
+          <a:lstStyle/>
+          <a:p>
+            <a:endParaRPr lang="en-US"/>
+          </a:p>
+        </p:txBody>
       </p:sp>
       <p:sp>
         <p:nvSpPr>
@@ -3277,6 +4573,13 @@
             <a:prstDash val="solid"/>
           </a:ln>
         </p:spPr>
+        <p:txBody>
+          <a:bodyPr/>
+          <a:lstStyle/>
+          <a:p>
+            <a:endParaRPr lang="en-US"/>
+          </a:p>
+        </p:txBody>
       </p:sp>
       <p:sp>
         <p:nvSpPr>
@@ -3299,7 +4602,7 @@
           <a:bodyPr wrap="square" lIns="0" tIns="0" rIns="0" bIns="0" rtlCol="0" anchor="ctr"/>
           <a:lstStyle/>
           <a:p>
-            <a:pPr algn="ctr" indent="0" marL="0">
+            <a:pPr marL="0" indent="0" algn="ctr">
               <a:buNone/>
             </a:pPr>
             <a:r>
@@ -3338,7 +4641,7 @@
           <a:bodyPr wrap="square" lIns="0" tIns="0" rIns="0" bIns="0" rtlCol="0" anchor="ctr"/>
           <a:lstStyle/>
           <a:p>
-            <a:pPr indent="0" marL="0">
+            <a:pPr marL="0" indent="0">
               <a:buNone/>
             </a:pPr>
             <a:r>
@@ -3462,7 +4765,7 @@
           <a:bodyPr wrap="square" lIns="0" tIns="0" rIns="0" bIns="0" rtlCol="0" anchor="ctr"/>
           <a:lstStyle/>
           <a:p>
-            <a:pPr algn="l" indent="0" marL="0">
+            <a:pPr marL="0" indent="0" algn="l">
               <a:buNone/>
             </a:pPr>
             <a:r>
@@ -3501,7 +4804,7 @@
           <a:bodyPr wrap="square" lIns="0" tIns="0" rIns="0" bIns="0" rtlCol="0" anchor="ctr"/>
           <a:lstStyle/>
           <a:p>
-            <a:pPr algn="r" indent="0" marL="0">
+            <a:pPr marL="0" indent="0" algn="r">
               <a:buNone/>
             </a:pPr>
             <a:r>
@@ -3535,6 +4838,7 @@
         <a:solidFill>
           <a:srgbClr val="FFFFFF"/>
         </a:solidFill>
+        <a:effectLst/>
       </p:bgPr>
     </p:bg>
     <p:spTree>
@@ -3572,7 +4876,7 @@
           <a:bodyPr wrap="square" lIns="0" tIns="0" rIns="0" bIns="0" rtlCol="0" anchor="ctr"/>
           <a:lstStyle/>
           <a:p>
-            <a:pPr algn="l" indent="0" marL="0">
+            <a:pPr marL="0" indent="0" algn="l">
               <a:buNone/>
             </a:pPr>
             <a:r>
@@ -3611,7 +4915,7 @@
           <a:bodyPr wrap="square" lIns="0" tIns="0" rIns="0" bIns="0" rtlCol="0" anchor="ctr"/>
           <a:lstStyle/>
           <a:p>
-            <a:pPr algn="l" indent="0" marL="0">
+            <a:pPr marL="0" indent="0" algn="l">
               <a:buNone/>
             </a:pPr>
             <a:r>
@@ -3631,14 +4935,14 @@
       </p:sp>
       <p:pic>
         <p:nvPicPr>
-          <p:cNvPr id="4" name="Image 0" descr="C:\Users\erick\Documents\work\Diplomado\Modulo2\reto2-fleet-alerts\docs\architecture.png">    </p:cNvPr>
+          <p:cNvPr id="4" name="Image 0" descr="C:\Users\erick\Documents\work\Diplomado\Modulo2\reto2-fleet-alerts\docs\architecture.png"/>
           <p:cNvPicPr>
             <a:picLocks noChangeAspect="1"/>
           </p:cNvPicPr>
           <p:nvPr/>
         </p:nvPicPr>
         <p:blipFill>
-          <a:blip r:embed="rId1"/>
+          <a:blip r:embed="rId3"/>
           <a:stretch>
             <a:fillRect/>
           </a:stretch>
@@ -3674,7 +4978,7 @@
           <a:bodyPr wrap="square" lIns="0" tIns="0" rIns="0" bIns="0" rtlCol="0" anchor="ctr"/>
           <a:lstStyle/>
           <a:p>
-            <a:pPr algn="l" indent="0" marL="0">
+            <a:pPr marL="0" indent="0" algn="l">
               <a:buNone/>
             </a:pPr>
             <a:r>
@@ -3713,7 +5017,7 @@
           <a:bodyPr wrap="square" lIns="0" tIns="0" rIns="0" bIns="0" rtlCol="0" anchor="ctr"/>
           <a:lstStyle/>
           <a:p>
-            <a:pPr algn="r" indent="0" marL="0">
+            <a:pPr marL="0" indent="0" algn="r">
               <a:buNone/>
             </a:pPr>
             <a:r>
@@ -3747,6 +5051,7 @@
         <a:solidFill>
           <a:srgbClr val="FFFFFF"/>
         </a:solidFill>
+        <a:effectLst/>
       </p:bgPr>
     </p:bg>
     <p:spTree>
@@ -3784,7 +5089,7 @@
           <a:bodyPr wrap="square" lIns="0" tIns="0" rIns="0" bIns="0" rtlCol="0" anchor="ctr"/>
           <a:lstStyle/>
           <a:p>
-            <a:pPr algn="l" indent="0" marL="0">
+            <a:pPr marL="0" indent="0" algn="l">
               <a:buNone/>
             </a:pPr>
             <a:r>
@@ -3823,7 +5128,7 @@
           <a:bodyPr wrap="square" lIns="0" tIns="0" rIns="0" bIns="0" rtlCol="0" anchor="ctr"/>
           <a:lstStyle/>
           <a:p>
-            <a:pPr algn="l" indent="0" marL="0">
+            <a:pPr marL="0" indent="0" algn="l">
               <a:buNone/>
             </a:pPr>
             <a:r>
@@ -3857,16 +5162,34 @@
         </p:nvGraphicFramePr>
         <p:xfrm>
           <a:off x="457200" y="1554480"/>
-          <a:ext cx="11247120" cy="914400"/>
+          <a:ext cx="11247120" cy="4892040"/>
         </p:xfrm>
         <a:graphic>
           <a:graphicData uri="http://schemas.openxmlformats.org/drawingml/2006/table">
             <a:tbl>
               <a:tblPr/>
               <a:tblGrid>
-                <a:gridCol w="2743200"/>
-                <a:gridCol w="3291840"/>
-                <a:gridCol w="5212080"/>
+                <a:gridCol w="2743200">
+                  <a:extLst>
+                    <a:ext uri="{9D8B030D-6E8A-4147-A177-3AD203B41FA5}">
+                      <a16:colId xmlns:a16="http://schemas.microsoft.com/office/drawing/2014/main" val="20000"/>
+                    </a:ext>
+                  </a:extLst>
+                </a:gridCol>
+                <a:gridCol w="3291840">
+                  <a:extLst>
+                    <a:ext uri="{9D8B030D-6E8A-4147-A177-3AD203B41FA5}">
+                      <a16:colId xmlns:a16="http://schemas.microsoft.com/office/drawing/2014/main" val="20001"/>
+                    </a:ext>
+                  </a:extLst>
+                </a:gridCol>
+                <a:gridCol w="5212080">
+                  <a:extLst>
+                    <a:ext uri="{9D8B030D-6E8A-4147-A177-3AD203B41FA5}">
+                      <a16:colId xmlns:a16="http://schemas.microsoft.com/office/drawing/2014/main" val="20002"/>
+                    </a:ext>
+                  </a:extLst>
+                </a:gridCol>
               </a:tblGrid>
               <a:tr h="502920">
                 <a:tc>
@@ -3874,7 +5197,7 @@
                     <a:bodyPr/>
                     <a:lstStyle/>
                     <a:p>
-                      <a:pPr algn="l" indent="0" marL="0">
+                      <a:pPr marL="0" indent="0" algn="l">
                         <a:buNone/>
                       </a:pPr>
                       <a:r>
@@ -3895,7 +5218,7 @@
                       </a:endParaRPr>
                     </a:p>
                   </a:txBody>
-                  <a:tcPr marL="91440" marR="91440" marT="45720" marB="45720" anchor="ctr">
+                  <a:tcPr anchor="ctr">
                     <a:lnL w="12700" cap="flat" cmpd="sng" algn="ctr">
                       <a:solidFill>
                         <a:srgbClr val="E2E8F0"/>
@@ -3942,7 +5265,7 @@
                     <a:bodyPr/>
                     <a:lstStyle/>
                     <a:p>
-                      <a:pPr algn="l" indent="0" marL="0">
+                      <a:pPr marL="0" indent="0" algn="l">
                         <a:buNone/>
                       </a:pPr>
                       <a:r>
@@ -3963,7 +5286,7 @@
                       </a:endParaRPr>
                     </a:p>
                   </a:txBody>
-                  <a:tcPr marL="91440" marR="91440" marT="45720" marB="45720" anchor="ctr">
+                  <a:tcPr anchor="ctr">
                     <a:lnL w="12700" cap="flat" cmpd="sng" algn="ctr">
                       <a:solidFill>
                         <a:srgbClr val="E2E8F0"/>
@@ -4010,7 +5333,7 @@
                     <a:bodyPr/>
                     <a:lstStyle/>
                     <a:p>
-                      <a:pPr algn="l" indent="0" marL="0">
+                      <a:pPr marL="0" indent="0" algn="l">
                         <a:buNone/>
                       </a:pPr>
                       <a:r>
@@ -4031,7 +5354,7 @@
                       </a:endParaRPr>
                     </a:p>
                   </a:txBody>
-                  <a:tcPr marL="91440" marR="91440" marT="45720" marB="45720" anchor="ctr">
+                  <a:tcPr anchor="ctr">
                     <a:lnL w="12700" cap="flat" cmpd="sng" algn="ctr">
                       <a:solidFill>
                         <a:srgbClr val="E2E8F0"/>
@@ -4073,6 +5396,11 @@
                     </a:solidFill>
                   </a:tcPr>
                 </a:tc>
+                <a:extLst>
+                  <a:ext uri="{0D108BD9-81ED-4DB2-BD59-A6C34878D82A}">
+                    <a16:rowId xmlns:a16="http://schemas.microsoft.com/office/drawing/2014/main" val="10000"/>
+                  </a:ext>
+                </a:extLst>
               </a:tr>
               <a:tr h="868680">
                 <a:tc>
@@ -4080,7 +5408,7 @@
                     <a:bodyPr/>
                     <a:lstStyle/>
                     <a:p>
-                      <a:pPr algn="l" indent="0" marL="0">
+                      <a:pPr marL="0" indent="0" algn="l">
                         <a:buNone/>
                       </a:pPr>
                       <a:r>
@@ -4101,7 +5429,7 @@
                       </a:endParaRPr>
                     </a:p>
                   </a:txBody>
-                  <a:tcPr marL="91440" marR="91440" marT="45720" marB="45720" anchor="ctr">
+                  <a:tcPr anchor="ctr">
                     <a:lnL w="12700" cap="flat" cmpd="sng" algn="ctr">
                       <a:solidFill>
                         <a:srgbClr val="E2E8F0"/>
@@ -4145,7 +5473,7 @@
                     <a:bodyPr/>
                     <a:lstStyle/>
                     <a:p>
-                      <a:pPr algn="l" indent="0" marL="0">
+                      <a:pPr marL="0" indent="0" algn="l">
                         <a:buNone/>
                       </a:pPr>
                       <a:r>
@@ -4166,7 +5494,7 @@
                       </a:endParaRPr>
                     </a:p>
                   </a:txBody>
-                  <a:tcPr marL="91440" marR="91440" marT="45720" marB="45720" anchor="ctr">
+                  <a:tcPr anchor="ctr">
                     <a:lnL w="12700" cap="flat" cmpd="sng" algn="ctr">
                       <a:solidFill>
                         <a:srgbClr val="E2E8F0"/>
@@ -4210,7 +5538,7 @@
                     <a:bodyPr/>
                     <a:lstStyle/>
                     <a:p>
-                      <a:pPr algn="l" indent="0" marL="0">
+                      <a:pPr marL="0" indent="0" algn="l">
                         <a:buNone/>
                       </a:pPr>
                       <a:r>
@@ -4231,7 +5559,7 @@
                       </a:endParaRPr>
                     </a:p>
                   </a:txBody>
-                  <a:tcPr marL="91440" marR="91440" marT="45720" marB="45720" anchor="ctr">
+                  <a:tcPr anchor="ctr">
                     <a:lnL w="12700" cap="flat" cmpd="sng" algn="ctr">
                       <a:solidFill>
                         <a:srgbClr val="E2E8F0"/>
@@ -4270,6 +5598,11 @@
                     </a:lnB>
                   </a:tcPr>
                 </a:tc>
+                <a:extLst>
+                  <a:ext uri="{0D108BD9-81ED-4DB2-BD59-A6C34878D82A}">
+                    <a16:rowId xmlns:a16="http://schemas.microsoft.com/office/drawing/2014/main" val="10001"/>
+                  </a:ext>
+                </a:extLst>
               </a:tr>
               <a:tr h="868680">
                 <a:tc>
@@ -4277,7 +5610,7 @@
                     <a:bodyPr/>
                     <a:lstStyle/>
                     <a:p>
-                      <a:pPr algn="l" indent="0" marL="0">
+                      <a:pPr marL="0" indent="0" algn="l">
                         <a:buNone/>
                       </a:pPr>
                       <a:r>
@@ -4298,7 +5631,7 @@
                       </a:endParaRPr>
                     </a:p>
                   </a:txBody>
-                  <a:tcPr marL="91440" marR="91440" marT="45720" marB="45720" anchor="ctr">
+                  <a:tcPr anchor="ctr">
                     <a:lnL w="12700" cap="flat" cmpd="sng" algn="ctr">
                       <a:solidFill>
                         <a:srgbClr val="E2E8F0"/>
@@ -4342,7 +5675,7 @@
                     <a:bodyPr/>
                     <a:lstStyle/>
                     <a:p>
-                      <a:pPr algn="l" indent="0" marL="0">
+                      <a:pPr marL="0" indent="0" algn="l">
                         <a:buNone/>
                       </a:pPr>
                       <a:r>
@@ -4363,7 +5696,7 @@
                       </a:endParaRPr>
                     </a:p>
                   </a:txBody>
-                  <a:tcPr marL="91440" marR="91440" marT="45720" marB="45720" anchor="ctr">
+                  <a:tcPr anchor="ctr">
                     <a:lnL w="12700" cap="flat" cmpd="sng" algn="ctr">
                       <a:solidFill>
                         <a:srgbClr val="E2E8F0"/>
@@ -4407,7 +5740,7 @@
                     <a:bodyPr/>
                     <a:lstStyle/>
                     <a:p>
-                      <a:pPr algn="l" indent="0" marL="0">
+                      <a:pPr marL="0" indent="0" algn="l">
                         <a:buNone/>
                       </a:pPr>
                       <a:r>
@@ -4428,7 +5761,7 @@
                       </a:endParaRPr>
                     </a:p>
                   </a:txBody>
-                  <a:tcPr marL="91440" marR="91440" marT="45720" marB="45720" anchor="ctr">
+                  <a:tcPr anchor="ctr">
                     <a:lnL w="12700" cap="flat" cmpd="sng" algn="ctr">
                       <a:solidFill>
                         <a:srgbClr val="E2E8F0"/>
@@ -4467,6 +5800,11 @@
                     </a:lnB>
                   </a:tcPr>
                 </a:tc>
+                <a:extLst>
+                  <a:ext uri="{0D108BD9-81ED-4DB2-BD59-A6C34878D82A}">
+                    <a16:rowId xmlns:a16="http://schemas.microsoft.com/office/drawing/2014/main" val="10002"/>
+                  </a:ext>
+                </a:extLst>
               </a:tr>
               <a:tr h="868680">
                 <a:tc>
@@ -4474,7 +5812,7 @@
                     <a:bodyPr/>
                     <a:lstStyle/>
                     <a:p>
-                      <a:pPr algn="l" indent="0" marL="0">
+                      <a:pPr marL="0" indent="0" algn="l">
                         <a:buNone/>
                       </a:pPr>
                       <a:r>
@@ -4495,7 +5833,7 @@
                       </a:endParaRPr>
                     </a:p>
                   </a:txBody>
-                  <a:tcPr marL="91440" marR="91440" marT="45720" marB="45720" anchor="ctr">
+                  <a:tcPr anchor="ctr">
                     <a:lnL w="12700" cap="flat" cmpd="sng" algn="ctr">
                       <a:solidFill>
                         <a:srgbClr val="E2E8F0"/>
@@ -4539,7 +5877,7 @@
                     <a:bodyPr/>
                     <a:lstStyle/>
                     <a:p>
-                      <a:pPr algn="l" indent="0" marL="0">
+                      <a:pPr marL="0" indent="0" algn="l">
                         <a:buNone/>
                       </a:pPr>
                       <a:r>
@@ -4560,7 +5898,7 @@
                       </a:endParaRPr>
                     </a:p>
                   </a:txBody>
-                  <a:tcPr marL="91440" marR="91440" marT="45720" marB="45720" anchor="ctr">
+                  <a:tcPr anchor="ctr">
                     <a:lnL w="12700" cap="flat" cmpd="sng" algn="ctr">
                       <a:solidFill>
                         <a:srgbClr val="E2E8F0"/>
@@ -4604,7 +5942,7 @@
                     <a:bodyPr/>
                     <a:lstStyle/>
                     <a:p>
-                      <a:pPr algn="l" indent="0" marL="0">
+                      <a:pPr marL="0" indent="0" algn="l">
                         <a:buNone/>
                       </a:pPr>
                       <a:r>
@@ -4625,7 +5963,7 @@
                       </a:endParaRPr>
                     </a:p>
                   </a:txBody>
-                  <a:tcPr marL="91440" marR="91440" marT="45720" marB="45720" anchor="ctr">
+                  <a:tcPr anchor="ctr">
                     <a:lnL w="12700" cap="flat" cmpd="sng" algn="ctr">
                       <a:solidFill>
                         <a:srgbClr val="E2E8F0"/>
@@ -4664,6 +6002,11 @@
                     </a:lnB>
                   </a:tcPr>
                 </a:tc>
+                <a:extLst>
+                  <a:ext uri="{0D108BD9-81ED-4DB2-BD59-A6C34878D82A}">
+                    <a16:rowId xmlns:a16="http://schemas.microsoft.com/office/drawing/2014/main" val="10003"/>
+                  </a:ext>
+                </a:extLst>
               </a:tr>
               <a:tr h="868680">
                 <a:tc>
@@ -4671,7 +6014,7 @@
                     <a:bodyPr/>
                     <a:lstStyle/>
                     <a:p>
-                      <a:pPr algn="l" indent="0" marL="0">
+                      <a:pPr marL="0" indent="0" algn="l">
                         <a:buNone/>
                       </a:pPr>
                       <a:r>
@@ -4692,7 +6035,7 @@
                       </a:endParaRPr>
                     </a:p>
                   </a:txBody>
-                  <a:tcPr marL="91440" marR="91440" marT="45720" marB="45720" anchor="ctr">
+                  <a:tcPr anchor="ctr">
                     <a:lnL w="12700" cap="flat" cmpd="sng" algn="ctr">
                       <a:solidFill>
                         <a:srgbClr val="E2E8F0"/>
@@ -4736,7 +6079,7 @@
                     <a:bodyPr/>
                     <a:lstStyle/>
                     <a:p>
-                      <a:pPr algn="l" indent="0" marL="0">
+                      <a:pPr marL="0" indent="0" algn="l">
                         <a:buNone/>
                       </a:pPr>
                       <a:r>
@@ -4757,7 +6100,7 @@
                       </a:endParaRPr>
                     </a:p>
                   </a:txBody>
-                  <a:tcPr marL="91440" marR="91440" marT="45720" marB="45720" anchor="ctr">
+                  <a:tcPr anchor="ctr">
                     <a:lnL w="12700" cap="flat" cmpd="sng" algn="ctr">
                       <a:solidFill>
                         <a:srgbClr val="E2E8F0"/>
@@ -4801,7 +6144,7 @@
                     <a:bodyPr/>
                     <a:lstStyle/>
                     <a:p>
-                      <a:pPr algn="l" indent="0" marL="0">
+                      <a:pPr marL="0" indent="0" algn="l">
                         <a:buNone/>
                       </a:pPr>
                       <a:r>
@@ -4822,7 +6165,7 @@
                       </a:endParaRPr>
                     </a:p>
                   </a:txBody>
-                  <a:tcPr marL="91440" marR="91440" marT="45720" marB="45720" anchor="ctr">
+                  <a:tcPr anchor="ctr">
                     <a:lnL w="12700" cap="flat" cmpd="sng" algn="ctr">
                       <a:solidFill>
                         <a:srgbClr val="E2E8F0"/>
@@ -4861,6 +6204,11 @@
                     </a:lnB>
                   </a:tcPr>
                 </a:tc>
+                <a:extLst>
+                  <a:ext uri="{0D108BD9-81ED-4DB2-BD59-A6C34878D82A}">
+                    <a16:rowId xmlns:a16="http://schemas.microsoft.com/office/drawing/2014/main" val="10004"/>
+                  </a:ext>
+                </a:extLst>
               </a:tr>
               <a:tr h="914400">
                 <a:tc>
@@ -4868,7 +6216,7 @@
                     <a:bodyPr/>
                     <a:lstStyle/>
                     <a:p>
-                      <a:pPr algn="l" indent="0" marL="0">
+                      <a:pPr marL="0" indent="0" algn="l">
                         <a:buNone/>
                       </a:pPr>
                       <a:r>
@@ -4889,7 +6237,7 @@
                       </a:endParaRPr>
                     </a:p>
                   </a:txBody>
-                  <a:tcPr marL="91440" marR="91440" marT="45720" marB="45720" anchor="ctr">
+                  <a:tcPr anchor="ctr">
                     <a:lnL w="12700" cap="flat" cmpd="sng" algn="ctr">
                       <a:solidFill>
                         <a:srgbClr val="E2E8F0"/>
@@ -4933,7 +6281,7 @@
                     <a:bodyPr/>
                     <a:lstStyle/>
                     <a:p>
-                      <a:pPr algn="l" indent="0" marL="0">
+                      <a:pPr marL="0" indent="0" algn="l">
                         <a:buNone/>
                       </a:pPr>
                       <a:r>
@@ -4954,7 +6302,7 @@
                       </a:endParaRPr>
                     </a:p>
                   </a:txBody>
-                  <a:tcPr marL="91440" marR="91440" marT="45720" marB="45720" anchor="ctr">
+                  <a:tcPr anchor="ctr">
                     <a:lnL w="12700" cap="flat" cmpd="sng" algn="ctr">
                       <a:solidFill>
                         <a:srgbClr val="E2E8F0"/>
@@ -4998,7 +6346,7 @@
                     <a:bodyPr/>
                     <a:lstStyle/>
                     <a:p>
-                      <a:pPr algn="l" indent="0" marL="0">
+                      <a:pPr marL="0" indent="0" algn="l">
                         <a:buNone/>
                       </a:pPr>
                       <a:r>
@@ -5019,7 +6367,7 @@
                       </a:endParaRPr>
                     </a:p>
                   </a:txBody>
-                  <a:tcPr marL="91440" marR="91440" marT="45720" marB="45720" anchor="ctr">
+                  <a:tcPr anchor="ctr">
                     <a:lnL w="12700" cap="flat" cmpd="sng" algn="ctr">
                       <a:solidFill>
                         <a:srgbClr val="E2E8F0"/>
@@ -5058,6 +6406,11 @@
                     </a:lnB>
                   </a:tcPr>
                 </a:tc>
+                <a:extLst>
+                  <a:ext uri="{0D108BD9-81ED-4DB2-BD59-A6C34878D82A}">
+                    <a16:rowId xmlns:a16="http://schemas.microsoft.com/office/drawing/2014/main" val="10005"/>
+                  </a:ext>
+                </a:extLst>
               </a:tr>
             </a:tbl>
           </a:graphicData>
@@ -5065,7 +6418,7 @@
       </p:graphicFrame>
       <p:sp>
         <p:nvSpPr>
-          <p:cNvPr id="5" name="Text 2"/>
+          <p:cNvPr id="4" name="Text 2"/>
           <p:cNvSpPr/>
           <p:nvPr/>
         </p:nvSpPr>
@@ -5084,7 +6437,7 @@
           <a:bodyPr wrap="square" lIns="0" tIns="0" rIns="0" bIns="0" rtlCol="0" anchor="ctr"/>
           <a:lstStyle/>
           <a:p>
-            <a:pPr algn="l" indent="0" marL="0">
+            <a:pPr marL="0" indent="0" algn="l">
               <a:buNone/>
             </a:pPr>
             <a:r>
@@ -5123,7 +6476,7 @@
           <a:bodyPr wrap="square" lIns="0" tIns="0" rIns="0" bIns="0" rtlCol="0" anchor="ctr"/>
           <a:lstStyle/>
           <a:p>
-            <a:pPr algn="r" indent="0" marL="0">
+            <a:pPr marL="0" indent="0" algn="r">
               <a:buNone/>
             </a:pPr>
             <a:r>
@@ -5157,6 +6510,7 @@
         <a:solidFill>
           <a:srgbClr val="FFFFFF"/>
         </a:solidFill>
+        <a:effectLst/>
       </p:bgPr>
     </p:bg>
     <p:spTree>
@@ -5194,7 +6548,7 @@
           <a:bodyPr wrap="square" lIns="0" tIns="0" rIns="0" bIns="0" rtlCol="0" anchor="ctr"/>
           <a:lstStyle/>
           <a:p>
-            <a:pPr algn="l" indent="0" marL="0">
+            <a:pPr marL="0" indent="0" algn="l">
               <a:buNone/>
             </a:pPr>
             <a:r>
@@ -5233,7 +6587,7 @@
           <a:bodyPr wrap="square" lIns="0" tIns="0" rIns="0" bIns="0" rtlCol="0" anchor="ctr"/>
           <a:lstStyle/>
           <a:p>
-            <a:pPr algn="l" indent="0" marL="0">
+            <a:pPr marL="0" indent="0" algn="l">
               <a:buNone/>
             </a:pPr>
             <a:r>
@@ -5275,6 +6629,13 @@
             <a:prstDash val="solid"/>
           </a:ln>
         </p:spPr>
+        <p:txBody>
+          <a:bodyPr/>
+          <a:lstStyle/>
+          <a:p>
+            <a:endParaRPr lang="en-US"/>
+          </a:p>
+        </p:txBody>
       </p:sp>
       <p:sp>
         <p:nvSpPr>
@@ -5297,7 +6658,7 @@
           <a:bodyPr wrap="square" lIns="0" tIns="0" rIns="0" bIns="0" rtlCol="0" anchor="ctr"/>
           <a:lstStyle/>
           <a:p>
-            <a:pPr algn="ctr" indent="0" marL="0">
+            <a:pPr marL="0" indent="0" algn="ctr">
               <a:buNone/>
             </a:pPr>
             <a:r>
@@ -5336,7 +6697,7 @@
           <a:bodyPr wrap="square" lIns="0" tIns="0" rIns="0" bIns="0" rtlCol="0" anchor="ctr"/>
           <a:lstStyle/>
           <a:p>
-            <a:pPr algn="ctr" indent="0" marL="0">
+            <a:pPr marL="0" indent="0" algn="ctr">
               <a:buNone/>
             </a:pPr>
             <a:r>
@@ -5375,7 +6736,7 @@
           <a:bodyPr wrap="square" lIns="0" tIns="0" rIns="0" bIns="0" rtlCol="0" anchor="ctr"/>
           <a:lstStyle/>
           <a:p>
-            <a:pPr algn="ctr" indent="0" marL="0">
+            <a:pPr marL="0" indent="0" algn="ctr">
               <a:buNone/>
             </a:pPr>
             <a:r>
@@ -5414,7 +6775,7 @@
           <a:bodyPr wrap="square" lIns="0" tIns="0" rIns="0" bIns="0" rtlCol="0" anchor="ctr"/>
           <a:lstStyle/>
           <a:p>
-            <a:pPr algn="ctr" indent="0" marL="0">
+            <a:pPr marL="0" indent="0" algn="ctr">
               <a:buNone/>
             </a:pPr>
             <a:r>
@@ -5453,7 +6814,7 @@
           <a:bodyPr wrap="square" lIns="0" tIns="0" rIns="0" bIns="0" rtlCol="0" anchor="ctr"/>
           <a:lstStyle/>
           <a:p>
-            <a:pPr indent="0" marL="0">
+            <a:pPr marL="0" indent="0">
               <a:buNone/>
             </a:pPr>
             <a:r>
@@ -5529,7 +6890,29 @@
                 <a:ea typeface="Calibri" pitchFamily="34" charset="-122"/>
                 <a:cs typeface="Calibri" pitchFamily="34" charset="-120"/>
               </a:rPr>
-              <a:t>En sistemas de alerta temprana reales, segundos = vidas o danos materiales.</a:t>
+              <a:t>En sistemas de alerta temprana reales, segundos = vidas o </a:t>
+            </a:r>
+            <a:r>
+              <a:rPr lang="en-US" sz="1400" dirty="0" err="1">
+                <a:solidFill>
+                  <a:srgbClr val="0F172A"/>
+                </a:solidFill>
+                <a:latin typeface="Calibri" pitchFamily="34" charset="0"/>
+                <a:ea typeface="Calibri" pitchFamily="34" charset="-122"/>
+                <a:cs typeface="Calibri" pitchFamily="34" charset="-120"/>
+              </a:rPr>
+              <a:t>daños</a:t>
+            </a:r>
+            <a:r>
+              <a:rPr lang="en-US" sz="1400" dirty="0">
+                <a:solidFill>
+                  <a:srgbClr val="0F172A"/>
+                </a:solidFill>
+                <a:latin typeface="Calibri" pitchFamily="34" charset="0"/>
+                <a:ea typeface="Calibri" pitchFamily="34" charset="-122"/>
+                <a:cs typeface="Calibri" pitchFamily="34" charset="-120"/>
+              </a:rPr>
+              <a:t> materiales.</a:t>
             </a:r>
             <a:endParaRPr lang="en-US" sz="1400" dirty="0"/>
           </a:p>
@@ -5577,7 +6960,7 @@
           <a:bodyPr wrap="square" lIns="0" tIns="0" rIns="0" bIns="0" rtlCol="0" anchor="ctr"/>
           <a:lstStyle/>
           <a:p>
-            <a:pPr indent="0" marL="0">
+            <a:pPr marL="0" indent="0">
               <a:buNone/>
             </a:pPr>
             <a:r>
@@ -5701,7 +7084,7 @@
           <a:bodyPr wrap="square" lIns="0" tIns="0" rIns="0" bIns="0" rtlCol="0" anchor="ctr"/>
           <a:lstStyle/>
           <a:p>
-            <a:pPr algn="l" indent="0" marL="0">
+            <a:pPr marL="0" indent="0" algn="l">
               <a:buNone/>
             </a:pPr>
             <a:r>
@@ -5740,7 +7123,7 @@
           <a:bodyPr wrap="square" lIns="0" tIns="0" rIns="0" bIns="0" rtlCol="0" anchor="ctr"/>
           <a:lstStyle/>
           <a:p>
-            <a:pPr algn="r" indent="0" marL="0">
+            <a:pPr marL="0" indent="0" algn="r">
               <a:buNone/>
             </a:pPr>
             <a:r>
@@ -5774,6 +7157,7 @@
         <a:solidFill>
           <a:srgbClr val="FFFFFF"/>
         </a:solidFill>
+        <a:effectLst/>
       </p:bgPr>
     </p:bg>
     <p:spTree>
@@ -5811,7 +7195,7 @@
           <a:bodyPr wrap="square" lIns="0" tIns="0" rIns="0" bIns="0" rtlCol="0" anchor="ctr"/>
           <a:lstStyle/>
           <a:p>
-            <a:pPr algn="l" indent="0" marL="0">
+            <a:pPr marL="0" indent="0" algn="l">
               <a:buNone/>
             </a:pPr>
             <a:r>
@@ -5850,7 +7234,7 @@
           <a:bodyPr wrap="square" lIns="0" tIns="0" rIns="0" bIns="0" rtlCol="0" anchor="ctr"/>
           <a:lstStyle/>
           <a:p>
-            <a:pPr algn="l" indent="0" marL="0">
+            <a:pPr marL="0" indent="0" algn="l">
               <a:buNone/>
             </a:pPr>
             <a:r>
@@ -5892,6 +7276,13 @@
             <a:prstDash val="solid"/>
           </a:ln>
         </p:spPr>
+        <p:txBody>
+          <a:bodyPr/>
+          <a:lstStyle/>
+          <a:p>
+            <a:endParaRPr lang="en-US"/>
+          </a:p>
+        </p:txBody>
       </p:sp>
       <p:sp>
         <p:nvSpPr>
@@ -5917,6 +7308,13 @@
             <a:prstDash val="solid"/>
           </a:ln>
         </p:spPr>
+        <p:txBody>
+          <a:bodyPr/>
+          <a:lstStyle/>
+          <a:p>
+            <a:endParaRPr lang="en-US"/>
+          </a:p>
+        </p:txBody>
       </p:sp>
       <p:sp>
         <p:nvSpPr>
@@ -5939,11 +7337,11 @@
           <a:bodyPr wrap="square" lIns="0" tIns="0" rIns="0" bIns="0" rtlCol="0" anchor="ctr"/>
           <a:lstStyle/>
           <a:p>
-            <a:pPr algn="ctr" indent="0" marL="0">
+            <a:pPr marL="0" indent="0" algn="ctr">
               <a:buNone/>
             </a:pPr>
             <a:r>
-              <a:rPr lang="en-US" sz="1000" b="1" spc="200" kern="0" dirty="0">
+              <a:rPr lang="en-US" sz="1000" b="1" kern="0" spc="200" dirty="0">
                 <a:solidFill>
                   <a:srgbClr val="FFFFFF"/>
                 </a:solidFill>
@@ -5978,7 +7376,7 @@
           <a:bodyPr wrap="square" lIns="0" tIns="0" rIns="0" bIns="0" rtlCol="0" anchor="ctr"/>
           <a:lstStyle/>
           <a:p>
-            <a:pPr indent="0" marL="0">
+            <a:pPr marL="0" indent="0">
               <a:buNone/>
             </a:pPr>
             <a:r>
@@ -6017,7 +7415,7 @@
           <a:bodyPr wrap="square" lIns="0" tIns="0" rIns="0" bIns="0" rtlCol="0" anchor="t"/>
           <a:lstStyle/>
           <a:p>
-            <a:pPr indent="0" marL="0">
+            <a:pPr marL="0" indent="0">
               <a:buNone/>
             </a:pPr>
             <a:r>
@@ -6059,6 +7457,13 @@
             <a:prstDash val="solid"/>
           </a:ln>
         </p:spPr>
+        <p:txBody>
+          <a:bodyPr/>
+          <a:lstStyle/>
+          <a:p>
+            <a:endParaRPr lang="en-US"/>
+          </a:p>
+        </p:txBody>
       </p:sp>
       <p:sp>
         <p:nvSpPr>
@@ -6084,6 +7489,13 @@
             <a:prstDash val="solid"/>
           </a:ln>
         </p:spPr>
+        <p:txBody>
+          <a:bodyPr/>
+          <a:lstStyle/>
+          <a:p>
+            <a:endParaRPr lang="en-US"/>
+          </a:p>
+        </p:txBody>
       </p:sp>
       <p:sp>
         <p:nvSpPr>
@@ -6106,11 +7518,11 @@
           <a:bodyPr wrap="square" lIns="0" tIns="0" rIns="0" bIns="0" rtlCol="0" anchor="ctr"/>
           <a:lstStyle/>
           <a:p>
-            <a:pPr algn="ctr" indent="0" marL="0">
+            <a:pPr marL="0" indent="0" algn="ctr">
               <a:buNone/>
             </a:pPr>
             <a:r>
-              <a:rPr lang="en-US" sz="1000" b="1" spc="200" kern="0" dirty="0">
+              <a:rPr lang="en-US" sz="1000" b="1" kern="0" spc="200" dirty="0">
                 <a:solidFill>
                   <a:srgbClr val="FFFFFF"/>
                 </a:solidFill>
@@ -6145,7 +7557,7 @@
           <a:bodyPr wrap="square" lIns="0" tIns="0" rIns="0" bIns="0" rtlCol="0" anchor="ctr"/>
           <a:lstStyle/>
           <a:p>
-            <a:pPr indent="0" marL="0">
+            <a:pPr marL="0" indent="0">
               <a:buNone/>
             </a:pPr>
             <a:r>
@@ -6184,7 +7596,7 @@
           <a:bodyPr wrap="square" lIns="0" tIns="0" rIns="0" bIns="0" rtlCol="0" anchor="t"/>
           <a:lstStyle/>
           <a:p>
-            <a:pPr indent="0" marL="0">
+            <a:pPr marL="0" indent="0">
               <a:buNone/>
             </a:pPr>
             <a:r>
@@ -6226,6 +7638,13 @@
             <a:prstDash val="solid"/>
           </a:ln>
         </p:spPr>
+        <p:txBody>
+          <a:bodyPr/>
+          <a:lstStyle/>
+          <a:p>
+            <a:endParaRPr lang="en-US"/>
+          </a:p>
+        </p:txBody>
       </p:sp>
       <p:sp>
         <p:nvSpPr>
@@ -6251,6 +7670,13 @@
             <a:prstDash val="solid"/>
           </a:ln>
         </p:spPr>
+        <p:txBody>
+          <a:bodyPr/>
+          <a:lstStyle/>
+          <a:p>
+            <a:endParaRPr lang="en-US"/>
+          </a:p>
+        </p:txBody>
       </p:sp>
       <p:sp>
         <p:nvSpPr>
@@ -6273,11 +7699,11 @@
           <a:bodyPr wrap="square" lIns="0" tIns="0" rIns="0" bIns="0" rtlCol="0" anchor="ctr"/>
           <a:lstStyle/>
           <a:p>
-            <a:pPr algn="ctr" indent="0" marL="0">
+            <a:pPr marL="0" indent="0" algn="ctr">
               <a:buNone/>
             </a:pPr>
             <a:r>
-              <a:rPr lang="en-US" sz="1000" b="1" spc="200" kern="0" dirty="0">
+              <a:rPr lang="en-US" sz="1000" b="1" kern="0" spc="200" dirty="0">
                 <a:solidFill>
                   <a:srgbClr val="FFFFFF"/>
                 </a:solidFill>
@@ -6312,7 +7738,7 @@
           <a:bodyPr wrap="square" lIns="0" tIns="0" rIns="0" bIns="0" rtlCol="0" anchor="ctr"/>
           <a:lstStyle/>
           <a:p>
-            <a:pPr indent="0" marL="0">
+            <a:pPr marL="0" indent="0">
               <a:buNone/>
             </a:pPr>
             <a:r>
@@ -6351,7 +7777,7 @@
           <a:bodyPr wrap="square" lIns="0" tIns="0" rIns="0" bIns="0" rtlCol="0" anchor="t"/>
           <a:lstStyle/>
           <a:p>
-            <a:pPr indent="0" marL="0">
+            <a:pPr marL="0" indent="0">
               <a:buNone/>
             </a:pPr>
             <a:r>
@@ -6393,6 +7819,13 @@
             <a:prstDash val="solid"/>
           </a:ln>
         </p:spPr>
+        <p:txBody>
+          <a:bodyPr/>
+          <a:lstStyle/>
+          <a:p>
+            <a:endParaRPr lang="en-US"/>
+          </a:p>
+        </p:txBody>
       </p:sp>
       <p:sp>
         <p:nvSpPr>
@@ -6418,6 +7851,13 @@
             <a:prstDash val="solid"/>
           </a:ln>
         </p:spPr>
+        <p:txBody>
+          <a:bodyPr/>
+          <a:lstStyle/>
+          <a:p>
+            <a:endParaRPr lang="en-US"/>
+          </a:p>
+        </p:txBody>
       </p:sp>
       <p:sp>
         <p:nvSpPr>
@@ -6440,11 +7880,11 @@
           <a:bodyPr wrap="square" lIns="0" tIns="0" rIns="0" bIns="0" rtlCol="0" anchor="ctr"/>
           <a:lstStyle/>
           <a:p>
-            <a:pPr algn="ctr" indent="0" marL="0">
+            <a:pPr marL="0" indent="0" algn="ctr">
               <a:buNone/>
             </a:pPr>
             <a:r>
-              <a:rPr lang="en-US" sz="1000" b="1" spc="200" kern="0" dirty="0">
+              <a:rPr lang="en-US" sz="1000" b="1" kern="0" spc="200" dirty="0">
                 <a:solidFill>
                   <a:srgbClr val="FFFFFF"/>
                 </a:solidFill>
@@ -6479,7 +7919,7 @@
           <a:bodyPr wrap="square" lIns="0" tIns="0" rIns="0" bIns="0" rtlCol="0" anchor="ctr"/>
           <a:lstStyle/>
           <a:p>
-            <a:pPr indent="0" marL="0">
+            <a:pPr marL="0" indent="0">
               <a:buNone/>
             </a:pPr>
             <a:r>
@@ -6518,7 +7958,7 @@
           <a:bodyPr wrap="square" lIns="0" tIns="0" rIns="0" bIns="0" rtlCol="0" anchor="t"/>
           <a:lstStyle/>
           <a:p>
-            <a:pPr indent="0" marL="0">
+            <a:pPr marL="0" indent="0">
               <a:buNone/>
             </a:pPr>
             <a:r>
@@ -6557,7 +7997,7 @@
           <a:bodyPr wrap="square" lIns="0" tIns="0" rIns="0" bIns="0" rtlCol="0" anchor="ctr"/>
           <a:lstStyle/>
           <a:p>
-            <a:pPr algn="l" indent="0" marL="0">
+            <a:pPr marL="0" indent="0" algn="l">
               <a:buNone/>
             </a:pPr>
             <a:r>
@@ -6596,7 +8036,7 @@
           <a:bodyPr wrap="square" lIns="0" tIns="0" rIns="0" bIns="0" rtlCol="0" anchor="ctr"/>
           <a:lstStyle/>
           <a:p>
-            <a:pPr algn="r" indent="0" marL="0">
+            <a:pPr marL="0" indent="0" algn="r">
               <a:buNone/>
             </a:pPr>
             <a:r>
@@ -6630,6 +8070,7 @@
         <a:solidFill>
           <a:srgbClr val="FFFFFF"/>
         </a:solidFill>
+        <a:effectLst/>
       </p:bgPr>
     </p:bg>
     <p:spTree>
@@ -6667,7 +8108,7 @@
           <a:bodyPr wrap="square" lIns="0" tIns="0" rIns="0" bIns="0" rtlCol="0" anchor="ctr"/>
           <a:lstStyle/>
           <a:p>
-            <a:pPr algn="l" indent="0" marL="0">
+            <a:pPr marL="0" indent="0" algn="l">
               <a:buNone/>
             </a:pPr>
             <a:r>
@@ -6706,7 +8147,7 @@
           <a:bodyPr wrap="square" lIns="0" tIns="0" rIns="0" bIns="0" rtlCol="0" anchor="ctr"/>
           <a:lstStyle/>
           <a:p>
-            <a:pPr algn="l" indent="0" marL="0">
+            <a:pPr marL="0" indent="0" algn="l">
               <a:buNone/>
             </a:pPr>
             <a:r>
@@ -6748,6 +8189,13 @@
             <a:prstDash val="solid"/>
           </a:ln>
         </p:spPr>
+        <p:txBody>
+          <a:bodyPr/>
+          <a:lstStyle/>
+          <a:p>
+            <a:endParaRPr lang="en-US"/>
+          </a:p>
+        </p:txBody>
       </p:sp>
       <p:sp>
         <p:nvSpPr>
@@ -6773,6 +8221,13 @@
             <a:prstDash val="solid"/>
           </a:ln>
         </p:spPr>
+        <p:txBody>
+          <a:bodyPr/>
+          <a:lstStyle/>
+          <a:p>
+            <a:endParaRPr lang="en-US"/>
+          </a:p>
+        </p:txBody>
       </p:sp>
       <p:sp>
         <p:nvSpPr>
@@ -6795,7 +8250,7 @@
           <a:bodyPr wrap="square" lIns="0" tIns="0" rIns="0" bIns="0" rtlCol="0" anchor="ctr"/>
           <a:lstStyle/>
           <a:p>
-            <a:pPr algn="ctr" indent="0" marL="0">
+            <a:pPr marL="0" indent="0" algn="ctr">
               <a:buNone/>
             </a:pPr>
             <a:r>
@@ -6834,7 +8289,7 @@
           <a:bodyPr wrap="square" lIns="0" tIns="0" rIns="0" bIns="0" rtlCol="0" anchor="t"/>
           <a:lstStyle/>
           <a:p>
-            <a:pPr indent="0" marL="0">
+            <a:pPr marL="0" indent="0">
               <a:buNone/>
             </a:pPr>
             <a:r>
@@ -6876,6 +8331,13 @@
             <a:prstDash val="solid"/>
           </a:ln>
         </p:spPr>
+        <p:txBody>
+          <a:bodyPr/>
+          <a:lstStyle/>
+          <a:p>
+            <a:endParaRPr lang="en-US"/>
+          </a:p>
+        </p:txBody>
       </p:sp>
       <p:sp>
         <p:nvSpPr>
@@ -6901,6 +8363,13 @@
             <a:prstDash val="solid"/>
           </a:ln>
         </p:spPr>
+        <p:txBody>
+          <a:bodyPr/>
+          <a:lstStyle/>
+          <a:p>
+            <a:endParaRPr lang="en-US"/>
+          </a:p>
+        </p:txBody>
       </p:sp>
       <p:sp>
         <p:nvSpPr>
@@ -6923,7 +8392,7 @@
           <a:bodyPr wrap="square" lIns="0" tIns="0" rIns="0" bIns="0" rtlCol="0" anchor="ctr"/>
           <a:lstStyle/>
           <a:p>
-            <a:pPr algn="ctr" indent="0" marL="0">
+            <a:pPr marL="0" indent="0" algn="ctr">
               <a:buNone/>
             </a:pPr>
             <a:r>
@@ -6962,7 +8431,7 @@
           <a:bodyPr wrap="square" lIns="0" tIns="0" rIns="0" bIns="0" rtlCol="0" anchor="t"/>
           <a:lstStyle/>
           <a:p>
-            <a:pPr indent="0" marL="0">
+            <a:pPr marL="0" indent="0">
               <a:buNone/>
             </a:pPr>
             <a:r>
@@ -7004,6 +8473,13 @@
             <a:prstDash val="solid"/>
           </a:ln>
         </p:spPr>
+        <p:txBody>
+          <a:bodyPr/>
+          <a:lstStyle/>
+          <a:p>
+            <a:endParaRPr lang="en-US"/>
+          </a:p>
+        </p:txBody>
       </p:sp>
       <p:sp>
         <p:nvSpPr>
@@ -7029,6 +8505,13 @@
             <a:prstDash val="solid"/>
           </a:ln>
         </p:spPr>
+        <p:txBody>
+          <a:bodyPr/>
+          <a:lstStyle/>
+          <a:p>
+            <a:endParaRPr lang="en-US"/>
+          </a:p>
+        </p:txBody>
       </p:sp>
       <p:sp>
         <p:nvSpPr>
@@ -7051,7 +8534,7 @@
           <a:bodyPr wrap="square" lIns="0" tIns="0" rIns="0" bIns="0" rtlCol="0" anchor="ctr"/>
           <a:lstStyle/>
           <a:p>
-            <a:pPr algn="ctr" indent="0" marL="0">
+            <a:pPr marL="0" indent="0" algn="ctr">
               <a:buNone/>
             </a:pPr>
             <a:r>
@@ -7090,7 +8573,7 @@
           <a:bodyPr wrap="square" lIns="0" tIns="0" rIns="0" bIns="0" rtlCol="0" anchor="t"/>
           <a:lstStyle/>
           <a:p>
-            <a:pPr indent="0" marL="0">
+            <a:pPr marL="0" indent="0">
               <a:buNone/>
             </a:pPr>
             <a:r>
@@ -7132,6 +8615,13 @@
             <a:prstDash val="solid"/>
           </a:ln>
         </p:spPr>
+        <p:txBody>
+          <a:bodyPr/>
+          <a:lstStyle/>
+          <a:p>
+            <a:endParaRPr lang="en-US"/>
+          </a:p>
+        </p:txBody>
       </p:sp>
       <p:sp>
         <p:nvSpPr>
@@ -7157,6 +8647,13 @@
             <a:prstDash val="solid"/>
           </a:ln>
         </p:spPr>
+        <p:txBody>
+          <a:bodyPr/>
+          <a:lstStyle/>
+          <a:p>
+            <a:endParaRPr lang="en-US"/>
+          </a:p>
+        </p:txBody>
       </p:sp>
       <p:sp>
         <p:nvSpPr>
@@ -7179,7 +8676,7 @@
           <a:bodyPr wrap="square" lIns="0" tIns="0" rIns="0" bIns="0" rtlCol="0" anchor="ctr"/>
           <a:lstStyle/>
           <a:p>
-            <a:pPr algn="ctr" indent="0" marL="0">
+            <a:pPr marL="0" indent="0" algn="ctr">
               <a:buNone/>
             </a:pPr>
             <a:r>
@@ -7218,7 +8715,7 @@
           <a:bodyPr wrap="square" lIns="0" tIns="0" rIns="0" bIns="0" rtlCol="0" anchor="t"/>
           <a:lstStyle/>
           <a:p>
-            <a:pPr indent="0" marL="0">
+            <a:pPr marL="0" indent="0">
               <a:buNone/>
             </a:pPr>
             <a:r>
@@ -7260,6 +8757,13 @@
             <a:prstDash val="solid"/>
           </a:ln>
         </p:spPr>
+        <p:txBody>
+          <a:bodyPr/>
+          <a:lstStyle/>
+          <a:p>
+            <a:endParaRPr lang="en-US"/>
+          </a:p>
+        </p:txBody>
       </p:sp>
       <p:sp>
         <p:nvSpPr>
@@ -7285,6 +8789,13 @@
             <a:prstDash val="solid"/>
           </a:ln>
         </p:spPr>
+        <p:txBody>
+          <a:bodyPr/>
+          <a:lstStyle/>
+          <a:p>
+            <a:endParaRPr lang="en-US"/>
+          </a:p>
+        </p:txBody>
       </p:sp>
       <p:sp>
         <p:nvSpPr>
@@ -7307,7 +8818,7 @@
           <a:bodyPr wrap="square" lIns="0" tIns="0" rIns="0" bIns="0" rtlCol="0" anchor="ctr"/>
           <a:lstStyle/>
           <a:p>
-            <a:pPr algn="ctr" indent="0" marL="0">
+            <a:pPr marL="0" indent="0" algn="ctr">
               <a:buNone/>
             </a:pPr>
             <a:r>
@@ -7346,7 +8857,7 @@
           <a:bodyPr wrap="square" lIns="0" tIns="0" rIns="0" bIns="0" rtlCol="0" anchor="t"/>
           <a:lstStyle/>
           <a:p>
-            <a:pPr indent="0" marL="0">
+            <a:pPr marL="0" indent="0">
               <a:buNone/>
             </a:pPr>
             <a:r>
@@ -7388,6 +8899,13 @@
             <a:prstDash val="solid"/>
           </a:ln>
         </p:spPr>
+        <p:txBody>
+          <a:bodyPr/>
+          <a:lstStyle/>
+          <a:p>
+            <a:endParaRPr lang="en-US"/>
+          </a:p>
+        </p:txBody>
       </p:sp>
       <p:sp>
         <p:nvSpPr>
@@ -7413,6 +8931,13 @@
             <a:prstDash val="solid"/>
           </a:ln>
         </p:spPr>
+        <p:txBody>
+          <a:bodyPr/>
+          <a:lstStyle/>
+          <a:p>
+            <a:endParaRPr lang="en-US"/>
+          </a:p>
+        </p:txBody>
       </p:sp>
       <p:sp>
         <p:nvSpPr>
@@ -7435,7 +8960,7 @@
           <a:bodyPr wrap="square" lIns="0" tIns="0" rIns="0" bIns="0" rtlCol="0" anchor="ctr"/>
           <a:lstStyle/>
           <a:p>
-            <a:pPr algn="ctr" indent="0" marL="0">
+            <a:pPr marL="0" indent="0" algn="ctr">
               <a:buNone/>
             </a:pPr>
             <a:r>
@@ -7474,7 +8999,7 @@
           <a:bodyPr wrap="square" lIns="0" tIns="0" rIns="0" bIns="0" rtlCol="0" anchor="t"/>
           <a:lstStyle/>
           <a:p>
-            <a:pPr indent="0" marL="0">
+            <a:pPr marL="0" indent="0">
               <a:buNone/>
             </a:pPr>
             <a:r>
@@ -7516,6 +9041,13 @@
             <a:prstDash val="solid"/>
           </a:ln>
         </p:spPr>
+        <p:txBody>
+          <a:bodyPr/>
+          <a:lstStyle/>
+          <a:p>
+            <a:endParaRPr lang="en-US"/>
+          </a:p>
+        </p:txBody>
       </p:sp>
       <p:sp>
         <p:nvSpPr>
@@ -7538,7 +9070,7 @@
           <a:bodyPr wrap="square" lIns="0" tIns="0" rIns="0" bIns="0" rtlCol="0" anchor="ctr"/>
           <a:lstStyle/>
           <a:p>
-            <a:pPr algn="ctr" indent="0" marL="0">
+            <a:pPr marL="0" indent="0" algn="ctr">
               <a:buNone/>
             </a:pPr>
             <a:r>
@@ -7577,7 +9109,7 @@
           <a:bodyPr wrap="square" lIns="0" tIns="0" rIns="0" bIns="0" rtlCol="0" anchor="ctr"/>
           <a:lstStyle/>
           <a:p>
-            <a:pPr algn="l" indent="0" marL="0">
+            <a:pPr marL="0" indent="0" algn="l">
               <a:buNone/>
             </a:pPr>
             <a:r>
@@ -7616,7 +9148,7 @@
           <a:bodyPr wrap="square" lIns="0" tIns="0" rIns="0" bIns="0" rtlCol="0" anchor="ctr"/>
           <a:lstStyle/>
           <a:p>
-            <a:pPr algn="r" indent="0" marL="0">
+            <a:pPr marL="0" indent="0" algn="r">
               <a:buNone/>
             </a:pPr>
             <a:r>
@@ -7650,6 +9182,7 @@
         <a:solidFill>
           <a:srgbClr val="FFFFFF"/>
         </a:solidFill>
+        <a:effectLst/>
       </p:bgPr>
     </p:bg>
     <p:spTree>
@@ -7687,7 +9220,7 @@
           <a:bodyPr wrap="square" lIns="0" tIns="0" rIns="0" bIns="0" rtlCol="0" anchor="ctr"/>
           <a:lstStyle/>
           <a:p>
-            <a:pPr algn="l" indent="0" marL="0">
+            <a:pPr marL="0" indent="0" algn="l">
               <a:buNone/>
             </a:pPr>
             <a:r>
@@ -7726,7 +9259,7 @@
           <a:bodyPr wrap="square" lIns="0" tIns="0" rIns="0" bIns="0" rtlCol="0" anchor="ctr"/>
           <a:lstStyle/>
           <a:p>
-            <a:pPr algn="l" indent="0" marL="0">
+            <a:pPr marL="0" indent="0" algn="l">
               <a:buNone/>
             </a:pPr>
             <a:r>
@@ -7768,6 +9301,13 @@
             <a:prstDash val="solid"/>
           </a:ln>
         </p:spPr>
+        <p:txBody>
+          <a:bodyPr/>
+          <a:lstStyle/>
+          <a:p>
+            <a:endParaRPr lang="en-US"/>
+          </a:p>
+        </p:txBody>
       </p:sp>
       <p:sp>
         <p:nvSpPr>
@@ -7793,6 +9333,13 @@
             <a:prstDash val="solid"/>
           </a:ln>
         </p:spPr>
+        <p:txBody>
+          <a:bodyPr/>
+          <a:lstStyle/>
+          <a:p>
+            <a:endParaRPr lang="en-US"/>
+          </a:p>
+        </p:txBody>
       </p:sp>
       <p:sp>
         <p:nvSpPr>
@@ -7815,7 +9362,7 @@
           <a:bodyPr wrap="square" lIns="0" tIns="0" rIns="0" bIns="0" rtlCol="0" anchor="ctr"/>
           <a:lstStyle/>
           <a:p>
-            <a:pPr algn="ctr" indent="0" marL="0">
+            <a:pPr marL="0" indent="0" algn="ctr">
               <a:buNone/>
             </a:pPr>
             <a:r>
@@ -7854,7 +9401,7 @@
           <a:bodyPr wrap="square" lIns="0" tIns="0" rIns="0" bIns="0" rtlCol="0" anchor="ctr"/>
           <a:lstStyle/>
           <a:p>
-            <a:pPr algn="ctr" indent="0" marL="0">
+            <a:pPr marL="0" indent="0" algn="ctr">
               <a:buNone/>
             </a:pPr>
             <a:r>
@@ -7893,7 +9440,7 @@
           <a:bodyPr wrap="square" lIns="0" tIns="0" rIns="0" bIns="0" rtlCol="0" anchor="ctr"/>
           <a:lstStyle/>
           <a:p>
-            <a:pPr algn="ctr" indent="0" marL="0">
+            <a:pPr marL="0" indent="0" algn="ctr">
               <a:buNone/>
             </a:pPr>
             <a:r>
@@ -7935,6 +9482,13 @@
             <a:prstDash val="solid"/>
           </a:ln>
         </p:spPr>
+        <p:txBody>
+          <a:bodyPr/>
+          <a:lstStyle/>
+          <a:p>
+            <a:endParaRPr lang="en-US"/>
+          </a:p>
+        </p:txBody>
       </p:sp>
       <p:sp>
         <p:nvSpPr>
@@ -7960,6 +9514,13 @@
             <a:prstDash val="solid"/>
           </a:ln>
         </p:spPr>
+        <p:txBody>
+          <a:bodyPr/>
+          <a:lstStyle/>
+          <a:p>
+            <a:endParaRPr lang="en-US"/>
+          </a:p>
+        </p:txBody>
       </p:sp>
       <p:sp>
         <p:nvSpPr>
@@ -7982,7 +9543,7 @@
           <a:bodyPr wrap="square" lIns="0" tIns="0" rIns="0" bIns="0" rtlCol="0" anchor="ctr"/>
           <a:lstStyle/>
           <a:p>
-            <a:pPr algn="ctr" indent="0" marL="0">
+            <a:pPr marL="0" indent="0" algn="ctr">
               <a:buNone/>
             </a:pPr>
             <a:r>
@@ -8021,7 +9582,7 @@
           <a:bodyPr wrap="square" lIns="0" tIns="0" rIns="0" bIns="0" rtlCol="0" anchor="ctr"/>
           <a:lstStyle/>
           <a:p>
-            <a:pPr algn="ctr" indent="0" marL="0">
+            <a:pPr marL="0" indent="0" algn="ctr">
               <a:buNone/>
             </a:pPr>
             <a:r>
@@ -8060,7 +9621,7 @@
           <a:bodyPr wrap="square" lIns="0" tIns="0" rIns="0" bIns="0" rtlCol="0" anchor="ctr"/>
           <a:lstStyle/>
           <a:p>
-            <a:pPr algn="ctr" indent="0" marL="0">
+            <a:pPr marL="0" indent="0" algn="ctr">
               <a:buNone/>
             </a:pPr>
             <a:r>
@@ -8102,6 +9663,13 @@
             <a:prstDash val="solid"/>
           </a:ln>
         </p:spPr>
+        <p:txBody>
+          <a:bodyPr/>
+          <a:lstStyle/>
+          <a:p>
+            <a:endParaRPr lang="en-US"/>
+          </a:p>
+        </p:txBody>
       </p:sp>
       <p:sp>
         <p:nvSpPr>
@@ -8127,6 +9695,13 @@
             <a:prstDash val="solid"/>
           </a:ln>
         </p:spPr>
+        <p:txBody>
+          <a:bodyPr/>
+          <a:lstStyle/>
+          <a:p>
+            <a:endParaRPr lang="en-US"/>
+          </a:p>
+        </p:txBody>
       </p:sp>
       <p:sp>
         <p:nvSpPr>
@@ -8149,7 +9724,7 @@
           <a:bodyPr wrap="square" lIns="0" tIns="0" rIns="0" bIns="0" rtlCol="0" anchor="ctr"/>
           <a:lstStyle/>
           <a:p>
-            <a:pPr algn="ctr" indent="0" marL="0">
+            <a:pPr marL="0" indent="0" algn="ctr">
               <a:buNone/>
             </a:pPr>
             <a:r>
@@ -8188,7 +9763,7 @@
           <a:bodyPr wrap="square" lIns="0" tIns="0" rIns="0" bIns="0" rtlCol="0" anchor="ctr"/>
           <a:lstStyle/>
           <a:p>
-            <a:pPr algn="ctr" indent="0" marL="0">
+            <a:pPr marL="0" indent="0" algn="ctr">
               <a:buNone/>
             </a:pPr>
             <a:r>
@@ -8227,7 +9802,7 @@
           <a:bodyPr wrap="square" lIns="0" tIns="0" rIns="0" bIns="0" rtlCol="0" anchor="ctr"/>
           <a:lstStyle/>
           <a:p>
-            <a:pPr algn="ctr" indent="0" marL="0">
+            <a:pPr marL="0" indent="0" algn="ctr">
               <a:buNone/>
             </a:pPr>
             <a:r>
@@ -8269,6 +9844,13 @@
             <a:prstDash val="solid"/>
           </a:ln>
         </p:spPr>
+        <p:txBody>
+          <a:bodyPr/>
+          <a:lstStyle/>
+          <a:p>
+            <a:endParaRPr lang="en-US"/>
+          </a:p>
+        </p:txBody>
       </p:sp>
       <p:sp>
         <p:nvSpPr>
@@ -8291,11 +9873,11 @@
           <a:bodyPr wrap="square" lIns="0" tIns="0" rIns="0" bIns="0" rtlCol="0" anchor="ctr"/>
           <a:lstStyle/>
           <a:p>
-            <a:pPr indent="0" marL="0">
+            <a:pPr marL="0" indent="0">
               <a:buNone/>
             </a:pPr>
             <a:r>
-              <a:rPr lang="en-US" sz="1200" b="1" spc="300" kern="0" dirty="0">
+              <a:rPr lang="en-US" sz="1200" b="1" kern="0" spc="300" dirty="0">
                 <a:solidFill>
                   <a:srgbClr val="94A3B8"/>
                 </a:solidFill>
@@ -8330,7 +9912,7 @@
           <a:bodyPr wrap="square" lIns="0" tIns="0" rIns="0" bIns="0" rtlCol="0" anchor="t"/>
           <a:lstStyle/>
           <a:p>
-            <a:pPr indent="0" marL="0">
+            <a:pPr marL="0" indent="0">
               <a:spcAft>
                 <a:spcPts val="200"/>
               </a:spcAft>
@@ -8350,7 +9932,7 @@
             <a:endParaRPr lang="en-US" sz="1100" dirty="0"/>
           </a:p>
           <a:p>
-            <a:pPr indent="0" marL="0">
+            <a:pPr marL="0" indent="0">
               <a:spcAft>
                 <a:spcPts val="200"/>
               </a:spcAft>
@@ -8392,7 +9974,7 @@
           <a:bodyPr wrap="square" lIns="0" tIns="0" rIns="0" bIns="0" rtlCol="0" anchor="ctr"/>
           <a:lstStyle/>
           <a:p>
-            <a:pPr algn="l" indent="0" marL="0">
+            <a:pPr marL="0" indent="0" algn="l">
               <a:buNone/>
             </a:pPr>
             <a:r>
@@ -8431,7 +10013,7 @@
           <a:bodyPr wrap="square" lIns="0" tIns="0" rIns="0" bIns="0" rtlCol="0" anchor="ctr"/>
           <a:lstStyle/>
           <a:p>
-            <a:pPr algn="r" indent="0" marL="0">
+            <a:pPr marL="0" indent="0" algn="r">
               <a:buNone/>
             </a:pPr>
             <a:r>
@@ -8458,13 +10040,14 @@
 </file>
 
 <file path=ppt/slides/slide9.xml><?xml version="1.0" encoding="utf-8"?>
-<p:sld xmlns:a="http://schemas.openxmlformats.org/drawingml/2006/main" xmlns:r="http://schemas.openxmlformats.org/officeDocument/2006/relationships" xmlns:p="http://schemas.openxmlformats.org/presentationml/2006/main">
+<p:sld xmlns:a="http://schemas.openxmlformats.org/drawingml/2006/main" xmlns:r="http://schemas.openxmlformats.org/officeDocument/2006/relationships" xmlns:p="http://schemas.openxmlformats.org/presentationml/2006/main" show="0">
   <p:cSld name="Slide 9">
     <p:bg>
       <p:bgPr>
         <a:solidFill>
           <a:srgbClr val="FFFFFF"/>
         </a:solidFill>
+        <a:effectLst/>
       </p:bgPr>
     </p:bg>
     <p:spTree>
@@ -8502,7 +10085,7 @@
           <a:bodyPr wrap="square" lIns="0" tIns="0" rIns="0" bIns="0" rtlCol="0" anchor="ctr"/>
           <a:lstStyle/>
           <a:p>
-            <a:pPr algn="l" indent="0" marL="0">
+            <a:pPr marL="0" indent="0" algn="l">
               <a:buNone/>
             </a:pPr>
             <a:r>
@@ -8541,7 +10124,7 @@
           <a:bodyPr wrap="square" lIns="0" tIns="0" rIns="0" bIns="0" rtlCol="0" anchor="ctr"/>
           <a:lstStyle/>
           <a:p>
-            <a:pPr algn="l" indent="0" marL="0">
+            <a:pPr marL="0" indent="0" algn="l">
               <a:buNone/>
             </a:pPr>
             <a:r>
@@ -8575,17 +10158,41 @@
         </p:nvGraphicFramePr>
         <p:xfrm>
           <a:off x="457200" y="1554480"/>
-          <a:ext cx="11247120" cy="914400"/>
+          <a:ext cx="11247120" cy="3977640"/>
         </p:xfrm>
         <a:graphic>
           <a:graphicData uri="http://schemas.openxmlformats.org/drawingml/2006/table">
             <a:tbl>
               <a:tblPr/>
               <a:tblGrid>
-                <a:gridCol w="3931920"/>
-                <a:gridCol w="1463040"/>
-                <a:gridCol w="4572000"/>
-                <a:gridCol w="1280160"/>
+                <a:gridCol w="3931920">
+                  <a:extLst>
+                    <a:ext uri="{9D8B030D-6E8A-4147-A177-3AD203B41FA5}">
+                      <a16:colId xmlns:a16="http://schemas.microsoft.com/office/drawing/2014/main" val="20000"/>
+                    </a:ext>
+                  </a:extLst>
+                </a:gridCol>
+                <a:gridCol w="1463040">
+                  <a:extLst>
+                    <a:ext uri="{9D8B030D-6E8A-4147-A177-3AD203B41FA5}">
+                      <a16:colId xmlns:a16="http://schemas.microsoft.com/office/drawing/2014/main" val="20001"/>
+                    </a:ext>
+                  </a:extLst>
+                </a:gridCol>
+                <a:gridCol w="4572000">
+                  <a:extLst>
+                    <a:ext uri="{9D8B030D-6E8A-4147-A177-3AD203B41FA5}">
+                      <a16:colId xmlns:a16="http://schemas.microsoft.com/office/drawing/2014/main" val="20002"/>
+                    </a:ext>
+                  </a:extLst>
+                </a:gridCol>
+                <a:gridCol w="1280160">
+                  <a:extLst>
+                    <a:ext uri="{9D8B030D-6E8A-4147-A177-3AD203B41FA5}">
+                      <a16:colId xmlns:a16="http://schemas.microsoft.com/office/drawing/2014/main" val="20003"/>
+                    </a:ext>
+                  </a:extLst>
+                </a:gridCol>
               </a:tblGrid>
               <a:tr h="502920">
                 <a:tc>
@@ -8593,7 +10200,7 @@
                     <a:bodyPr/>
                     <a:lstStyle/>
                     <a:p>
-                      <a:pPr algn="l" indent="0" marL="0">
+                      <a:pPr marL="0" indent="0" algn="l">
                         <a:buNone/>
                       </a:pPr>
                       <a:r>
@@ -8614,7 +10221,7 @@
                       </a:endParaRPr>
                     </a:p>
                   </a:txBody>
-                  <a:tcPr marL="91440" marR="91440" marT="45720" marB="45720" anchor="ctr">
+                  <a:tcPr anchor="ctr">
                     <a:lnL w="12700" cap="flat" cmpd="sng" algn="ctr">
                       <a:solidFill>
                         <a:srgbClr val="E2E8F0"/>
@@ -8661,7 +10268,7 @@
                     <a:bodyPr/>
                     <a:lstStyle/>
                     <a:p>
-                      <a:pPr algn="ctr" indent="0" marL="0">
+                      <a:pPr marL="0" indent="0" algn="ctr">
                         <a:buNone/>
                       </a:pPr>
                       <a:r>
@@ -8682,7 +10289,7 @@
                       </a:endParaRPr>
                     </a:p>
                   </a:txBody>
-                  <a:tcPr marL="91440" marR="91440" marT="45720" marB="45720" anchor="ctr">
+                  <a:tcPr anchor="ctr">
                     <a:lnL w="12700" cap="flat" cmpd="sng" algn="ctr">
                       <a:solidFill>
                         <a:srgbClr val="E2E8F0"/>
@@ -8729,7 +10336,7 @@
                     <a:bodyPr/>
                     <a:lstStyle/>
                     <a:p>
-                      <a:pPr algn="l" indent="0" marL="0">
+                      <a:pPr marL="0" indent="0" algn="l">
                         <a:buNone/>
                       </a:pPr>
                       <a:r>
@@ -8750,7 +10357,7 @@
                       </a:endParaRPr>
                     </a:p>
                   </a:txBody>
-                  <a:tcPr marL="91440" marR="91440" marT="45720" marB="45720" anchor="ctr">
+                  <a:tcPr anchor="ctr">
                     <a:lnL w="12700" cap="flat" cmpd="sng" algn="ctr">
                       <a:solidFill>
                         <a:srgbClr val="E2E8F0"/>
@@ -8797,7 +10404,7 @@
                     <a:bodyPr/>
                     <a:lstStyle/>
                     <a:p>
-                      <a:pPr algn="ctr" indent="0" marL="0">
+                      <a:pPr marL="0" indent="0" algn="ctr">
                         <a:buNone/>
                       </a:pPr>
                       <a:r>
@@ -8818,7 +10425,7 @@
                       </a:endParaRPr>
                     </a:p>
                   </a:txBody>
-                  <a:tcPr marL="91440" marR="91440" marT="45720" marB="45720" anchor="ctr">
+                  <a:tcPr anchor="ctr">
                     <a:lnL w="12700" cap="flat" cmpd="sng" algn="ctr">
                       <a:solidFill>
                         <a:srgbClr val="E2E8F0"/>
@@ -8860,6 +10467,11 @@
                     </a:solidFill>
                   </a:tcPr>
                 </a:tc>
+                <a:extLst>
+                  <a:ext uri="{0D108BD9-81ED-4DB2-BD59-A6C34878D82A}">
+                    <a16:rowId xmlns:a16="http://schemas.microsoft.com/office/drawing/2014/main" val="10000"/>
+                  </a:ext>
+                </a:extLst>
               </a:tr>
               <a:tr h="548640">
                 <a:tc>
@@ -8867,7 +10479,7 @@
                     <a:bodyPr/>
                     <a:lstStyle/>
                     <a:p>
-                      <a:pPr algn="l" indent="0" marL="0">
+                      <a:pPr marL="0" indent="0" algn="l">
                         <a:buNone/>
                       </a:pPr>
                       <a:r>
@@ -8888,7 +10500,7 @@
                       </a:endParaRPr>
                     </a:p>
                   </a:txBody>
-                  <a:tcPr marL="91440" marR="91440" marT="45720" marB="45720" anchor="ctr">
+                  <a:tcPr anchor="ctr">
                     <a:lnL w="12700" cap="flat" cmpd="sng" algn="ctr">
                       <a:solidFill>
                         <a:srgbClr val="E2E8F0"/>
@@ -8932,7 +10544,7 @@
                     <a:bodyPr/>
                     <a:lstStyle/>
                     <a:p>
-                      <a:pPr algn="ctr" indent="0" marL="0">
+                      <a:pPr marL="0" indent="0" algn="ctr">
                         <a:buNone/>
                       </a:pPr>
                       <a:r>
@@ -8953,7 +10565,7 @@
                       </a:endParaRPr>
                     </a:p>
                   </a:txBody>
-                  <a:tcPr marL="91440" marR="91440" marT="45720" marB="45720" anchor="ctr">
+                  <a:tcPr anchor="ctr">
                     <a:lnL w="12700" cap="flat" cmpd="sng" algn="ctr">
                       <a:solidFill>
                         <a:srgbClr val="E2E8F0"/>
@@ -8997,7 +10609,7 @@
                     <a:bodyPr/>
                     <a:lstStyle/>
                     <a:p>
-                      <a:pPr algn="l" indent="0" marL="0">
+                      <a:pPr marL="0" indent="0" algn="l">
                         <a:buNone/>
                       </a:pPr>
                       <a:r>
@@ -9018,7 +10630,7 @@
                       </a:endParaRPr>
                     </a:p>
                   </a:txBody>
-                  <a:tcPr marL="91440" marR="91440" marT="45720" marB="45720" anchor="ctr">
+                  <a:tcPr anchor="ctr">
                     <a:lnL w="12700" cap="flat" cmpd="sng" algn="ctr">
                       <a:solidFill>
                         <a:srgbClr val="E2E8F0"/>
@@ -9062,7 +10674,7 @@
                     <a:bodyPr/>
                     <a:lstStyle/>
                     <a:p>
-                      <a:pPr algn="ctr" indent="0" marL="0">
+                      <a:pPr marL="0" indent="0" algn="ctr">
                         <a:buNone/>
                       </a:pPr>
                       <a:r>
@@ -9083,7 +10695,7 @@
                       </a:endParaRPr>
                     </a:p>
                   </a:txBody>
-                  <a:tcPr marL="91440" marR="91440" marT="45720" marB="45720" anchor="ctr">
+                  <a:tcPr anchor="ctr">
                     <a:lnL w="12700" cap="flat" cmpd="sng" algn="ctr">
                       <a:solidFill>
                         <a:srgbClr val="E2E8F0"/>
@@ -9122,6 +10734,11 @@
                     </a:lnB>
                   </a:tcPr>
                 </a:tc>
+                <a:extLst>
+                  <a:ext uri="{0D108BD9-81ED-4DB2-BD59-A6C34878D82A}">
+                    <a16:rowId xmlns:a16="http://schemas.microsoft.com/office/drawing/2014/main" val="10001"/>
+                  </a:ext>
+                </a:extLst>
               </a:tr>
               <a:tr h="548640">
                 <a:tc>
@@ -9129,7 +10746,7 @@
                     <a:bodyPr/>
                     <a:lstStyle/>
                     <a:p>
-                      <a:pPr algn="l" indent="0" marL="0">
+                      <a:pPr marL="0" indent="0" algn="l">
                         <a:buNone/>
                       </a:pPr>
                       <a:r>
@@ -9150,7 +10767,7 @@
                       </a:endParaRPr>
                     </a:p>
                   </a:txBody>
-                  <a:tcPr marL="91440" marR="91440" marT="45720" marB="45720" anchor="ctr">
+                  <a:tcPr anchor="ctr">
                     <a:lnL w="12700" cap="flat" cmpd="sng" algn="ctr">
                       <a:solidFill>
                         <a:srgbClr val="E2E8F0"/>
@@ -9194,7 +10811,7 @@
                     <a:bodyPr/>
                     <a:lstStyle/>
                     <a:p>
-                      <a:pPr algn="ctr" indent="0" marL="0">
+                      <a:pPr marL="0" indent="0" algn="ctr">
                         <a:buNone/>
                       </a:pPr>
                       <a:r>
@@ -9215,7 +10832,7 @@
                       </a:endParaRPr>
                     </a:p>
                   </a:txBody>
-                  <a:tcPr marL="91440" marR="91440" marT="45720" marB="45720" anchor="ctr">
+                  <a:tcPr anchor="ctr">
                     <a:lnL w="12700" cap="flat" cmpd="sng" algn="ctr">
                       <a:solidFill>
                         <a:srgbClr val="E2E8F0"/>
@@ -9259,7 +10876,7 @@
                     <a:bodyPr/>
                     <a:lstStyle/>
                     <a:p>
-                      <a:pPr algn="l" indent="0" marL="0">
+                      <a:pPr marL="0" indent="0" algn="l">
                         <a:buNone/>
                       </a:pPr>
                       <a:r>
@@ -9280,7 +10897,7 @@
                       </a:endParaRPr>
                     </a:p>
                   </a:txBody>
-                  <a:tcPr marL="91440" marR="91440" marT="45720" marB="45720" anchor="ctr">
+                  <a:tcPr anchor="ctr">
                     <a:lnL w="12700" cap="flat" cmpd="sng" algn="ctr">
                       <a:solidFill>
                         <a:srgbClr val="E2E8F0"/>
@@ -9324,7 +10941,7 @@
                     <a:bodyPr/>
                     <a:lstStyle/>
                     <a:p>
-                      <a:pPr algn="ctr" indent="0" marL="0">
+                      <a:pPr marL="0" indent="0" algn="ctr">
                         <a:buNone/>
                       </a:pPr>
                       <a:r>
@@ -9345,7 +10962,7 @@
                       </a:endParaRPr>
                     </a:p>
                   </a:txBody>
-                  <a:tcPr marL="91440" marR="91440" marT="45720" marB="45720" anchor="ctr">
+                  <a:tcPr anchor="ctr">
                     <a:lnL w="12700" cap="flat" cmpd="sng" algn="ctr">
                       <a:solidFill>
                         <a:srgbClr val="E2E8F0"/>
@@ -9384,6 +11001,11 @@
                     </a:lnB>
                   </a:tcPr>
                 </a:tc>
+                <a:extLst>
+                  <a:ext uri="{0D108BD9-81ED-4DB2-BD59-A6C34878D82A}">
+                    <a16:rowId xmlns:a16="http://schemas.microsoft.com/office/drawing/2014/main" val="10002"/>
+                  </a:ext>
+                </a:extLst>
               </a:tr>
               <a:tr h="548640">
                 <a:tc>
@@ -9391,7 +11013,7 @@
                     <a:bodyPr/>
                     <a:lstStyle/>
                     <a:p>
-                      <a:pPr algn="l" indent="0" marL="0">
+                      <a:pPr marL="0" indent="0" algn="l">
                         <a:buNone/>
                       </a:pPr>
                       <a:r>
@@ -9412,7 +11034,7 @@
                       </a:endParaRPr>
                     </a:p>
                   </a:txBody>
-                  <a:tcPr marL="91440" marR="91440" marT="45720" marB="45720" anchor="ctr">
+                  <a:tcPr anchor="ctr">
                     <a:lnL w="12700" cap="flat" cmpd="sng" algn="ctr">
                       <a:solidFill>
                         <a:srgbClr val="E2E8F0"/>
@@ -9456,7 +11078,7 @@
                     <a:bodyPr/>
                     <a:lstStyle/>
                     <a:p>
-                      <a:pPr algn="ctr" indent="0" marL="0">
+                      <a:pPr marL="0" indent="0" algn="ctr">
                         <a:buNone/>
                       </a:pPr>
                       <a:r>
@@ -9477,7 +11099,7 @@
                       </a:endParaRPr>
                     </a:p>
                   </a:txBody>
-                  <a:tcPr marL="91440" marR="91440" marT="45720" marB="45720" anchor="ctr">
+                  <a:tcPr anchor="ctr">
                     <a:lnL w="12700" cap="flat" cmpd="sng" algn="ctr">
                       <a:solidFill>
                         <a:srgbClr val="E2E8F0"/>
@@ -9521,7 +11143,7 @@
                     <a:bodyPr/>
                     <a:lstStyle/>
                     <a:p>
-                      <a:pPr algn="l" indent="0" marL="0">
+                      <a:pPr marL="0" indent="0" algn="l">
                         <a:buNone/>
                       </a:pPr>
                       <a:r>
@@ -9542,7 +11164,7 @@
                       </a:endParaRPr>
                     </a:p>
                   </a:txBody>
-                  <a:tcPr marL="91440" marR="91440" marT="45720" marB="45720" anchor="ctr">
+                  <a:tcPr anchor="ctr">
                     <a:lnL w="12700" cap="flat" cmpd="sng" algn="ctr">
                       <a:solidFill>
                         <a:srgbClr val="E2E8F0"/>
@@ -9586,7 +11208,7 @@
                     <a:bodyPr/>
                     <a:lstStyle/>
                     <a:p>
-                      <a:pPr algn="ctr" indent="0" marL="0">
+                      <a:pPr marL="0" indent="0" algn="ctr">
                         <a:buNone/>
                       </a:pPr>
                       <a:r>
@@ -9607,7 +11229,7 @@
                       </a:endParaRPr>
                     </a:p>
                   </a:txBody>
-                  <a:tcPr marL="91440" marR="91440" marT="45720" marB="45720" anchor="ctr">
+                  <a:tcPr anchor="ctr">
                     <a:lnL w="12700" cap="flat" cmpd="sng" algn="ctr">
                       <a:solidFill>
                         <a:srgbClr val="E2E8F0"/>
@@ -9646,6 +11268,11 @@
                     </a:lnB>
                   </a:tcPr>
                 </a:tc>
+                <a:extLst>
+                  <a:ext uri="{0D108BD9-81ED-4DB2-BD59-A6C34878D82A}">
+                    <a16:rowId xmlns:a16="http://schemas.microsoft.com/office/drawing/2014/main" val="10003"/>
+                  </a:ext>
+                </a:extLst>
               </a:tr>
               <a:tr h="548640">
                 <a:tc>
@@ -9653,7 +11280,7 @@
                     <a:bodyPr/>
                     <a:lstStyle/>
                     <a:p>
-                      <a:pPr algn="l" indent="0" marL="0">
+                      <a:pPr marL="0" indent="0" algn="l">
                         <a:buNone/>
                       </a:pPr>
                       <a:r>
@@ -9674,7 +11301,7 @@
                       </a:endParaRPr>
                     </a:p>
                   </a:txBody>
-                  <a:tcPr marL="91440" marR="91440" marT="45720" marB="45720" anchor="ctr">
+                  <a:tcPr anchor="ctr">
                     <a:lnL w="12700" cap="flat" cmpd="sng" algn="ctr">
                       <a:solidFill>
                         <a:srgbClr val="E2E8F0"/>
@@ -9718,7 +11345,7 @@
                     <a:bodyPr/>
                     <a:lstStyle/>
                     <a:p>
-                      <a:pPr algn="ctr" indent="0" marL="0">
+                      <a:pPr marL="0" indent="0" algn="ctr">
                         <a:buNone/>
                       </a:pPr>
                       <a:r>
@@ -9739,7 +11366,7 @@
                       </a:endParaRPr>
                     </a:p>
                   </a:txBody>
-                  <a:tcPr marL="91440" marR="91440" marT="45720" marB="45720" anchor="ctr">
+                  <a:tcPr anchor="ctr">
                     <a:lnL w="12700" cap="flat" cmpd="sng" algn="ctr">
                       <a:solidFill>
                         <a:srgbClr val="E2E8F0"/>
@@ -9783,7 +11410,7 @@
                     <a:bodyPr/>
                     <a:lstStyle/>
                     <a:p>
-                      <a:pPr algn="l" indent="0" marL="0">
+                      <a:pPr marL="0" indent="0" algn="l">
                         <a:buNone/>
                       </a:pPr>
                       <a:r>
@@ -9804,7 +11431,7 @@
                       </a:endParaRPr>
                     </a:p>
                   </a:txBody>
-                  <a:tcPr marL="91440" marR="91440" marT="45720" marB="45720" anchor="ctr">
+                  <a:tcPr anchor="ctr">
                     <a:lnL w="12700" cap="flat" cmpd="sng" algn="ctr">
                       <a:solidFill>
                         <a:srgbClr val="E2E8F0"/>
@@ -9848,7 +11475,7 @@
                     <a:bodyPr/>
                     <a:lstStyle/>
                     <a:p>
-                      <a:pPr algn="ctr" indent="0" marL="0">
+                      <a:pPr marL="0" indent="0" algn="ctr">
                         <a:buNone/>
                       </a:pPr>
                       <a:r>
@@ -9869,7 +11496,7 @@
                       </a:endParaRPr>
                     </a:p>
                   </a:txBody>
-                  <a:tcPr marL="91440" marR="91440" marT="45720" marB="45720" anchor="ctr">
+                  <a:tcPr anchor="ctr">
                     <a:lnL w="12700" cap="flat" cmpd="sng" algn="ctr">
                       <a:solidFill>
                         <a:srgbClr val="E2E8F0"/>
@@ -9908,6 +11535,11 @@
                     </a:lnB>
                   </a:tcPr>
                 </a:tc>
+                <a:extLst>
+                  <a:ext uri="{0D108BD9-81ED-4DB2-BD59-A6C34878D82A}">
+                    <a16:rowId xmlns:a16="http://schemas.microsoft.com/office/drawing/2014/main" val="10004"/>
+                  </a:ext>
+                </a:extLst>
               </a:tr>
               <a:tr h="640080">
                 <a:tc>
@@ -9915,7 +11547,7 @@
                     <a:bodyPr/>
                     <a:lstStyle/>
                     <a:p>
-                      <a:pPr algn="l" indent="0" marL="0">
+                      <a:pPr marL="0" indent="0" algn="l">
                         <a:buNone/>
                       </a:pPr>
                       <a:r>
@@ -9936,7 +11568,7 @@
                       </a:endParaRPr>
                     </a:p>
                   </a:txBody>
-                  <a:tcPr marL="91440" marR="91440" marT="45720" marB="45720" anchor="ctr">
+                  <a:tcPr anchor="ctr">
                     <a:lnL w="12700" cap="flat" cmpd="sng" algn="ctr">
                       <a:solidFill>
                         <a:srgbClr val="E2E8F0"/>
@@ -9980,7 +11612,7 @@
                     <a:bodyPr/>
                     <a:lstStyle/>
                     <a:p>
-                      <a:pPr algn="ctr" indent="0" marL="0">
+                      <a:pPr marL="0" indent="0" algn="ctr">
                         <a:buNone/>
                       </a:pPr>
                       <a:r>
@@ -10001,7 +11633,7 @@
                       </a:endParaRPr>
                     </a:p>
                   </a:txBody>
-                  <a:tcPr marL="91440" marR="91440" marT="45720" marB="45720" anchor="ctr">
+                  <a:tcPr anchor="ctr">
                     <a:lnL w="12700" cap="flat" cmpd="sng" algn="ctr">
                       <a:solidFill>
                         <a:srgbClr val="E2E8F0"/>
@@ -10045,7 +11677,7 @@
                     <a:bodyPr/>
                     <a:lstStyle/>
                     <a:p>
-                      <a:pPr algn="l" indent="0" marL="0">
+                      <a:pPr marL="0" indent="0" algn="l">
                         <a:buNone/>
                       </a:pPr>
                       <a:r>
@@ -10066,7 +11698,7 @@
                       </a:endParaRPr>
                     </a:p>
                   </a:txBody>
-                  <a:tcPr marL="91440" marR="91440" marT="45720" marB="45720" anchor="ctr">
+                  <a:tcPr anchor="ctr">
                     <a:lnL w="12700" cap="flat" cmpd="sng" algn="ctr">
                       <a:solidFill>
                         <a:srgbClr val="E2E8F0"/>
@@ -10110,7 +11742,7 @@
                     <a:bodyPr/>
                     <a:lstStyle/>
                     <a:p>
-                      <a:pPr algn="ctr" indent="0" marL="0">
+                      <a:pPr marL="0" indent="0" algn="ctr">
                         <a:buNone/>
                       </a:pPr>
                       <a:r>
@@ -10131,7 +11763,7 @@
                       </a:endParaRPr>
                     </a:p>
                   </a:txBody>
-                  <a:tcPr marL="91440" marR="91440" marT="45720" marB="45720" anchor="ctr">
+                  <a:tcPr anchor="ctr">
                     <a:lnL w="12700" cap="flat" cmpd="sng" algn="ctr">
                       <a:solidFill>
                         <a:srgbClr val="E2E8F0"/>
@@ -10170,6 +11802,11 @@
                     </a:lnB>
                   </a:tcPr>
                 </a:tc>
+                <a:extLst>
+                  <a:ext uri="{0D108BD9-81ED-4DB2-BD59-A6C34878D82A}">
+                    <a16:rowId xmlns:a16="http://schemas.microsoft.com/office/drawing/2014/main" val="10005"/>
+                  </a:ext>
+                </a:extLst>
               </a:tr>
               <a:tr h="640080">
                 <a:tc>
@@ -10177,7 +11814,7 @@
                     <a:bodyPr/>
                     <a:lstStyle/>
                     <a:p>
-                      <a:pPr algn="l" indent="0" marL="0">
+                      <a:pPr marL="0" indent="0" algn="l">
                         <a:buNone/>
                       </a:pPr>
                       <a:r>
@@ -10198,7 +11835,7 @@
                       </a:endParaRPr>
                     </a:p>
                   </a:txBody>
-                  <a:tcPr marL="91440" marR="91440" marT="45720" marB="45720" anchor="ctr">
+                  <a:tcPr anchor="ctr">
                     <a:lnL w="12700" cap="flat" cmpd="sng" algn="ctr">
                       <a:solidFill>
                         <a:srgbClr val="E2E8F0"/>
@@ -10242,7 +11879,7 @@
                     <a:bodyPr/>
                     <a:lstStyle/>
                     <a:p>
-                      <a:pPr algn="ctr" indent="0" marL="0">
+                      <a:pPr marL="0" indent="0" algn="ctr">
                         <a:buNone/>
                       </a:pPr>
                       <a:r>
@@ -10263,7 +11900,7 @@
                       </a:endParaRPr>
                     </a:p>
                   </a:txBody>
-                  <a:tcPr marL="91440" marR="91440" marT="45720" marB="45720" anchor="ctr">
+                  <a:tcPr anchor="ctr">
                     <a:lnL w="12700" cap="flat" cmpd="sng" algn="ctr">
                       <a:solidFill>
                         <a:srgbClr val="E2E8F0"/>
@@ -10307,7 +11944,7 @@
                     <a:bodyPr/>
                     <a:lstStyle/>
                     <a:p>
-                      <a:pPr algn="l" indent="0" marL="0">
+                      <a:pPr marL="0" indent="0" algn="l">
                         <a:buNone/>
                       </a:pPr>
                       <a:r>
@@ -10328,7 +11965,7 @@
                       </a:endParaRPr>
                     </a:p>
                   </a:txBody>
-                  <a:tcPr marL="91440" marR="91440" marT="45720" marB="45720" anchor="ctr">
+                  <a:tcPr anchor="ctr">
                     <a:lnL w="12700" cap="flat" cmpd="sng" algn="ctr">
                       <a:solidFill>
                         <a:srgbClr val="E2E8F0"/>
@@ -10372,7 +12009,7 @@
                     <a:bodyPr/>
                     <a:lstStyle/>
                     <a:p>
-                      <a:pPr algn="ctr" indent="0" marL="0">
+                      <a:pPr marL="0" indent="0" algn="ctr">
                         <a:buNone/>
                       </a:pPr>
                       <a:r>
@@ -10393,7 +12030,7 @@
                       </a:endParaRPr>
                     </a:p>
                   </a:txBody>
-                  <a:tcPr marL="91440" marR="91440" marT="45720" marB="45720" anchor="ctr">
+                  <a:tcPr anchor="ctr">
                     <a:lnL w="12700" cap="flat" cmpd="sng" algn="ctr">
                       <a:solidFill>
                         <a:srgbClr val="E2E8F0"/>
@@ -10432,6 +12069,11 @@
                     </a:lnB>
                   </a:tcPr>
                 </a:tc>
+                <a:extLst>
+                  <a:ext uri="{0D108BD9-81ED-4DB2-BD59-A6C34878D82A}">
+                    <a16:rowId xmlns:a16="http://schemas.microsoft.com/office/drawing/2014/main" val="10006"/>
+                  </a:ext>
+                </a:extLst>
               </a:tr>
             </a:tbl>
           </a:graphicData>
@@ -10461,6 +12103,13 @@
             <a:prstDash val="solid"/>
           </a:ln>
         </p:spPr>
+        <p:txBody>
+          <a:bodyPr/>
+          <a:lstStyle/>
+          <a:p>
+            <a:endParaRPr lang="en-US"/>
+          </a:p>
+        </p:txBody>
       </p:sp>
       <p:sp>
         <p:nvSpPr>
@@ -10483,7 +12132,7 @@
           <a:bodyPr wrap="square" lIns="0" tIns="0" rIns="0" bIns="0" rtlCol="0" anchor="ctr"/>
           <a:lstStyle/>
           <a:p>
-            <a:pPr algn="ctr" indent="0" marL="0">
+            <a:pPr marL="0" indent="0" algn="ctr">
               <a:buNone/>
             </a:pPr>
             <a:r>
@@ -10802,4 +12451,319 @@
     </a:ext>
   </a:extLst>
 </a:theme>
+</file>
+
+<file path=ppt/theme/theme2.xml><?xml version="1.0" encoding="utf-8"?>
+<a:theme xmlns:a="http://schemas.openxmlformats.org/drawingml/2006/main" name="Tema de Office">
+  <a:themeElements>
+    <a:clrScheme name="Office">
+      <a:dk1>
+        <a:sysClr val="windowText" lastClr="000000"/>
+      </a:dk1>
+      <a:lt1>
+        <a:sysClr val="window" lastClr="FFFFFF"/>
+      </a:lt1>
+      <a:dk2>
+        <a:srgbClr val="0E2841"/>
+      </a:dk2>
+      <a:lt2>
+        <a:srgbClr val="E8E8E8"/>
+      </a:lt2>
+      <a:accent1>
+        <a:srgbClr val="156082"/>
+      </a:accent1>
+      <a:accent2>
+        <a:srgbClr val="E97132"/>
+      </a:accent2>
+      <a:accent3>
+        <a:srgbClr val="196B24"/>
+      </a:accent3>
+      <a:accent4>
+        <a:srgbClr val="0F9ED5"/>
+      </a:accent4>
+      <a:accent5>
+        <a:srgbClr val="A02B93"/>
+      </a:accent5>
+      <a:accent6>
+        <a:srgbClr val="4EA72E"/>
+      </a:accent6>
+      <a:hlink>
+        <a:srgbClr val="467886"/>
+      </a:hlink>
+      <a:folHlink>
+        <a:srgbClr val="96607D"/>
+      </a:folHlink>
+    </a:clrScheme>
+    <a:fontScheme name="Office">
+      <a:majorFont>
+        <a:latin typeface="Aptos Display" panose="02110004020202020204"/>
+        <a:ea typeface=""/>
+        <a:cs typeface=""/>
+        <a:font script="Jpan" typeface="游ゴシック Light"/>
+        <a:font script="Hang" typeface="맑은 고딕"/>
+        <a:font script="Hans" typeface="等线 Light"/>
+        <a:font script="Hant" typeface="新細明體"/>
+        <a:font script="Arab" typeface="Times New Roman"/>
+        <a:font script="Hebr" typeface="Times New Roman"/>
+        <a:font script="Thai" typeface="Angsana New"/>
+        <a:font script="Ethi" typeface="Nyala"/>
+        <a:font script="Beng" typeface="Vrinda"/>
+        <a:font script="Gujr" typeface="Shruti"/>
+        <a:font script="Khmr" typeface="MoolBoran"/>
+        <a:font script="Knda" typeface="Tunga"/>
+        <a:font script="Guru" typeface="Raavi"/>
+        <a:font script="Cans" typeface="Euphemia"/>
+        <a:font script="Cher" typeface="Plantagenet Cherokee"/>
+        <a:font script="Yiii" typeface="Microsoft Yi Baiti"/>
+        <a:font script="Tibt" typeface="Microsoft Himalaya"/>
+        <a:font script="Thaa" typeface="MV Boli"/>
+        <a:font script="Deva" typeface="Mangal"/>
+        <a:font script="Telu" typeface="Gautami"/>
+        <a:font script="Taml" typeface="Latha"/>
+        <a:font script="Syrc" typeface="Estrangelo Edessa"/>
+        <a:font script="Orya" typeface="Kalinga"/>
+        <a:font script="Mlym" typeface="Kartika"/>
+        <a:font script="Laoo" typeface="DokChampa"/>
+        <a:font script="Sinh" typeface="Iskoola Pota"/>
+        <a:font script="Mong" typeface="Mongolian Baiti"/>
+        <a:font script="Viet" typeface="Times New Roman"/>
+        <a:font script="Uigh" typeface="Microsoft Uighur"/>
+        <a:font script="Geor" typeface="Sylfaen"/>
+        <a:font script="Armn" typeface="Arial"/>
+        <a:font script="Bugi" typeface="Leelawadee UI"/>
+        <a:font script="Bopo" typeface="Microsoft JhengHei"/>
+        <a:font script="Java" typeface="Javanese Text"/>
+        <a:font script="Lisu" typeface="Segoe UI"/>
+        <a:font script="Mymr" typeface="Myanmar Text"/>
+        <a:font script="Nkoo" typeface="Ebrima"/>
+        <a:font script="Olck" typeface="Nirmala UI"/>
+        <a:font script="Osma" typeface="Ebrima"/>
+        <a:font script="Phag" typeface="Phagspa"/>
+        <a:font script="Syrn" typeface="Estrangelo Edessa"/>
+        <a:font script="Syrj" typeface="Estrangelo Edessa"/>
+        <a:font script="Syre" typeface="Estrangelo Edessa"/>
+        <a:font script="Sora" typeface="Nirmala UI"/>
+        <a:font script="Tale" typeface="Microsoft Tai Le"/>
+        <a:font script="Talu" typeface="Microsoft New Tai Lue"/>
+        <a:font script="Tfng" typeface="Ebrima"/>
+      </a:majorFont>
+      <a:minorFont>
+        <a:latin typeface="Aptos" panose="02110004020202020204"/>
+        <a:ea typeface=""/>
+        <a:cs typeface=""/>
+        <a:font script="Jpan" typeface="游ゴシック"/>
+        <a:font script="Hang" typeface="맑은 고딕"/>
+        <a:font script="Hans" typeface="等线"/>
+        <a:font script="Hant" typeface="新細明體"/>
+        <a:font script="Arab" typeface="Arial"/>
+        <a:font script="Hebr" typeface="Arial"/>
+        <a:font script="Thai" typeface="Cordia New"/>
+        <a:font script="Ethi" typeface="Nyala"/>
+        <a:font script="Beng" typeface="Vrinda"/>
+        <a:font script="Gujr" typeface="Shruti"/>
+        <a:font script="Khmr" typeface="DaunPenh"/>
+        <a:font script="Knda" typeface="Tunga"/>
+        <a:font script="Guru" typeface="Raavi"/>
+        <a:font script="Cans" typeface="Euphemia"/>
+        <a:font script="Cher" typeface="Plantagenet Cherokee"/>
+        <a:font script="Yiii" typeface="Microsoft Yi Baiti"/>
+        <a:font script="Tibt" typeface="Microsoft Himalaya"/>
+        <a:font script="Thaa" typeface="MV Boli"/>
+        <a:font script="Deva" typeface="Mangal"/>
+        <a:font script="Telu" typeface="Gautami"/>
+        <a:font script="Taml" typeface="Latha"/>
+        <a:font script="Syrc" typeface="Estrangelo Edessa"/>
+        <a:font script="Orya" typeface="Kalinga"/>
+        <a:font script="Mlym" typeface="Kartika"/>
+        <a:font script="Laoo" typeface="DokChampa"/>
+        <a:font script="Sinh" typeface="Iskoola Pota"/>
+        <a:font script="Mong" typeface="Mongolian Baiti"/>
+        <a:font script="Viet" typeface="Arial"/>
+        <a:font script="Uigh" typeface="Microsoft Uighur"/>
+        <a:font script="Geor" typeface="Sylfaen"/>
+        <a:font script="Armn" typeface="Arial"/>
+        <a:font script="Bugi" typeface="Leelawadee UI"/>
+        <a:font script="Bopo" typeface="Microsoft JhengHei"/>
+        <a:font script="Java" typeface="Javanese Text"/>
+        <a:font script="Lisu" typeface="Segoe UI"/>
+        <a:font script="Mymr" typeface="Myanmar Text"/>
+        <a:font script="Nkoo" typeface="Ebrima"/>
+        <a:font script="Olck" typeface="Nirmala UI"/>
+        <a:font script="Osma" typeface="Ebrima"/>
+        <a:font script="Phag" typeface="Phagspa"/>
+        <a:font script="Syrn" typeface="Estrangelo Edessa"/>
+        <a:font script="Syrj" typeface="Estrangelo Edessa"/>
+        <a:font script="Syre" typeface="Estrangelo Edessa"/>
+        <a:font script="Sora" typeface="Nirmala UI"/>
+        <a:font script="Tale" typeface="Microsoft Tai Le"/>
+        <a:font script="Talu" typeface="Microsoft New Tai Lue"/>
+        <a:font script="Tfng" typeface="Ebrima"/>
+      </a:minorFont>
+    </a:fontScheme>
+    <a:fmtScheme name="Office">
+      <a:fillStyleLst>
+        <a:solidFill>
+          <a:schemeClr val="phClr"/>
+        </a:solidFill>
+        <a:gradFill rotWithShape="1">
+          <a:gsLst>
+            <a:gs pos="0">
+              <a:schemeClr val="phClr">
+                <a:lumMod val="110000"/>
+                <a:satMod val="105000"/>
+                <a:tint val="67000"/>
+              </a:schemeClr>
+            </a:gs>
+            <a:gs pos="50000">
+              <a:schemeClr val="phClr">
+                <a:lumMod val="105000"/>
+                <a:satMod val="103000"/>
+                <a:tint val="73000"/>
+              </a:schemeClr>
+            </a:gs>
+            <a:gs pos="100000">
+              <a:schemeClr val="phClr">
+                <a:lumMod val="105000"/>
+                <a:satMod val="109000"/>
+                <a:tint val="81000"/>
+              </a:schemeClr>
+            </a:gs>
+          </a:gsLst>
+          <a:lin ang="5400000" scaled="0"/>
+        </a:gradFill>
+        <a:gradFill rotWithShape="1">
+          <a:gsLst>
+            <a:gs pos="0">
+              <a:schemeClr val="phClr">
+                <a:satMod val="103000"/>
+                <a:lumMod val="102000"/>
+                <a:tint val="94000"/>
+              </a:schemeClr>
+            </a:gs>
+            <a:gs pos="50000">
+              <a:schemeClr val="phClr">
+                <a:satMod val="110000"/>
+                <a:lumMod val="100000"/>
+                <a:shade val="100000"/>
+              </a:schemeClr>
+            </a:gs>
+            <a:gs pos="100000">
+              <a:schemeClr val="phClr">
+                <a:lumMod val="99000"/>
+                <a:satMod val="120000"/>
+                <a:shade val="78000"/>
+              </a:schemeClr>
+            </a:gs>
+          </a:gsLst>
+          <a:lin ang="5400000" scaled="0"/>
+        </a:gradFill>
+      </a:fillStyleLst>
+      <a:lnStyleLst>
+        <a:ln w="12700" cap="flat" cmpd="sng" algn="ctr">
+          <a:solidFill>
+            <a:schemeClr val="phClr"/>
+          </a:solidFill>
+          <a:prstDash val="solid"/>
+          <a:miter lim="800000"/>
+        </a:ln>
+        <a:ln w="19050" cap="flat" cmpd="sng" algn="ctr">
+          <a:solidFill>
+            <a:schemeClr val="phClr"/>
+          </a:solidFill>
+          <a:prstDash val="solid"/>
+          <a:miter lim="800000"/>
+        </a:ln>
+        <a:ln w="25400" cap="flat" cmpd="sng" algn="ctr">
+          <a:solidFill>
+            <a:schemeClr val="phClr"/>
+          </a:solidFill>
+          <a:prstDash val="solid"/>
+          <a:miter lim="800000"/>
+        </a:ln>
+      </a:lnStyleLst>
+      <a:effectStyleLst>
+        <a:effectStyle>
+          <a:effectLst/>
+        </a:effectStyle>
+        <a:effectStyle>
+          <a:effectLst/>
+        </a:effectStyle>
+        <a:effectStyle>
+          <a:effectLst>
+            <a:outerShdw blurRad="57150" dist="19050" dir="5400000" algn="ctr" rotWithShape="0">
+              <a:srgbClr val="000000">
+                <a:alpha val="63000"/>
+              </a:srgbClr>
+            </a:outerShdw>
+          </a:effectLst>
+        </a:effectStyle>
+      </a:effectStyleLst>
+      <a:bgFillStyleLst>
+        <a:solidFill>
+          <a:schemeClr val="phClr"/>
+        </a:solidFill>
+        <a:solidFill>
+          <a:schemeClr val="phClr">
+            <a:tint val="95000"/>
+            <a:satMod val="170000"/>
+          </a:schemeClr>
+        </a:solidFill>
+        <a:gradFill rotWithShape="1">
+          <a:gsLst>
+            <a:gs pos="0">
+              <a:schemeClr val="phClr">
+                <a:tint val="93000"/>
+                <a:satMod val="150000"/>
+                <a:shade val="98000"/>
+                <a:lumMod val="102000"/>
+              </a:schemeClr>
+            </a:gs>
+            <a:gs pos="50000">
+              <a:schemeClr val="phClr">
+                <a:tint val="98000"/>
+                <a:satMod val="130000"/>
+                <a:shade val="90000"/>
+                <a:lumMod val="103000"/>
+              </a:schemeClr>
+            </a:gs>
+            <a:gs pos="100000">
+              <a:schemeClr val="phClr">
+                <a:shade val="63000"/>
+                <a:satMod val="120000"/>
+              </a:schemeClr>
+            </a:gs>
+          </a:gsLst>
+          <a:lin ang="5400000" scaled="0"/>
+        </a:gradFill>
+      </a:bgFillStyleLst>
+    </a:fmtScheme>
+  </a:themeElements>
+  <a:objectDefaults>
+    <a:lnDef>
+      <a:spPr/>
+      <a:bodyPr/>
+      <a:lstStyle/>
+      <a:style>
+        <a:lnRef idx="2">
+          <a:schemeClr val="accent1"/>
+        </a:lnRef>
+        <a:fillRef idx="0">
+          <a:schemeClr val="accent1"/>
+        </a:fillRef>
+        <a:effectRef idx="1">
+          <a:schemeClr val="accent1"/>
+        </a:effectRef>
+        <a:fontRef idx="minor">
+          <a:schemeClr val="tx1"/>
+        </a:fontRef>
+      </a:style>
+    </a:lnDef>
+  </a:objectDefaults>
+  <a:extraClrSchemeLst/>
+  <a:extLst>
+    <a:ext uri="{05A4C25C-085E-4340-85A3-A5531E510DB2}">
+      <thm15:themeFamily xmlns:thm15="http://schemas.microsoft.com/office/thememl/2012/main" name="Office Theme" id="{2E142A2C-CD16-42D6-873A-C26D2A0506FA}" vid="{1BDDFF52-6CD6-40A5-AB3C-68EB2F1E4D0A}"/>
+    </a:ext>
+  </a:extLst>
+</a:theme>
 </file>